--- a/content/05-teaching-resources/slides/core/14-data-quality-systems-and-analysis.pptx
+++ b/content/05-teaching-resources/slides/core/14-data-quality-systems-and-analysis.pptx
@@ -8,13 +8,19 @@
     <p:sldId id="256" r:id="rId7"/>
     <p:sldId id="257" r:id="rId8"/>
     <p:sldId id="258" r:id="rId9"/>
-    <p:sldId id="259" r:id="rId11"/>
+    <p:sldId id="259" r:id="rId10"/>
     <p:sldId id="260" r:id="rId12"/>
     <p:sldId id="261" r:id="rId13"/>
     <p:sldId id="262" r:id="rId14"/>
     <p:sldId id="263" r:id="rId15"/>
     <p:sldId id="264" r:id="rId16"/>
     <p:sldId id="265" r:id="rId17"/>
+    <p:sldId id="266" r:id="rId18"/>
+    <p:sldId id="267" r:id="rId19"/>
+    <p:sldId id="268" r:id="rId20"/>
+    <p:sldId id="269" r:id="rId21"/>
+    <p:sldId id="270" r:id="rId22"/>
+    <p:sldId id="271" r:id="rId23"/>
   </p:sldIdLst>
   <p:sldSz cx="12191695" cy="6858000" type="screen4x3"/>
   <p:notesSz cx="6858000" cy="9144000"/>
@@ -581,7 +587,22 @@
           <a:lstStyle/>
           <a:p>
             <a:r>
-              <a:t>Give students a few minutes to answer on mini whiteboards or paper, then reveal the answers on the next slide.</a:t>
+              <a:t>Answers:</a:t>
+            </a:r>
+          </a:p>
+          <a:p>
+            <a:r>
+              <a:t>1. Velocity.</a:t>
+            </a:r>
+          </a:p>
+          <a:p>
+            <a:r>
+              <a:t>2. Veracity.</a:t>
+            </a:r>
+          </a:p>
+          <a:p>
+            <a:r>
+              <a:t>3. E.g. validation, verification, consistency.</a:t>
             </a:r>
           </a:p>
         </p:txBody>
@@ -651,7 +672,22 @@
           <a:lstStyle/>
           <a:p>
             <a:r>
-              <a:t>Talk through any answers the class found difficult.</a:t>
+              <a:t>Answers:</a:t>
+            </a:r>
+          </a:p>
+          <a:p>
+            <a:r>
+              <a:t>1. Structure, clean, validate, enrich, output.</a:t>
+            </a:r>
+          </a:p>
+          <a:p>
+            <a:r>
+              <a:t>2. Swapping characters, e.g. 1234 to 1243.</a:t>
+            </a:r>
+          </a:p>
+          <a:p>
+            <a:r>
+              <a:t>3. pandas.</a:t>
             </a:r>
           </a:p>
         </p:txBody>
@@ -721,7 +757,22 @@
           <a:lstStyle/>
           <a:p>
             <a:r>
-              <a:t>This mirrors the pandas and Matplotlib skills needed in the Employer Set Project.</a:t>
+              <a:t>Answers:</a:t>
+            </a:r>
+          </a:p>
+          <a:p>
+            <a:r>
+              <a:t>1. A line graph.</a:t>
+            </a:r>
+          </a:p>
+          <a:p>
+            <a:r>
+              <a:t>2. Relational.</a:t>
+            </a:r>
+          </a:p>
+          <a:p>
+            <a:r>
+              <a:t>3. So the audience understands what's shown.</a:t>
             </a:r>
           </a:p>
         </p:txBody>
@@ -747,6 +798,216 @@
 </file>
 
 <file path=ppt/notesSlides/notesSlide5.xml><?xml version="1.0" encoding="utf-8"?>
+<p:notes xmlns:a="http://schemas.openxmlformats.org/drawingml/2006/main" xmlns:p="http://schemas.openxmlformats.org/presentationml/2006/main" xmlns:r="http://schemas.openxmlformats.org/officeDocument/2006/relationships">
+  <p:cSld>
+    <p:spTree>
+      <p:nvGrpSpPr>
+        <p:cNvPr id="1" name=""/>
+        <p:cNvGrpSpPr/>
+        <p:nvPr/>
+      </p:nvGrpSpPr>
+      <p:grpSpPr>
+        <a:xfrm>
+          <a:off x="0" y="0"/>
+          <a:ext cx="0" cy="0"/>
+          <a:chOff x="0" y="0"/>
+          <a:chExt cx="0" cy="0"/>
+        </a:xfrm>
+      </p:grpSpPr>
+      <p:sp>
+        <p:nvSpPr>
+          <p:cNvPr id="2" name="Slide Image Placeholder 1"/>
+          <p:cNvSpPr>
+            <a:spLocks noGrp="1"/>
+          </p:cNvSpPr>
+          <p:nvPr>
+            <p:ph type="sldImg" idx="2"/>
+          </p:nvPr>
+        </p:nvSpPr>
+        <p:spPr/>
+      </p:sp>
+      <p:sp>
+        <p:nvSpPr>
+          <p:cNvPr id="3" name="Notes Placeholder 2"/>
+          <p:cNvSpPr>
+            <a:spLocks noGrp="1"/>
+          </p:cNvSpPr>
+          <p:nvPr>
+            <p:ph type="body" idx="3" sz="quarter"/>
+          </p:nvPr>
+        </p:nvSpPr>
+        <p:spPr/>
+        <p:txBody>
+          <a:bodyPr/>
+          <a:lstStyle/>
+          <a:p>
+            <a:r>
+              <a:t>Give students a few minutes to answer on mini whiteboards or paper, then reveal the answers on the next slide.</a:t>
+            </a:r>
+          </a:p>
+        </p:txBody>
+      </p:sp>
+      <p:sp>
+        <p:nvSpPr>
+          <p:cNvPr id="4" name="Slide Number Placeholder 3"/>
+          <p:cNvSpPr>
+            <a:spLocks noGrp="1"/>
+          </p:cNvSpPr>
+          <p:nvPr>
+            <p:ph type="sldNum" idx="5" sz="quarter"/>
+          </p:nvPr>
+        </p:nvSpPr>
+        <p:spPr/>
+      </p:sp>
+    </p:spTree>
+  </p:cSld>
+  <p:clrMapOvr>
+    <a:masterClrMapping/>
+  </p:clrMapOvr>
+</p:notes>
+</file>
+
+<file path=ppt/notesSlides/notesSlide6.xml><?xml version="1.0" encoding="utf-8"?>
+<p:notes xmlns:a="http://schemas.openxmlformats.org/drawingml/2006/main" xmlns:p="http://schemas.openxmlformats.org/presentationml/2006/main" xmlns:r="http://schemas.openxmlformats.org/officeDocument/2006/relationships">
+  <p:cSld>
+    <p:spTree>
+      <p:nvGrpSpPr>
+        <p:cNvPr id="1" name=""/>
+        <p:cNvGrpSpPr/>
+        <p:nvPr/>
+      </p:nvGrpSpPr>
+      <p:grpSpPr>
+        <a:xfrm>
+          <a:off x="0" y="0"/>
+          <a:ext cx="0" cy="0"/>
+          <a:chOff x="0" y="0"/>
+          <a:chExt cx="0" cy="0"/>
+        </a:xfrm>
+      </p:grpSpPr>
+      <p:sp>
+        <p:nvSpPr>
+          <p:cNvPr id="2" name="Slide Image Placeholder 1"/>
+          <p:cNvSpPr>
+            <a:spLocks noGrp="1"/>
+          </p:cNvSpPr>
+          <p:nvPr>
+            <p:ph type="sldImg" idx="2"/>
+          </p:nvPr>
+        </p:nvSpPr>
+        <p:spPr/>
+      </p:sp>
+      <p:sp>
+        <p:nvSpPr>
+          <p:cNvPr id="3" name="Notes Placeholder 2"/>
+          <p:cNvSpPr>
+            <a:spLocks noGrp="1"/>
+          </p:cNvSpPr>
+          <p:nvPr>
+            <p:ph type="body" idx="3" sz="quarter"/>
+          </p:nvPr>
+        </p:nvSpPr>
+        <p:spPr/>
+        <p:txBody>
+          <a:bodyPr/>
+          <a:lstStyle/>
+          <a:p>
+            <a:r>
+              <a:t>Talk through any answers the class found difficult.</a:t>
+            </a:r>
+          </a:p>
+        </p:txBody>
+      </p:sp>
+      <p:sp>
+        <p:nvSpPr>
+          <p:cNvPr id="4" name="Slide Number Placeholder 3"/>
+          <p:cNvSpPr>
+            <a:spLocks noGrp="1"/>
+          </p:cNvSpPr>
+          <p:nvPr>
+            <p:ph type="sldNum" idx="5" sz="quarter"/>
+          </p:nvPr>
+        </p:nvSpPr>
+        <p:spPr/>
+      </p:sp>
+    </p:spTree>
+  </p:cSld>
+  <p:clrMapOvr>
+    <a:masterClrMapping/>
+  </p:clrMapOvr>
+</p:notes>
+</file>
+
+<file path=ppt/notesSlides/notesSlide7.xml><?xml version="1.0" encoding="utf-8"?>
+<p:notes xmlns:a="http://schemas.openxmlformats.org/drawingml/2006/main" xmlns:p="http://schemas.openxmlformats.org/presentationml/2006/main" xmlns:r="http://schemas.openxmlformats.org/officeDocument/2006/relationships">
+  <p:cSld>
+    <p:spTree>
+      <p:nvGrpSpPr>
+        <p:cNvPr id="1" name=""/>
+        <p:cNvGrpSpPr/>
+        <p:nvPr/>
+      </p:nvGrpSpPr>
+      <p:grpSpPr>
+        <a:xfrm>
+          <a:off x="0" y="0"/>
+          <a:ext cx="0" cy="0"/>
+          <a:chOff x="0" y="0"/>
+          <a:chExt cx="0" cy="0"/>
+        </a:xfrm>
+      </p:grpSpPr>
+      <p:sp>
+        <p:nvSpPr>
+          <p:cNvPr id="2" name="Slide Image Placeholder 1"/>
+          <p:cNvSpPr>
+            <a:spLocks noGrp="1"/>
+          </p:cNvSpPr>
+          <p:nvPr>
+            <p:ph type="sldImg" idx="2"/>
+          </p:nvPr>
+        </p:nvSpPr>
+        <p:spPr/>
+      </p:sp>
+      <p:sp>
+        <p:nvSpPr>
+          <p:cNvPr id="3" name="Notes Placeholder 2"/>
+          <p:cNvSpPr>
+            <a:spLocks noGrp="1"/>
+          </p:cNvSpPr>
+          <p:nvPr>
+            <p:ph type="body" idx="3" sz="quarter"/>
+          </p:nvPr>
+        </p:nvSpPr>
+        <p:spPr/>
+        <p:txBody>
+          <a:bodyPr/>
+          <a:lstStyle/>
+          <a:p>
+            <a:r>
+              <a:t>This mirrors the pandas and Matplotlib skills needed in the Employer Set Project.</a:t>
+            </a:r>
+          </a:p>
+        </p:txBody>
+      </p:sp>
+      <p:sp>
+        <p:nvSpPr>
+          <p:cNvPr id="4" name="Slide Number Placeholder 3"/>
+          <p:cNvSpPr>
+            <a:spLocks noGrp="1"/>
+          </p:cNvSpPr>
+          <p:nvPr>
+            <p:ph type="sldNum" idx="5" sz="quarter"/>
+          </p:nvPr>
+        </p:nvSpPr>
+        <p:spPr/>
+      </p:sp>
+    </p:spTree>
+  </p:cSld>
+  <p:clrMapOvr>
+    <a:masterClrMapping/>
+  </p:clrMapOvr>
+</p:notes>
+</file>
+
+<file path=ppt/notesSlides/notesSlide8.xml><?xml version="1.0" encoding="utf-8"?>
 <p:notes xmlns:a="http://schemas.openxmlformats.org/drawingml/2006/main" xmlns:p="http://schemas.openxmlformats.org/presentationml/2006/main" xmlns:r="http://schemas.openxmlformats.org/officeDocument/2006/relationships">
   <p:cSld>
     <p:spTree>
@@ -4122,6 +4383,3717 @@
     <p:bg>
       <p:bgPr>
         <a:solidFill>
+          <a:srgbClr val="FFFFFF"/>
+        </a:solidFill>
+        <a:effectLst/>
+      </p:bgPr>
+    </p:bg>
+    <p:spTree>
+      <p:nvGrpSpPr>
+        <p:cNvPr id="1" name=""/>
+        <p:cNvGrpSpPr/>
+        <p:nvPr/>
+      </p:nvGrpSpPr>
+      <p:grpSpPr/>
+      <p:sp>
+        <p:nvSpPr>
+          <p:cNvPr id="2" name="TextBox 1"/>
+          <p:cNvSpPr txBox="1"/>
+          <p:nvPr/>
+        </p:nvSpPr>
+        <p:spPr>
+          <a:xfrm>
+            <a:off x="548640" y="320040"/>
+            <a:ext cx="11094415" cy="274320"/>
+          </a:xfrm>
+          <a:prstGeom prst="rect">
+            <a:avLst/>
+          </a:prstGeom>
+          <a:noFill/>
+        </p:spPr>
+        <p:txBody>
+          <a:bodyPr wrap="square" anchor="t" lIns="0" rIns="0" tIns="0" bIns="0"/>
+          <a:lstStyle/>
+          <a:p>
+            <a:pPr algn="l"/>
+            <a:r>
+              <a:rPr sz="1100" b="1" i="0">
+                <a:solidFill>
+                  <a:srgbClr val="54595D"/>
+                </a:solidFill>
+                <a:latin typeface="Calibri"/>
+              </a:rPr>
+              <a:t>CORE COMPONENT  ·  Core Paper 2</a:t>
+            </a:r>
+          </a:p>
+        </p:txBody>
+      </p:sp>
+      <p:sp>
+        <p:nvSpPr>
+          <p:cNvPr id="3" name="TextBox 2"/>
+          <p:cNvSpPr txBox="1"/>
+          <p:nvPr/>
+        </p:nvSpPr>
+        <p:spPr>
+          <a:xfrm>
+            <a:off x="548640" y="566928"/>
+            <a:ext cx="11094415" cy="822960"/>
+          </a:xfrm>
+          <a:prstGeom prst="rect">
+            <a:avLst/>
+          </a:prstGeom>
+          <a:noFill/>
+        </p:spPr>
+        <p:txBody>
+          <a:bodyPr wrap="square" anchor="ctr" lIns="0" rIns="0" tIns="0" bIns="0"/>
+          <a:lstStyle/>
+          <a:p>
+            <a:pPr algn="l"/>
+            <a:r>
+              <a:rPr sz="3200" b="1" i="0">
+                <a:solidFill>
+                  <a:srgbClr val="03306E"/>
+                </a:solidFill>
+                <a:latin typeface="Cambria"/>
+              </a:rPr>
+              <a:t>Visualisation and data models</a:t>
+            </a:r>
+          </a:p>
+        </p:txBody>
+      </p:sp>
+      <p:sp>
+        <p:nvSpPr>
+          <p:cNvPr id="4" name="TextBox 3"/>
+          <p:cNvSpPr txBox="1"/>
+          <p:nvPr/>
+        </p:nvSpPr>
+        <p:spPr>
+          <a:xfrm>
+            <a:off x="548640" y="6446520"/>
+            <a:ext cx="8229600" cy="274320"/>
+          </a:xfrm>
+          <a:prstGeom prst="rect">
+            <a:avLst/>
+          </a:prstGeom>
+          <a:noFill/>
+        </p:spPr>
+        <p:txBody>
+          <a:bodyPr wrap="square" anchor="t" lIns="0" rIns="0" tIns="0" bIns="0"/>
+          <a:lstStyle/>
+          <a:p>
+            <a:pPr algn="l"/>
+            <a:r>
+              <a:rPr sz="1000" b="0" i="0">
+                <a:solidFill>
+                  <a:srgbClr val="54595D"/>
+                </a:solidFill>
+                <a:latin typeface="Calibri"/>
+              </a:rPr>
+              <a:t>Digital Software Development T Level  ·  Data Quality, Systems and Analysis</a:t>
+            </a:r>
+          </a:p>
+        </p:txBody>
+      </p:sp>
+      <p:sp>
+        <p:nvSpPr>
+          <p:cNvPr id="5" name="TextBox 4"/>
+          <p:cNvSpPr txBox="1"/>
+          <p:nvPr/>
+        </p:nvSpPr>
+        <p:spPr>
+          <a:xfrm>
+            <a:off x="10728655" y="6446520"/>
+            <a:ext cx="914400" cy="274320"/>
+          </a:xfrm>
+          <a:prstGeom prst="rect">
+            <a:avLst/>
+          </a:prstGeom>
+          <a:noFill/>
+        </p:spPr>
+        <p:txBody>
+          <a:bodyPr wrap="square" anchor="t" lIns="0" rIns="0" tIns="0" bIns="0"/>
+          <a:lstStyle/>
+          <a:p>
+            <a:pPr algn="r"/>
+            <a:r>
+              <a:rPr sz="1000" b="0" i="0">
+                <a:solidFill>
+                  <a:srgbClr val="54595D"/>
+                </a:solidFill>
+                <a:latin typeface="Calibri"/>
+              </a:rPr>
+              <a:t>10</a:t>
+            </a:r>
+          </a:p>
+        </p:txBody>
+      </p:sp>
+      <p:sp>
+        <p:nvSpPr>
+          <p:cNvPr id="6" name="Rounded Rectangle 5"/>
+          <p:cNvSpPr/>
+          <p:nvPr/>
+        </p:nvSpPr>
+        <p:spPr>
+          <a:xfrm>
+            <a:off x="548640" y="1600200"/>
+            <a:ext cx="5410047" cy="2148840"/>
+          </a:xfrm>
+          <a:prstGeom prst="roundRect">
+            <a:avLst>
+              <a:gd name="adj" fmla="val 6000"/>
+            </a:avLst>
+          </a:prstGeom>
+          <a:solidFill>
+            <a:srgbClr val="EAF3FF"/>
+          </a:solidFill>
+          <a:ln>
+            <a:noFill/>
+          </a:ln>
+          <a:effectLst/>
+        </p:spPr>
+        <p:style>
+          <a:lnRef idx="1">
+            <a:schemeClr val="accent1"/>
+          </a:lnRef>
+          <a:fillRef idx="3">
+            <a:schemeClr val="accent1"/>
+          </a:fillRef>
+          <a:effectRef idx="2">
+            <a:schemeClr val="accent1"/>
+          </a:effectRef>
+          <a:fontRef idx="minor">
+            <a:schemeClr val="lt1"/>
+          </a:fontRef>
+        </p:style>
+        <p:txBody>
+          <a:bodyPr rtlCol="0" anchor="ctr"/>
+          <a:lstStyle/>
+          <a:p/>
+        </p:txBody>
+      </p:sp>
+      <p:sp>
+        <p:nvSpPr>
+          <p:cNvPr id="7" name="Oval 6"/>
+          <p:cNvSpPr/>
+          <p:nvPr/>
+        </p:nvSpPr>
+        <p:spPr>
+          <a:xfrm>
+            <a:off x="777240" y="1828800"/>
+            <a:ext cx="457200" cy="457200"/>
+          </a:xfrm>
+          <a:prstGeom prst="ellipse">
+            <a:avLst/>
+          </a:prstGeom>
+          <a:solidFill>
+            <a:srgbClr val="F2B705"/>
+          </a:solidFill>
+          <a:ln>
+            <a:noFill/>
+          </a:ln>
+          <a:effectLst/>
+        </p:spPr>
+        <p:style>
+          <a:lnRef idx="1">
+            <a:schemeClr val="accent1"/>
+          </a:lnRef>
+          <a:fillRef idx="3">
+            <a:schemeClr val="accent1"/>
+          </a:fillRef>
+          <a:effectRef idx="2">
+            <a:schemeClr val="accent1"/>
+          </a:effectRef>
+          <a:fontRef idx="minor">
+            <a:schemeClr val="lt1"/>
+          </a:fontRef>
+        </p:style>
+        <p:txBody>
+          <a:bodyPr rtlCol="0" anchor="ctr" lIns="0" rIns="0" tIns="0" bIns="0"/>
+          <a:lstStyle/>
+          <a:p>
+            <a:pPr algn="ctr"/>
+            <a:r>
+              <a:rPr sz="1500" b="1">
+                <a:solidFill>
+                  <a:srgbClr val="202122"/>
+                </a:solidFill>
+                <a:latin typeface="Calibri"/>
+              </a:rPr>
+              <a:t>1</a:t>
+            </a:r>
+          </a:p>
+        </p:txBody>
+      </p:sp>
+      <p:sp>
+        <p:nvSpPr>
+          <p:cNvPr id="8" name="TextBox 7"/>
+          <p:cNvSpPr txBox="1"/>
+          <p:nvPr/>
+        </p:nvSpPr>
+        <p:spPr>
+          <a:xfrm>
+            <a:off x="1371600" y="1801368"/>
+            <a:ext cx="4404207" cy="512064"/>
+          </a:xfrm>
+          <a:prstGeom prst="rect">
+            <a:avLst/>
+          </a:prstGeom>
+          <a:noFill/>
+        </p:spPr>
+        <p:txBody>
+          <a:bodyPr wrap="square" anchor="ctr" lIns="0" rIns="0" tIns="0" bIns="0"/>
+          <a:lstStyle/>
+          <a:p>
+            <a:pPr algn="l"/>
+            <a:r>
+              <a:rPr sz="1900" b="1" i="0">
+                <a:solidFill>
+                  <a:srgbClr val="03306E"/>
+                </a:solidFill>
+                <a:latin typeface="Calibri"/>
+              </a:rPr>
+              <a:t>Visualisation</a:t>
+            </a:r>
+          </a:p>
+        </p:txBody>
+      </p:sp>
+      <p:sp>
+        <p:nvSpPr>
+          <p:cNvPr id="9" name="TextBox 8"/>
+          <p:cNvSpPr txBox="1"/>
+          <p:nvPr/>
+        </p:nvSpPr>
+        <p:spPr>
+          <a:xfrm>
+            <a:off x="777240" y="2468880"/>
+            <a:ext cx="4952847" cy="1143000"/>
+          </a:xfrm>
+          <a:prstGeom prst="rect">
+            <a:avLst/>
+          </a:prstGeom>
+          <a:noFill/>
+        </p:spPr>
+        <p:txBody>
+          <a:bodyPr wrap="square" anchor="t" lIns="0" rIns="0" tIns="0" bIns="0"/>
+          <a:lstStyle/>
+          <a:p>
+            <a:pPr algn="l"/>
+            <a:r>
+              <a:rPr sz="2000" b="0" i="0">
+                <a:solidFill>
+                  <a:srgbClr val="202122"/>
+                </a:solidFill>
+                <a:latin typeface="Calibri"/>
+              </a:rPr>
+              <a:t>Graphs, charts, tables, reports, dashboards, infographics. Choose by data type, audience and brief.</a:t>
+            </a:r>
+          </a:p>
+        </p:txBody>
+      </p:sp>
+      <p:sp>
+        <p:nvSpPr>
+          <p:cNvPr id="10" name="Rounded Rectangle 9"/>
+          <p:cNvSpPr/>
+          <p:nvPr/>
+        </p:nvSpPr>
+        <p:spPr>
+          <a:xfrm>
+            <a:off x="6233007" y="1600200"/>
+            <a:ext cx="5410047" cy="2148840"/>
+          </a:xfrm>
+          <a:prstGeom prst="roundRect">
+            <a:avLst>
+              <a:gd name="adj" fmla="val 6000"/>
+            </a:avLst>
+          </a:prstGeom>
+          <a:solidFill>
+            <a:srgbClr val="EAF3FF"/>
+          </a:solidFill>
+          <a:ln>
+            <a:noFill/>
+          </a:ln>
+          <a:effectLst/>
+        </p:spPr>
+        <p:style>
+          <a:lnRef idx="1">
+            <a:schemeClr val="accent1"/>
+          </a:lnRef>
+          <a:fillRef idx="3">
+            <a:schemeClr val="accent1"/>
+          </a:fillRef>
+          <a:effectRef idx="2">
+            <a:schemeClr val="accent1"/>
+          </a:effectRef>
+          <a:fontRef idx="minor">
+            <a:schemeClr val="lt1"/>
+          </a:fontRef>
+        </p:style>
+        <p:txBody>
+          <a:bodyPr rtlCol="0" anchor="ctr"/>
+          <a:lstStyle/>
+          <a:p/>
+        </p:txBody>
+      </p:sp>
+      <p:sp>
+        <p:nvSpPr>
+          <p:cNvPr id="11" name="Oval 10"/>
+          <p:cNvSpPr/>
+          <p:nvPr/>
+        </p:nvSpPr>
+        <p:spPr>
+          <a:xfrm>
+            <a:off x="6461607" y="1828800"/>
+            <a:ext cx="457200" cy="457200"/>
+          </a:xfrm>
+          <a:prstGeom prst="ellipse">
+            <a:avLst/>
+          </a:prstGeom>
+          <a:solidFill>
+            <a:srgbClr val="F2B705"/>
+          </a:solidFill>
+          <a:ln>
+            <a:noFill/>
+          </a:ln>
+          <a:effectLst/>
+        </p:spPr>
+        <p:style>
+          <a:lnRef idx="1">
+            <a:schemeClr val="accent1"/>
+          </a:lnRef>
+          <a:fillRef idx="3">
+            <a:schemeClr val="accent1"/>
+          </a:fillRef>
+          <a:effectRef idx="2">
+            <a:schemeClr val="accent1"/>
+          </a:effectRef>
+          <a:fontRef idx="minor">
+            <a:schemeClr val="lt1"/>
+          </a:fontRef>
+        </p:style>
+        <p:txBody>
+          <a:bodyPr rtlCol="0" anchor="ctr" lIns="0" rIns="0" tIns="0" bIns="0"/>
+          <a:lstStyle/>
+          <a:p>
+            <a:pPr algn="ctr"/>
+            <a:r>
+              <a:rPr sz="1500" b="1">
+                <a:solidFill>
+                  <a:srgbClr val="202122"/>
+                </a:solidFill>
+                <a:latin typeface="Calibri"/>
+              </a:rPr>
+              <a:t>2</a:t>
+            </a:r>
+          </a:p>
+        </p:txBody>
+      </p:sp>
+      <p:sp>
+        <p:nvSpPr>
+          <p:cNvPr id="12" name="TextBox 11"/>
+          <p:cNvSpPr txBox="1"/>
+          <p:nvPr/>
+        </p:nvSpPr>
+        <p:spPr>
+          <a:xfrm>
+            <a:off x="7055967" y="1801368"/>
+            <a:ext cx="4404207" cy="512064"/>
+          </a:xfrm>
+          <a:prstGeom prst="rect">
+            <a:avLst/>
+          </a:prstGeom>
+          <a:noFill/>
+        </p:spPr>
+        <p:txBody>
+          <a:bodyPr wrap="square" anchor="ctr" lIns="0" rIns="0" tIns="0" bIns="0"/>
+          <a:lstStyle/>
+          <a:p>
+            <a:pPr algn="l"/>
+            <a:r>
+              <a:rPr sz="1900" b="1" i="0">
+                <a:solidFill>
+                  <a:srgbClr val="03306E"/>
+                </a:solidFill>
+                <a:latin typeface="Calibri"/>
+              </a:rPr>
+              <a:t>Hierarchical model</a:t>
+            </a:r>
+          </a:p>
+        </p:txBody>
+      </p:sp>
+      <p:sp>
+        <p:nvSpPr>
+          <p:cNvPr id="13" name="TextBox 12"/>
+          <p:cNvSpPr txBox="1"/>
+          <p:nvPr/>
+        </p:nvSpPr>
+        <p:spPr>
+          <a:xfrm>
+            <a:off x="6461607" y="2468880"/>
+            <a:ext cx="4952847" cy="1143000"/>
+          </a:xfrm>
+          <a:prstGeom prst="rect">
+            <a:avLst/>
+          </a:prstGeom>
+          <a:noFill/>
+        </p:spPr>
+        <p:txBody>
+          <a:bodyPr wrap="square" anchor="t" lIns="0" rIns="0" tIns="0" bIns="0"/>
+          <a:lstStyle/>
+          <a:p>
+            <a:pPr algn="l"/>
+            <a:r>
+              <a:rPr sz="2000" b="0" i="0">
+                <a:solidFill>
+                  <a:srgbClr val="202122"/>
+                </a:solidFill>
+                <a:latin typeface="Calibri"/>
+              </a:rPr>
+              <a:t>Parent and child tree.</a:t>
+            </a:r>
+          </a:p>
+        </p:txBody>
+      </p:sp>
+      <p:sp>
+        <p:nvSpPr>
+          <p:cNvPr id="14" name="Rounded Rectangle 13"/>
+          <p:cNvSpPr/>
+          <p:nvPr/>
+        </p:nvSpPr>
+        <p:spPr>
+          <a:xfrm>
+            <a:off x="548640" y="4023360"/>
+            <a:ext cx="5410047" cy="2148840"/>
+          </a:xfrm>
+          <a:prstGeom prst="roundRect">
+            <a:avLst>
+              <a:gd name="adj" fmla="val 6000"/>
+            </a:avLst>
+          </a:prstGeom>
+          <a:solidFill>
+            <a:srgbClr val="EAF3FF"/>
+          </a:solidFill>
+          <a:ln>
+            <a:noFill/>
+          </a:ln>
+          <a:effectLst/>
+        </p:spPr>
+        <p:style>
+          <a:lnRef idx="1">
+            <a:schemeClr val="accent1"/>
+          </a:lnRef>
+          <a:fillRef idx="3">
+            <a:schemeClr val="accent1"/>
+          </a:fillRef>
+          <a:effectRef idx="2">
+            <a:schemeClr val="accent1"/>
+          </a:effectRef>
+          <a:fontRef idx="minor">
+            <a:schemeClr val="lt1"/>
+          </a:fontRef>
+        </p:style>
+        <p:txBody>
+          <a:bodyPr rtlCol="0" anchor="ctr"/>
+          <a:lstStyle/>
+          <a:p/>
+        </p:txBody>
+      </p:sp>
+      <p:sp>
+        <p:nvSpPr>
+          <p:cNvPr id="15" name="Oval 14"/>
+          <p:cNvSpPr/>
+          <p:nvPr/>
+        </p:nvSpPr>
+        <p:spPr>
+          <a:xfrm>
+            <a:off x="777240" y="4251960"/>
+            <a:ext cx="457200" cy="457200"/>
+          </a:xfrm>
+          <a:prstGeom prst="ellipse">
+            <a:avLst/>
+          </a:prstGeom>
+          <a:solidFill>
+            <a:srgbClr val="F2B705"/>
+          </a:solidFill>
+          <a:ln>
+            <a:noFill/>
+          </a:ln>
+          <a:effectLst/>
+        </p:spPr>
+        <p:style>
+          <a:lnRef idx="1">
+            <a:schemeClr val="accent1"/>
+          </a:lnRef>
+          <a:fillRef idx="3">
+            <a:schemeClr val="accent1"/>
+          </a:fillRef>
+          <a:effectRef idx="2">
+            <a:schemeClr val="accent1"/>
+          </a:effectRef>
+          <a:fontRef idx="minor">
+            <a:schemeClr val="lt1"/>
+          </a:fontRef>
+        </p:style>
+        <p:txBody>
+          <a:bodyPr rtlCol="0" anchor="ctr" lIns="0" rIns="0" tIns="0" bIns="0"/>
+          <a:lstStyle/>
+          <a:p>
+            <a:pPr algn="ctr"/>
+            <a:r>
+              <a:rPr sz="1500" b="1">
+                <a:solidFill>
+                  <a:srgbClr val="202122"/>
+                </a:solidFill>
+                <a:latin typeface="Calibri"/>
+              </a:rPr>
+              <a:t>3</a:t>
+            </a:r>
+          </a:p>
+        </p:txBody>
+      </p:sp>
+      <p:sp>
+        <p:nvSpPr>
+          <p:cNvPr id="16" name="TextBox 15"/>
+          <p:cNvSpPr txBox="1"/>
+          <p:nvPr/>
+        </p:nvSpPr>
+        <p:spPr>
+          <a:xfrm>
+            <a:off x="1371600" y="4224528"/>
+            <a:ext cx="4404207" cy="512064"/>
+          </a:xfrm>
+          <a:prstGeom prst="rect">
+            <a:avLst/>
+          </a:prstGeom>
+          <a:noFill/>
+        </p:spPr>
+        <p:txBody>
+          <a:bodyPr wrap="square" anchor="ctr" lIns="0" rIns="0" tIns="0" bIns="0"/>
+          <a:lstStyle/>
+          <a:p>
+            <a:pPr algn="l"/>
+            <a:r>
+              <a:rPr sz="1900" b="1" i="0">
+                <a:solidFill>
+                  <a:srgbClr val="03306E"/>
+                </a:solidFill>
+                <a:latin typeface="Calibri"/>
+              </a:rPr>
+              <a:t>Network model</a:t>
+            </a:r>
+          </a:p>
+        </p:txBody>
+      </p:sp>
+      <p:sp>
+        <p:nvSpPr>
+          <p:cNvPr id="17" name="TextBox 16"/>
+          <p:cNvSpPr txBox="1"/>
+          <p:nvPr/>
+        </p:nvSpPr>
+        <p:spPr>
+          <a:xfrm>
+            <a:off x="777240" y="4892040"/>
+            <a:ext cx="4952847" cy="1143000"/>
+          </a:xfrm>
+          <a:prstGeom prst="rect">
+            <a:avLst/>
+          </a:prstGeom>
+          <a:noFill/>
+        </p:spPr>
+        <p:txBody>
+          <a:bodyPr wrap="square" anchor="t" lIns="0" rIns="0" tIns="0" bIns="0"/>
+          <a:lstStyle/>
+          <a:p>
+            <a:pPr algn="l"/>
+            <a:r>
+              <a:rPr sz="2000" b="0" i="0">
+                <a:solidFill>
+                  <a:srgbClr val="202122"/>
+                </a:solidFill>
+                <a:latin typeface="Calibri"/>
+              </a:rPr>
+              <a:t>Records with many links.</a:t>
+            </a:r>
+          </a:p>
+        </p:txBody>
+      </p:sp>
+      <p:sp>
+        <p:nvSpPr>
+          <p:cNvPr id="18" name="Rounded Rectangle 17"/>
+          <p:cNvSpPr/>
+          <p:nvPr/>
+        </p:nvSpPr>
+        <p:spPr>
+          <a:xfrm>
+            <a:off x="6233007" y="4023360"/>
+            <a:ext cx="5410047" cy="2148840"/>
+          </a:xfrm>
+          <a:prstGeom prst="roundRect">
+            <a:avLst>
+              <a:gd name="adj" fmla="val 6000"/>
+            </a:avLst>
+          </a:prstGeom>
+          <a:solidFill>
+            <a:srgbClr val="EAF3FF"/>
+          </a:solidFill>
+          <a:ln>
+            <a:noFill/>
+          </a:ln>
+          <a:effectLst/>
+        </p:spPr>
+        <p:style>
+          <a:lnRef idx="1">
+            <a:schemeClr val="accent1"/>
+          </a:lnRef>
+          <a:fillRef idx="3">
+            <a:schemeClr val="accent1"/>
+          </a:fillRef>
+          <a:effectRef idx="2">
+            <a:schemeClr val="accent1"/>
+          </a:effectRef>
+          <a:fontRef idx="minor">
+            <a:schemeClr val="lt1"/>
+          </a:fontRef>
+        </p:style>
+        <p:txBody>
+          <a:bodyPr rtlCol="0" anchor="ctr"/>
+          <a:lstStyle/>
+          <a:p/>
+        </p:txBody>
+      </p:sp>
+      <p:sp>
+        <p:nvSpPr>
+          <p:cNvPr id="19" name="Oval 18"/>
+          <p:cNvSpPr/>
+          <p:nvPr/>
+        </p:nvSpPr>
+        <p:spPr>
+          <a:xfrm>
+            <a:off x="6461607" y="4251960"/>
+            <a:ext cx="457200" cy="457200"/>
+          </a:xfrm>
+          <a:prstGeom prst="ellipse">
+            <a:avLst/>
+          </a:prstGeom>
+          <a:solidFill>
+            <a:srgbClr val="F2B705"/>
+          </a:solidFill>
+          <a:ln>
+            <a:noFill/>
+          </a:ln>
+          <a:effectLst/>
+        </p:spPr>
+        <p:style>
+          <a:lnRef idx="1">
+            <a:schemeClr val="accent1"/>
+          </a:lnRef>
+          <a:fillRef idx="3">
+            <a:schemeClr val="accent1"/>
+          </a:fillRef>
+          <a:effectRef idx="2">
+            <a:schemeClr val="accent1"/>
+          </a:effectRef>
+          <a:fontRef idx="minor">
+            <a:schemeClr val="lt1"/>
+          </a:fontRef>
+        </p:style>
+        <p:txBody>
+          <a:bodyPr rtlCol="0" anchor="ctr" lIns="0" rIns="0" tIns="0" bIns="0"/>
+          <a:lstStyle/>
+          <a:p>
+            <a:pPr algn="ctr"/>
+            <a:r>
+              <a:rPr sz="1500" b="1">
+                <a:solidFill>
+                  <a:srgbClr val="202122"/>
+                </a:solidFill>
+                <a:latin typeface="Calibri"/>
+              </a:rPr>
+              <a:t>4</a:t>
+            </a:r>
+          </a:p>
+        </p:txBody>
+      </p:sp>
+      <p:sp>
+        <p:nvSpPr>
+          <p:cNvPr id="20" name="TextBox 19"/>
+          <p:cNvSpPr txBox="1"/>
+          <p:nvPr/>
+        </p:nvSpPr>
+        <p:spPr>
+          <a:xfrm>
+            <a:off x="7055967" y="4224528"/>
+            <a:ext cx="4404207" cy="512064"/>
+          </a:xfrm>
+          <a:prstGeom prst="rect">
+            <a:avLst/>
+          </a:prstGeom>
+          <a:noFill/>
+        </p:spPr>
+        <p:txBody>
+          <a:bodyPr wrap="square" anchor="ctr" lIns="0" rIns="0" tIns="0" bIns="0"/>
+          <a:lstStyle/>
+          <a:p>
+            <a:pPr algn="l"/>
+            <a:r>
+              <a:rPr sz="1900" b="1" i="0">
+                <a:solidFill>
+                  <a:srgbClr val="03306E"/>
+                </a:solidFill>
+                <a:latin typeface="Calibri"/>
+              </a:rPr>
+              <a:t>Relational model</a:t>
+            </a:r>
+          </a:p>
+        </p:txBody>
+      </p:sp>
+      <p:sp>
+        <p:nvSpPr>
+          <p:cNvPr id="21" name="TextBox 20"/>
+          <p:cNvSpPr txBox="1"/>
+          <p:nvPr/>
+        </p:nvSpPr>
+        <p:spPr>
+          <a:xfrm>
+            <a:off x="6461607" y="4892040"/>
+            <a:ext cx="4952847" cy="1143000"/>
+          </a:xfrm>
+          <a:prstGeom prst="rect">
+            <a:avLst/>
+          </a:prstGeom>
+          <a:noFill/>
+        </p:spPr>
+        <p:txBody>
+          <a:bodyPr wrap="square" anchor="t" lIns="0" rIns="0" tIns="0" bIns="0"/>
+          <a:lstStyle/>
+          <a:p>
+            <a:pPr algn="l"/>
+            <a:r>
+              <a:rPr sz="2000" b="0" i="0">
+                <a:solidFill>
+                  <a:srgbClr val="202122"/>
+                </a:solidFill>
+                <a:latin typeface="Calibri"/>
+              </a:rPr>
+              <a:t>Tables of rows and columns linked by keys.</a:t>
+            </a:r>
+          </a:p>
+        </p:txBody>
+      </p:sp>
+    </p:spTree>
+  </p:cSld>
+  <p:clrMapOvr>
+    <a:masterClrMapping/>
+  </p:clrMapOvr>
+</p:sld>
+</file>
+
+<file path=ppt/slides/slide11.xml><?xml version="1.0" encoding="utf-8"?>
+<p:sld xmlns:a="http://schemas.openxmlformats.org/drawingml/2006/main" xmlns:p="http://schemas.openxmlformats.org/presentationml/2006/main" xmlns:r="http://schemas.openxmlformats.org/officeDocument/2006/relationships">
+  <p:cSld>
+    <p:bg>
+      <p:bgPr>
+        <a:solidFill>
+          <a:srgbClr val="FFFFFF"/>
+        </a:solidFill>
+        <a:effectLst/>
+      </p:bgPr>
+    </p:bg>
+    <p:spTree>
+      <p:nvGrpSpPr>
+        <p:cNvPr id="1" name=""/>
+        <p:cNvGrpSpPr/>
+        <p:nvPr/>
+      </p:nvGrpSpPr>
+      <p:grpSpPr/>
+      <p:sp>
+        <p:nvSpPr>
+          <p:cNvPr id="2" name="TextBox 1"/>
+          <p:cNvSpPr txBox="1"/>
+          <p:nvPr/>
+        </p:nvSpPr>
+        <p:spPr>
+          <a:xfrm>
+            <a:off x="548640" y="320040"/>
+            <a:ext cx="11094415" cy="274320"/>
+          </a:xfrm>
+          <a:prstGeom prst="rect">
+            <a:avLst/>
+          </a:prstGeom>
+          <a:noFill/>
+        </p:spPr>
+        <p:txBody>
+          <a:bodyPr wrap="square" anchor="t" lIns="0" rIns="0" tIns="0" bIns="0"/>
+          <a:lstStyle/>
+          <a:p>
+            <a:pPr algn="l"/>
+            <a:r>
+              <a:rPr sz="1100" b="1" i="0">
+                <a:solidFill>
+                  <a:srgbClr val="54595D"/>
+                </a:solidFill>
+                <a:latin typeface="Calibri"/>
+              </a:rPr>
+              <a:t>CORE COMPONENT  ·  Core Paper 2</a:t>
+            </a:r>
+          </a:p>
+        </p:txBody>
+      </p:sp>
+      <p:sp>
+        <p:nvSpPr>
+          <p:cNvPr id="3" name="TextBox 2"/>
+          <p:cNvSpPr txBox="1"/>
+          <p:nvPr/>
+        </p:nvSpPr>
+        <p:spPr>
+          <a:xfrm>
+            <a:off x="548640" y="566928"/>
+            <a:ext cx="11094415" cy="822960"/>
+          </a:xfrm>
+          <a:prstGeom prst="rect">
+            <a:avLst/>
+          </a:prstGeom>
+          <a:noFill/>
+        </p:spPr>
+        <p:txBody>
+          <a:bodyPr wrap="square" anchor="ctr" lIns="0" rIns="0" tIns="0" bIns="0"/>
+          <a:lstStyle/>
+          <a:p>
+            <a:pPr algn="l"/>
+            <a:r>
+              <a:rPr sz="3200" b="1" i="0">
+                <a:solidFill>
+                  <a:srgbClr val="03306E"/>
+                </a:solidFill>
+                <a:latin typeface="Cambria"/>
+              </a:rPr>
+              <a:t>Quick check: Visualisation and data models</a:t>
+            </a:r>
+          </a:p>
+        </p:txBody>
+      </p:sp>
+      <p:sp>
+        <p:nvSpPr>
+          <p:cNvPr id="4" name="TextBox 3"/>
+          <p:cNvSpPr txBox="1"/>
+          <p:nvPr/>
+        </p:nvSpPr>
+        <p:spPr>
+          <a:xfrm>
+            <a:off x="548640" y="6446520"/>
+            <a:ext cx="8229600" cy="274320"/>
+          </a:xfrm>
+          <a:prstGeom prst="rect">
+            <a:avLst/>
+          </a:prstGeom>
+          <a:noFill/>
+        </p:spPr>
+        <p:txBody>
+          <a:bodyPr wrap="square" anchor="t" lIns="0" rIns="0" tIns="0" bIns="0"/>
+          <a:lstStyle/>
+          <a:p>
+            <a:pPr algn="l"/>
+            <a:r>
+              <a:rPr sz="1000" b="0" i="0">
+                <a:solidFill>
+                  <a:srgbClr val="54595D"/>
+                </a:solidFill>
+                <a:latin typeface="Calibri"/>
+              </a:rPr>
+              <a:t>Digital Software Development T Level  ·  Data Quality, Systems and Analysis</a:t>
+            </a:r>
+          </a:p>
+        </p:txBody>
+      </p:sp>
+      <p:sp>
+        <p:nvSpPr>
+          <p:cNvPr id="5" name="TextBox 4"/>
+          <p:cNvSpPr txBox="1"/>
+          <p:nvPr/>
+        </p:nvSpPr>
+        <p:spPr>
+          <a:xfrm>
+            <a:off x="10728655" y="6446520"/>
+            <a:ext cx="914400" cy="274320"/>
+          </a:xfrm>
+          <a:prstGeom prst="rect">
+            <a:avLst/>
+          </a:prstGeom>
+          <a:noFill/>
+        </p:spPr>
+        <p:txBody>
+          <a:bodyPr wrap="square" anchor="t" lIns="0" rIns="0" tIns="0" bIns="0"/>
+          <a:lstStyle/>
+          <a:p>
+            <a:pPr algn="r"/>
+            <a:r>
+              <a:rPr sz="1000" b="0" i="0">
+                <a:solidFill>
+                  <a:srgbClr val="54595D"/>
+                </a:solidFill>
+                <a:latin typeface="Calibri"/>
+              </a:rPr>
+              <a:t>11</a:t>
+            </a:r>
+          </a:p>
+        </p:txBody>
+      </p:sp>
+      <p:sp>
+        <p:nvSpPr>
+          <p:cNvPr id="6" name="Oval 5"/>
+          <p:cNvSpPr/>
+          <p:nvPr/>
+        </p:nvSpPr>
+        <p:spPr>
+          <a:xfrm>
+            <a:off x="548640" y="1691640"/>
+            <a:ext cx="502920" cy="502920"/>
+          </a:xfrm>
+          <a:prstGeom prst="ellipse">
+            <a:avLst/>
+          </a:prstGeom>
+          <a:solidFill>
+            <a:srgbClr val="F2B705"/>
+          </a:solidFill>
+          <a:ln>
+            <a:noFill/>
+          </a:ln>
+          <a:effectLst/>
+        </p:spPr>
+        <p:style>
+          <a:lnRef idx="1">
+            <a:schemeClr val="accent1"/>
+          </a:lnRef>
+          <a:fillRef idx="3">
+            <a:schemeClr val="accent1"/>
+          </a:fillRef>
+          <a:effectRef idx="2">
+            <a:schemeClr val="accent1"/>
+          </a:effectRef>
+          <a:fontRef idx="minor">
+            <a:schemeClr val="lt1"/>
+          </a:fontRef>
+        </p:style>
+        <p:txBody>
+          <a:bodyPr rtlCol="0" anchor="ctr" lIns="0" rIns="0" tIns="0" bIns="0"/>
+          <a:lstStyle/>
+          <a:p>
+            <a:pPr algn="ctr"/>
+            <a:r>
+              <a:rPr sz="1600" b="1">
+                <a:solidFill>
+                  <a:srgbClr val="202122"/>
+                </a:solidFill>
+                <a:latin typeface="Calibri"/>
+              </a:rPr>
+              <a:t>1</a:t>
+            </a:r>
+          </a:p>
+        </p:txBody>
+      </p:sp>
+      <p:sp>
+        <p:nvSpPr>
+          <p:cNvPr id="7" name="TextBox 6"/>
+          <p:cNvSpPr txBox="1"/>
+          <p:nvPr/>
+        </p:nvSpPr>
+        <p:spPr>
+          <a:xfrm>
+            <a:off x="1371600" y="1645920"/>
+            <a:ext cx="10271455" cy="1188720"/>
+          </a:xfrm>
+          <a:prstGeom prst="rect">
+            <a:avLst/>
+          </a:prstGeom>
+          <a:noFill/>
+        </p:spPr>
+        <p:txBody>
+          <a:bodyPr wrap="square" anchor="t" lIns="0" rIns="0" tIns="0" bIns="0"/>
+          <a:lstStyle/>
+          <a:p>
+            <a:pPr algn="l"/>
+            <a:r>
+              <a:rPr sz="2400" b="0" i="0">
+                <a:solidFill>
+                  <a:srgbClr val="202122"/>
+                </a:solidFill>
+                <a:latin typeface="Calibri"/>
+              </a:rPr>
+              <a:t>Which chart shows a trend over time?</a:t>
+            </a:r>
+          </a:p>
+        </p:txBody>
+      </p:sp>
+      <p:sp>
+        <p:nvSpPr>
+          <p:cNvPr id="8" name="Oval 7"/>
+          <p:cNvSpPr/>
+          <p:nvPr/>
+        </p:nvSpPr>
+        <p:spPr>
+          <a:xfrm>
+            <a:off x="548640" y="3108960"/>
+            <a:ext cx="502920" cy="502920"/>
+          </a:xfrm>
+          <a:prstGeom prst="ellipse">
+            <a:avLst/>
+          </a:prstGeom>
+          <a:solidFill>
+            <a:srgbClr val="F2B705"/>
+          </a:solidFill>
+          <a:ln>
+            <a:noFill/>
+          </a:ln>
+          <a:effectLst/>
+        </p:spPr>
+        <p:style>
+          <a:lnRef idx="1">
+            <a:schemeClr val="accent1"/>
+          </a:lnRef>
+          <a:fillRef idx="3">
+            <a:schemeClr val="accent1"/>
+          </a:fillRef>
+          <a:effectRef idx="2">
+            <a:schemeClr val="accent1"/>
+          </a:effectRef>
+          <a:fontRef idx="minor">
+            <a:schemeClr val="lt1"/>
+          </a:fontRef>
+        </p:style>
+        <p:txBody>
+          <a:bodyPr rtlCol="0" anchor="ctr" lIns="0" rIns="0" tIns="0" bIns="0"/>
+          <a:lstStyle/>
+          <a:p>
+            <a:pPr algn="ctr"/>
+            <a:r>
+              <a:rPr sz="1600" b="1">
+                <a:solidFill>
+                  <a:srgbClr val="202122"/>
+                </a:solidFill>
+                <a:latin typeface="Calibri"/>
+              </a:rPr>
+              <a:t>2</a:t>
+            </a:r>
+          </a:p>
+        </p:txBody>
+      </p:sp>
+      <p:sp>
+        <p:nvSpPr>
+          <p:cNvPr id="9" name="TextBox 8"/>
+          <p:cNvSpPr txBox="1"/>
+          <p:nvPr/>
+        </p:nvSpPr>
+        <p:spPr>
+          <a:xfrm>
+            <a:off x="1371600" y="3063240"/>
+            <a:ext cx="10271455" cy="1188720"/>
+          </a:xfrm>
+          <a:prstGeom prst="rect">
+            <a:avLst/>
+          </a:prstGeom>
+          <a:noFill/>
+        </p:spPr>
+        <p:txBody>
+          <a:bodyPr wrap="square" anchor="t" lIns="0" rIns="0" tIns="0" bIns="0"/>
+          <a:lstStyle/>
+          <a:p>
+            <a:pPr algn="l"/>
+            <a:r>
+              <a:rPr sz="2400" b="0" i="0">
+                <a:solidFill>
+                  <a:srgbClr val="202122"/>
+                </a:solidFill>
+                <a:latin typeface="Calibri"/>
+              </a:rPr>
+              <a:t>Which data model uses linked tables?</a:t>
+            </a:r>
+          </a:p>
+        </p:txBody>
+      </p:sp>
+      <p:sp>
+        <p:nvSpPr>
+          <p:cNvPr id="10" name="Oval 9"/>
+          <p:cNvSpPr/>
+          <p:nvPr/>
+        </p:nvSpPr>
+        <p:spPr>
+          <a:xfrm>
+            <a:off x="548640" y="4526280"/>
+            <a:ext cx="502920" cy="502920"/>
+          </a:xfrm>
+          <a:prstGeom prst="ellipse">
+            <a:avLst/>
+          </a:prstGeom>
+          <a:solidFill>
+            <a:srgbClr val="F2B705"/>
+          </a:solidFill>
+          <a:ln>
+            <a:noFill/>
+          </a:ln>
+          <a:effectLst/>
+        </p:spPr>
+        <p:style>
+          <a:lnRef idx="1">
+            <a:schemeClr val="accent1"/>
+          </a:lnRef>
+          <a:fillRef idx="3">
+            <a:schemeClr val="accent1"/>
+          </a:fillRef>
+          <a:effectRef idx="2">
+            <a:schemeClr val="accent1"/>
+          </a:effectRef>
+          <a:fontRef idx="minor">
+            <a:schemeClr val="lt1"/>
+          </a:fontRef>
+        </p:style>
+        <p:txBody>
+          <a:bodyPr rtlCol="0" anchor="ctr" lIns="0" rIns="0" tIns="0" bIns="0"/>
+          <a:lstStyle/>
+          <a:p>
+            <a:pPr algn="ctr"/>
+            <a:r>
+              <a:rPr sz="1600" b="1">
+                <a:solidFill>
+                  <a:srgbClr val="202122"/>
+                </a:solidFill>
+                <a:latin typeface="Calibri"/>
+              </a:rPr>
+              <a:t>3</a:t>
+            </a:r>
+          </a:p>
+        </p:txBody>
+      </p:sp>
+      <p:sp>
+        <p:nvSpPr>
+          <p:cNvPr id="11" name="TextBox 10"/>
+          <p:cNvSpPr txBox="1"/>
+          <p:nvPr/>
+        </p:nvSpPr>
+        <p:spPr>
+          <a:xfrm>
+            <a:off x="1371600" y="4480560"/>
+            <a:ext cx="10271455" cy="1188720"/>
+          </a:xfrm>
+          <a:prstGeom prst="rect">
+            <a:avLst/>
+          </a:prstGeom>
+          <a:noFill/>
+        </p:spPr>
+        <p:txBody>
+          <a:bodyPr wrap="square" anchor="t" lIns="0" rIns="0" tIns="0" bIns="0"/>
+          <a:lstStyle/>
+          <a:p>
+            <a:pPr algn="l"/>
+            <a:r>
+              <a:rPr sz="2400" b="0" i="0">
+                <a:solidFill>
+                  <a:srgbClr val="202122"/>
+                </a:solidFill>
+                <a:latin typeface="Calibri"/>
+              </a:rPr>
+              <a:t>Why label chart axes?</a:t>
+            </a:r>
+          </a:p>
+        </p:txBody>
+      </p:sp>
+      <p:sp>
+        <p:nvSpPr>
+          <p:cNvPr id="12" name="TextBox 11"/>
+          <p:cNvSpPr txBox="1"/>
+          <p:nvPr/>
+        </p:nvSpPr>
+        <p:spPr>
+          <a:xfrm>
+            <a:off x="548640" y="5852160"/>
+            <a:ext cx="11094415" cy="365760"/>
+          </a:xfrm>
+          <a:prstGeom prst="rect">
+            <a:avLst/>
+          </a:prstGeom>
+          <a:noFill/>
+        </p:spPr>
+        <p:txBody>
+          <a:bodyPr wrap="square" anchor="t" lIns="0" rIns="0" tIns="0" bIns="0"/>
+          <a:lstStyle/>
+          <a:p>
+            <a:pPr algn="l"/>
+            <a:r>
+              <a:rPr sz="1300" b="0" i="1">
+                <a:solidFill>
+                  <a:srgbClr val="54595D"/>
+                </a:solidFill>
+                <a:latin typeface="Calibri"/>
+              </a:rPr>
+              <a:t>Answer on mini whiteboards or in your book. Answers are in the speaker notes.</a:t>
+            </a:r>
+          </a:p>
+        </p:txBody>
+      </p:sp>
+    </p:spTree>
+  </p:cSld>
+  <p:clrMapOvr>
+    <a:masterClrMapping/>
+  </p:clrMapOvr>
+</p:sld>
+</file>
+
+<file path=ppt/slides/slide12.xml><?xml version="1.0" encoding="utf-8"?>
+<p:sld xmlns:a="http://schemas.openxmlformats.org/drawingml/2006/main" xmlns:p="http://schemas.openxmlformats.org/presentationml/2006/main" xmlns:r="http://schemas.openxmlformats.org/officeDocument/2006/relationships">
+  <p:cSld>
+    <p:bg>
+      <p:bgPr>
+        <a:solidFill>
+          <a:srgbClr val="FFFFFF"/>
+        </a:solidFill>
+        <a:effectLst/>
+      </p:bgPr>
+    </p:bg>
+    <p:spTree>
+      <p:nvGrpSpPr>
+        <p:cNvPr id="1" name=""/>
+        <p:cNvGrpSpPr/>
+        <p:nvPr/>
+      </p:nvGrpSpPr>
+      <p:grpSpPr/>
+      <p:sp>
+        <p:nvSpPr>
+          <p:cNvPr id="2" name="TextBox 1"/>
+          <p:cNvSpPr txBox="1"/>
+          <p:nvPr/>
+        </p:nvSpPr>
+        <p:spPr>
+          <a:xfrm>
+            <a:off x="548640" y="320040"/>
+            <a:ext cx="11094415" cy="274320"/>
+          </a:xfrm>
+          <a:prstGeom prst="rect">
+            <a:avLst/>
+          </a:prstGeom>
+          <a:noFill/>
+        </p:spPr>
+        <p:txBody>
+          <a:bodyPr wrap="square" anchor="t" lIns="0" rIns="0" tIns="0" bIns="0"/>
+          <a:lstStyle/>
+          <a:p>
+            <a:pPr algn="l"/>
+            <a:r>
+              <a:rPr sz="1100" b="1" i="0">
+                <a:solidFill>
+                  <a:srgbClr val="54595D"/>
+                </a:solidFill>
+                <a:latin typeface="Calibri"/>
+              </a:rPr>
+              <a:t>CORE COMPONENT  ·  Core Paper 2</a:t>
+            </a:r>
+          </a:p>
+        </p:txBody>
+      </p:sp>
+      <p:sp>
+        <p:nvSpPr>
+          <p:cNvPr id="3" name="TextBox 2"/>
+          <p:cNvSpPr txBox="1"/>
+          <p:nvPr/>
+        </p:nvSpPr>
+        <p:spPr>
+          <a:xfrm>
+            <a:off x="548640" y="566928"/>
+            <a:ext cx="11094415" cy="822960"/>
+          </a:xfrm>
+          <a:prstGeom prst="rect">
+            <a:avLst/>
+          </a:prstGeom>
+          <a:noFill/>
+        </p:spPr>
+        <p:txBody>
+          <a:bodyPr wrap="square" anchor="ctr" lIns="0" rIns="0" tIns="0" bIns="0"/>
+          <a:lstStyle/>
+          <a:p>
+            <a:pPr algn="l"/>
+            <a:r>
+              <a:rPr sz="3200" b="1" i="0">
+                <a:solidFill>
+                  <a:srgbClr val="03306E"/>
+                </a:solidFill>
+                <a:latin typeface="Cambria"/>
+              </a:rPr>
+              <a:t>Access and analysis</a:t>
+            </a:r>
+          </a:p>
+        </p:txBody>
+      </p:sp>
+      <p:sp>
+        <p:nvSpPr>
+          <p:cNvPr id="4" name="TextBox 3"/>
+          <p:cNvSpPr txBox="1"/>
+          <p:nvPr/>
+        </p:nvSpPr>
+        <p:spPr>
+          <a:xfrm>
+            <a:off x="548640" y="6446520"/>
+            <a:ext cx="8229600" cy="274320"/>
+          </a:xfrm>
+          <a:prstGeom prst="rect">
+            <a:avLst/>
+          </a:prstGeom>
+          <a:noFill/>
+        </p:spPr>
+        <p:txBody>
+          <a:bodyPr wrap="square" anchor="t" lIns="0" rIns="0" tIns="0" bIns="0"/>
+          <a:lstStyle/>
+          <a:p>
+            <a:pPr algn="l"/>
+            <a:r>
+              <a:rPr sz="1000" b="0" i="0">
+                <a:solidFill>
+                  <a:srgbClr val="54595D"/>
+                </a:solidFill>
+                <a:latin typeface="Calibri"/>
+              </a:rPr>
+              <a:t>Digital Software Development T Level  ·  Data Quality, Systems and Analysis</a:t>
+            </a:r>
+          </a:p>
+        </p:txBody>
+      </p:sp>
+      <p:sp>
+        <p:nvSpPr>
+          <p:cNvPr id="5" name="TextBox 4"/>
+          <p:cNvSpPr txBox="1"/>
+          <p:nvPr/>
+        </p:nvSpPr>
+        <p:spPr>
+          <a:xfrm>
+            <a:off x="10728655" y="6446520"/>
+            <a:ext cx="914400" cy="274320"/>
+          </a:xfrm>
+          <a:prstGeom prst="rect">
+            <a:avLst/>
+          </a:prstGeom>
+          <a:noFill/>
+        </p:spPr>
+        <p:txBody>
+          <a:bodyPr wrap="square" anchor="t" lIns="0" rIns="0" tIns="0" bIns="0"/>
+          <a:lstStyle/>
+          <a:p>
+            <a:pPr algn="r"/>
+            <a:r>
+              <a:rPr sz="1000" b="0" i="0">
+                <a:solidFill>
+                  <a:srgbClr val="54595D"/>
+                </a:solidFill>
+                <a:latin typeface="Calibri"/>
+              </a:rPr>
+              <a:t>12</a:t>
+            </a:r>
+          </a:p>
+        </p:txBody>
+      </p:sp>
+      <p:sp>
+        <p:nvSpPr>
+          <p:cNvPr id="6" name="Rounded Rectangle 5"/>
+          <p:cNvSpPr/>
+          <p:nvPr/>
+        </p:nvSpPr>
+        <p:spPr>
+          <a:xfrm>
+            <a:off x="548640" y="1600200"/>
+            <a:ext cx="5364327" cy="640080"/>
+          </a:xfrm>
+          <a:prstGeom prst="roundRect">
+            <a:avLst>
+              <a:gd name="adj" fmla="val 15000"/>
+            </a:avLst>
+          </a:prstGeom>
+          <a:solidFill>
+            <a:srgbClr val="03306E"/>
+          </a:solidFill>
+          <a:ln>
+            <a:noFill/>
+          </a:ln>
+          <a:effectLst/>
+        </p:spPr>
+        <p:style>
+          <a:lnRef idx="1">
+            <a:schemeClr val="accent1"/>
+          </a:lnRef>
+          <a:fillRef idx="3">
+            <a:schemeClr val="accent1"/>
+          </a:fillRef>
+          <a:effectRef idx="2">
+            <a:schemeClr val="accent1"/>
+          </a:effectRef>
+          <a:fontRef idx="minor">
+            <a:schemeClr val="lt1"/>
+          </a:fontRef>
+        </p:style>
+        <p:txBody>
+          <a:bodyPr rtlCol="0" anchor="ctr"/>
+          <a:lstStyle/>
+          <a:p/>
+        </p:txBody>
+      </p:sp>
+      <p:sp>
+        <p:nvSpPr>
+          <p:cNvPr id="7" name="TextBox 6"/>
+          <p:cNvSpPr txBox="1"/>
+          <p:nvPr/>
+        </p:nvSpPr>
+        <p:spPr>
+          <a:xfrm>
+            <a:off x="777240" y="1600200"/>
+            <a:ext cx="4907127" cy="640080"/>
+          </a:xfrm>
+          <a:prstGeom prst="rect">
+            <a:avLst/>
+          </a:prstGeom>
+          <a:noFill/>
+        </p:spPr>
+        <p:txBody>
+          <a:bodyPr wrap="square" anchor="ctr" lIns="0" rIns="0" tIns="0" bIns="0"/>
+          <a:lstStyle/>
+          <a:p>
+            <a:pPr algn="l"/>
+            <a:r>
+              <a:rPr sz="2000" b="1" i="0">
+                <a:solidFill>
+                  <a:srgbClr val="FFFFFF"/>
+                </a:solidFill>
+                <a:latin typeface="Calibri"/>
+              </a:rPr>
+              <a:t>Access across platforms</a:t>
+            </a:r>
+          </a:p>
+        </p:txBody>
+      </p:sp>
+      <p:sp>
+        <p:nvSpPr>
+          <p:cNvPr id="8" name="Rounded Rectangle 7"/>
+          <p:cNvSpPr/>
+          <p:nvPr/>
+        </p:nvSpPr>
+        <p:spPr>
+          <a:xfrm>
+            <a:off x="548640" y="2377440"/>
+            <a:ext cx="5364327" cy="3794760"/>
+          </a:xfrm>
+          <a:prstGeom prst="roundRect">
+            <a:avLst>
+              <a:gd name="adj" fmla="val 4000"/>
+            </a:avLst>
+          </a:prstGeom>
+          <a:solidFill>
+            <a:srgbClr val="EAF3FF"/>
+          </a:solidFill>
+          <a:ln>
+            <a:noFill/>
+          </a:ln>
+          <a:effectLst/>
+        </p:spPr>
+        <p:style>
+          <a:lnRef idx="1">
+            <a:schemeClr val="accent1"/>
+          </a:lnRef>
+          <a:fillRef idx="3">
+            <a:schemeClr val="accent1"/>
+          </a:fillRef>
+          <a:effectRef idx="2">
+            <a:schemeClr val="accent1"/>
+          </a:effectRef>
+          <a:fontRef idx="minor">
+            <a:schemeClr val="lt1"/>
+          </a:fontRef>
+        </p:style>
+        <p:txBody>
+          <a:bodyPr rtlCol="0" anchor="ctr"/>
+          <a:lstStyle/>
+          <a:p/>
+        </p:txBody>
+      </p:sp>
+      <p:sp>
+        <p:nvSpPr>
+          <p:cNvPr id="9" name="TextBox 8"/>
+          <p:cNvSpPr txBox="1"/>
+          <p:nvPr/>
+        </p:nvSpPr>
+        <p:spPr>
+          <a:xfrm>
+            <a:off x="822959" y="2606040"/>
+            <a:ext cx="4815687" cy="3337560"/>
+          </a:xfrm>
+          <a:prstGeom prst="rect">
+            <a:avLst/>
+          </a:prstGeom>
+          <a:noFill/>
+        </p:spPr>
+        <p:txBody>
+          <a:bodyPr wrap="square" lIns="0" rIns="0" tIns="0" bIns="0">
+            <a:spAutoFit/>
+          </a:bodyPr>
+          <a:lstStyle/>
+          <a:p>
+            <a:pPr marL="274320" indent="-274320">
+              <a:spcAft>
+                <a:spcPts val="990"/>
+              </a:spcAft>
+              <a:buClr>
+                <a:srgbClr val="0645AD"/>
+              </a:buClr>
+              <a:buFont typeface="Arial"/>
+              <a:buChar char="•"/>
+            </a:pPr>
+            <a:r>
+              <a:rPr sz="2200" b="1">
+                <a:solidFill>
+                  <a:srgbClr val="202122"/>
+                </a:solidFill>
+                <a:latin typeface="Calibri"/>
+              </a:rPr>
+              <a:t>Permissions:</a:t>
+            </a:r>
+            <a:r>
+              <a:rPr sz="2200" b="0">
+                <a:solidFill>
+                  <a:srgbClr val="202122"/>
+                </a:solidFill>
+                <a:latin typeface="Calibri"/>
+              </a:rPr>
+              <a:t> authorisation, privileges, rights, rules</a:t>
+            </a:r>
+          </a:p>
+          <a:p>
+            <a:pPr marL="274320" indent="-274320">
+              <a:spcAft>
+                <a:spcPts val="990"/>
+              </a:spcAft>
+              <a:buClr>
+                <a:srgbClr val="0645AD"/>
+              </a:buClr>
+              <a:buFont typeface="Arial"/>
+              <a:buChar char="•"/>
+            </a:pPr>
+            <a:r>
+              <a:rPr sz="2200" b="1">
+                <a:solidFill>
+                  <a:srgbClr val="202122"/>
+                </a:solidFill>
+                <a:latin typeface="Calibri"/>
+              </a:rPr>
+              <a:t>RBAC:</a:t>
+            </a:r>
+            <a:r>
+              <a:rPr sz="2200" b="0">
+                <a:solidFill>
+                  <a:srgbClr val="202122"/>
+                </a:solidFill>
+                <a:latin typeface="Calibri"/>
+              </a:rPr>
+              <a:t> by role</a:t>
+            </a:r>
+          </a:p>
+          <a:p>
+            <a:pPr marL="274320" indent="-274320">
+              <a:spcAft>
+                <a:spcPts val="990"/>
+              </a:spcAft>
+              <a:buClr>
+                <a:srgbClr val="0645AD"/>
+              </a:buClr>
+              <a:buFont typeface="Arial"/>
+              <a:buChar char="•"/>
+            </a:pPr>
+            <a:r>
+              <a:rPr sz="2200" b="1">
+                <a:solidFill>
+                  <a:srgbClr val="202122"/>
+                </a:solidFill>
+                <a:latin typeface="Calibri"/>
+              </a:rPr>
+              <a:t>RuBAC:</a:t>
+            </a:r>
+            <a:r>
+              <a:rPr sz="2200" b="0">
+                <a:solidFill>
+                  <a:srgbClr val="202122"/>
+                </a:solidFill>
+                <a:latin typeface="Calibri"/>
+              </a:rPr>
+              <a:t> by rules</a:t>
+            </a:r>
+          </a:p>
+          <a:p>
+            <a:pPr marL="274320" indent="-274320">
+              <a:spcAft>
+                <a:spcPts val="990"/>
+              </a:spcAft>
+              <a:buClr>
+                <a:srgbClr val="0645AD"/>
+              </a:buClr>
+              <a:buFont typeface="Arial"/>
+              <a:buChar char="•"/>
+            </a:pPr>
+            <a:r>
+              <a:rPr sz="2200" b="1">
+                <a:solidFill>
+                  <a:srgbClr val="202122"/>
+                </a:solidFill>
+                <a:latin typeface="Calibri"/>
+              </a:rPr>
+              <a:t>APIs:</a:t>
+            </a:r>
+            <a:r>
+              <a:rPr sz="2200" b="0">
+                <a:solidFill>
+                  <a:srgbClr val="202122"/>
+                </a:solidFill>
+                <a:latin typeface="Calibri"/>
+              </a:rPr>
+              <a:t> controlled access for other software</a:t>
+            </a:r>
+          </a:p>
+        </p:txBody>
+      </p:sp>
+      <p:sp>
+        <p:nvSpPr>
+          <p:cNvPr id="10" name="Rounded Rectangle 9"/>
+          <p:cNvSpPr/>
+          <p:nvPr/>
+        </p:nvSpPr>
+        <p:spPr>
+          <a:xfrm>
+            <a:off x="6278727" y="1600200"/>
+            <a:ext cx="5364327" cy="640080"/>
+          </a:xfrm>
+          <a:prstGeom prst="roundRect">
+            <a:avLst>
+              <a:gd name="adj" fmla="val 15000"/>
+            </a:avLst>
+          </a:prstGeom>
+          <a:solidFill>
+            <a:srgbClr val="0645AD"/>
+          </a:solidFill>
+          <a:ln>
+            <a:noFill/>
+          </a:ln>
+          <a:effectLst/>
+        </p:spPr>
+        <p:style>
+          <a:lnRef idx="1">
+            <a:schemeClr val="accent1"/>
+          </a:lnRef>
+          <a:fillRef idx="3">
+            <a:schemeClr val="accent1"/>
+          </a:fillRef>
+          <a:effectRef idx="2">
+            <a:schemeClr val="accent1"/>
+          </a:effectRef>
+          <a:fontRef idx="minor">
+            <a:schemeClr val="lt1"/>
+          </a:fontRef>
+        </p:style>
+        <p:txBody>
+          <a:bodyPr rtlCol="0" anchor="ctr"/>
+          <a:lstStyle/>
+          <a:p/>
+        </p:txBody>
+      </p:sp>
+      <p:sp>
+        <p:nvSpPr>
+          <p:cNvPr id="11" name="TextBox 10"/>
+          <p:cNvSpPr txBox="1"/>
+          <p:nvPr/>
+        </p:nvSpPr>
+        <p:spPr>
+          <a:xfrm>
+            <a:off x="6507327" y="1600200"/>
+            <a:ext cx="4907127" cy="640080"/>
+          </a:xfrm>
+          <a:prstGeom prst="rect">
+            <a:avLst/>
+          </a:prstGeom>
+          <a:noFill/>
+        </p:spPr>
+        <p:txBody>
+          <a:bodyPr wrap="square" anchor="ctr" lIns="0" rIns="0" tIns="0" bIns="0"/>
+          <a:lstStyle/>
+          <a:p>
+            <a:pPr algn="l"/>
+            <a:r>
+              <a:rPr sz="2000" b="1" i="0">
+                <a:solidFill>
+                  <a:srgbClr val="FFFFFF"/>
+                </a:solidFill>
+                <a:latin typeface="Calibri"/>
+              </a:rPr>
+              <a:t>Analysis tools</a:t>
+            </a:r>
+          </a:p>
+        </p:txBody>
+      </p:sp>
+      <p:sp>
+        <p:nvSpPr>
+          <p:cNvPr id="12" name="Rounded Rectangle 11"/>
+          <p:cNvSpPr/>
+          <p:nvPr/>
+        </p:nvSpPr>
+        <p:spPr>
+          <a:xfrm>
+            <a:off x="6278727" y="2377440"/>
+            <a:ext cx="5364327" cy="3794760"/>
+          </a:xfrm>
+          <a:prstGeom prst="roundRect">
+            <a:avLst>
+              <a:gd name="adj" fmla="val 4000"/>
+            </a:avLst>
+          </a:prstGeom>
+          <a:solidFill>
+            <a:srgbClr val="EAF3FF"/>
+          </a:solidFill>
+          <a:ln>
+            <a:noFill/>
+          </a:ln>
+          <a:effectLst/>
+        </p:spPr>
+        <p:style>
+          <a:lnRef idx="1">
+            <a:schemeClr val="accent1"/>
+          </a:lnRef>
+          <a:fillRef idx="3">
+            <a:schemeClr val="accent1"/>
+          </a:fillRef>
+          <a:effectRef idx="2">
+            <a:schemeClr val="accent1"/>
+          </a:effectRef>
+          <a:fontRef idx="minor">
+            <a:schemeClr val="lt1"/>
+          </a:fontRef>
+        </p:style>
+        <p:txBody>
+          <a:bodyPr rtlCol="0" anchor="ctr"/>
+          <a:lstStyle/>
+          <a:p/>
+        </p:txBody>
+      </p:sp>
+      <p:sp>
+        <p:nvSpPr>
+          <p:cNvPr id="13" name="TextBox 12"/>
+          <p:cNvSpPr txBox="1"/>
+          <p:nvPr/>
+        </p:nvSpPr>
+        <p:spPr>
+          <a:xfrm>
+            <a:off x="6553047" y="2606040"/>
+            <a:ext cx="4815687" cy="3337560"/>
+          </a:xfrm>
+          <a:prstGeom prst="rect">
+            <a:avLst/>
+          </a:prstGeom>
+          <a:noFill/>
+        </p:spPr>
+        <p:txBody>
+          <a:bodyPr wrap="square" lIns="0" rIns="0" tIns="0" bIns="0">
+            <a:spAutoFit/>
+          </a:bodyPr>
+          <a:lstStyle/>
+          <a:p>
+            <a:pPr marL="274320" indent="-274320">
+              <a:spcAft>
+                <a:spcPts val="990"/>
+              </a:spcAft>
+              <a:buClr>
+                <a:srgbClr val="0645AD"/>
+              </a:buClr>
+              <a:buFont typeface="Arial"/>
+              <a:buChar char="•"/>
+            </a:pPr>
+            <a:r>
+              <a:rPr sz="2200" b="0">
+                <a:solidFill>
+                  <a:srgbClr val="202122"/>
+                </a:solidFill>
+                <a:latin typeface="Calibri"/>
+              </a:rPr>
+              <a:t>Data warehouse, data lake, data mart</a:t>
+            </a:r>
+          </a:p>
+          <a:p>
+            <a:pPr marL="274320" indent="-274320">
+              <a:spcAft>
+                <a:spcPts val="990"/>
+              </a:spcAft>
+              <a:buClr>
+                <a:srgbClr val="0645AD"/>
+              </a:buClr>
+              <a:buFont typeface="Arial"/>
+              <a:buChar char="•"/>
+            </a:pPr>
+            <a:r>
+              <a:rPr sz="2200" b="0">
+                <a:solidFill>
+                  <a:srgbClr val="202122"/>
+                </a:solidFill>
+                <a:latin typeface="Calibri"/>
+              </a:rPr>
+              <a:t>Data mining and reporting</a:t>
+            </a:r>
+          </a:p>
+          <a:p>
+            <a:pPr marL="274320" indent="-274320">
+              <a:spcAft>
+                <a:spcPts val="990"/>
+              </a:spcAft>
+              <a:buClr>
+                <a:srgbClr val="0645AD"/>
+              </a:buClr>
+              <a:buFont typeface="Arial"/>
+              <a:buChar char="•"/>
+            </a:pPr>
+            <a:r>
+              <a:rPr sz="2200" b="0">
+                <a:solidFill>
+                  <a:srgbClr val="202122"/>
+                </a:solidFill>
+                <a:latin typeface="Calibri"/>
+              </a:rPr>
+              <a:t>Business intelligence for finance and CRM</a:t>
+            </a:r>
+          </a:p>
+        </p:txBody>
+      </p:sp>
+    </p:spTree>
+  </p:cSld>
+  <p:clrMapOvr>
+    <a:masterClrMapping/>
+  </p:clrMapOvr>
+</p:sld>
+</file>
+
+<file path=ppt/slides/slide13.xml><?xml version="1.0" encoding="utf-8"?>
+<p:sld xmlns:a="http://schemas.openxmlformats.org/drawingml/2006/main" xmlns:p="http://schemas.openxmlformats.org/presentationml/2006/main" xmlns:r="http://schemas.openxmlformats.org/officeDocument/2006/relationships">
+  <p:cSld>
+    <p:bg>
+      <p:bgPr>
+        <a:solidFill>
+          <a:srgbClr val="FFFFFF"/>
+        </a:solidFill>
+        <a:effectLst/>
+      </p:bgPr>
+    </p:bg>
+    <p:spTree>
+      <p:nvGrpSpPr>
+        <p:cNvPr id="1" name=""/>
+        <p:cNvGrpSpPr/>
+        <p:nvPr/>
+      </p:nvGrpSpPr>
+      <p:grpSpPr/>
+      <p:sp>
+        <p:nvSpPr>
+          <p:cNvPr id="2" name="TextBox 1"/>
+          <p:cNvSpPr txBox="1"/>
+          <p:nvPr/>
+        </p:nvSpPr>
+        <p:spPr>
+          <a:xfrm>
+            <a:off x="548640" y="320040"/>
+            <a:ext cx="11094415" cy="274320"/>
+          </a:xfrm>
+          <a:prstGeom prst="rect">
+            <a:avLst/>
+          </a:prstGeom>
+          <a:noFill/>
+        </p:spPr>
+        <p:txBody>
+          <a:bodyPr wrap="square" anchor="t" lIns="0" rIns="0" tIns="0" bIns="0"/>
+          <a:lstStyle/>
+          <a:p>
+            <a:pPr algn="l"/>
+            <a:r>
+              <a:rPr sz="1100" b="1" i="0">
+                <a:solidFill>
+                  <a:srgbClr val="54595D"/>
+                </a:solidFill>
+                <a:latin typeface="Calibri"/>
+              </a:rPr>
+              <a:t>CORE COMPONENT  ·  Core Paper 2</a:t>
+            </a:r>
+          </a:p>
+        </p:txBody>
+      </p:sp>
+      <p:sp>
+        <p:nvSpPr>
+          <p:cNvPr id="3" name="TextBox 2"/>
+          <p:cNvSpPr txBox="1"/>
+          <p:nvPr/>
+        </p:nvSpPr>
+        <p:spPr>
+          <a:xfrm>
+            <a:off x="548640" y="566928"/>
+            <a:ext cx="11094415" cy="822960"/>
+          </a:xfrm>
+          <a:prstGeom prst="rect">
+            <a:avLst/>
+          </a:prstGeom>
+          <a:noFill/>
+        </p:spPr>
+        <p:txBody>
+          <a:bodyPr wrap="square" anchor="ctr" lIns="0" rIns="0" tIns="0" bIns="0"/>
+          <a:lstStyle/>
+          <a:p>
+            <a:pPr algn="l"/>
+            <a:r>
+              <a:rPr sz="3200" b="1" i="0">
+                <a:solidFill>
+                  <a:srgbClr val="03306E"/>
+                </a:solidFill>
+                <a:latin typeface="Cambria"/>
+              </a:rPr>
+              <a:t>Check your understanding</a:t>
+            </a:r>
+          </a:p>
+        </p:txBody>
+      </p:sp>
+      <p:sp>
+        <p:nvSpPr>
+          <p:cNvPr id="4" name="TextBox 3"/>
+          <p:cNvSpPr txBox="1"/>
+          <p:nvPr/>
+        </p:nvSpPr>
+        <p:spPr>
+          <a:xfrm>
+            <a:off x="548640" y="6446520"/>
+            <a:ext cx="8229600" cy="274320"/>
+          </a:xfrm>
+          <a:prstGeom prst="rect">
+            <a:avLst/>
+          </a:prstGeom>
+          <a:noFill/>
+        </p:spPr>
+        <p:txBody>
+          <a:bodyPr wrap="square" anchor="t" lIns="0" rIns="0" tIns="0" bIns="0"/>
+          <a:lstStyle/>
+          <a:p>
+            <a:pPr algn="l"/>
+            <a:r>
+              <a:rPr sz="1000" b="0" i="0">
+                <a:solidFill>
+                  <a:srgbClr val="54595D"/>
+                </a:solidFill>
+                <a:latin typeface="Calibri"/>
+              </a:rPr>
+              <a:t>Digital Software Development T Level  ·  Data Quality, Systems and Analysis</a:t>
+            </a:r>
+          </a:p>
+        </p:txBody>
+      </p:sp>
+      <p:sp>
+        <p:nvSpPr>
+          <p:cNvPr id="5" name="TextBox 4"/>
+          <p:cNvSpPr txBox="1"/>
+          <p:nvPr/>
+        </p:nvSpPr>
+        <p:spPr>
+          <a:xfrm>
+            <a:off x="10728655" y="6446520"/>
+            <a:ext cx="914400" cy="274320"/>
+          </a:xfrm>
+          <a:prstGeom prst="rect">
+            <a:avLst/>
+          </a:prstGeom>
+          <a:noFill/>
+        </p:spPr>
+        <p:txBody>
+          <a:bodyPr wrap="square" anchor="t" lIns="0" rIns="0" tIns="0" bIns="0"/>
+          <a:lstStyle/>
+          <a:p>
+            <a:pPr algn="r"/>
+            <a:r>
+              <a:rPr sz="1000" b="0" i="0">
+                <a:solidFill>
+                  <a:srgbClr val="54595D"/>
+                </a:solidFill>
+                <a:latin typeface="Calibri"/>
+              </a:rPr>
+              <a:t>13</a:t>
+            </a:r>
+          </a:p>
+        </p:txBody>
+      </p:sp>
+      <p:sp>
+        <p:nvSpPr>
+          <p:cNvPr id="6" name="Oval 5"/>
+          <p:cNvSpPr/>
+          <p:nvPr/>
+        </p:nvSpPr>
+        <p:spPr>
+          <a:xfrm>
+            <a:off x="548640" y="1618488"/>
+            <a:ext cx="411480" cy="411480"/>
+          </a:xfrm>
+          <a:prstGeom prst="ellipse">
+            <a:avLst/>
+          </a:prstGeom>
+          <a:solidFill>
+            <a:srgbClr val="F2B705"/>
+          </a:solidFill>
+          <a:ln>
+            <a:noFill/>
+          </a:ln>
+          <a:effectLst/>
+        </p:spPr>
+        <p:style>
+          <a:lnRef idx="1">
+            <a:schemeClr val="accent1"/>
+          </a:lnRef>
+          <a:fillRef idx="3">
+            <a:schemeClr val="accent1"/>
+          </a:fillRef>
+          <a:effectRef idx="2">
+            <a:schemeClr val="accent1"/>
+          </a:effectRef>
+          <a:fontRef idx="minor">
+            <a:schemeClr val="lt1"/>
+          </a:fontRef>
+        </p:style>
+        <p:txBody>
+          <a:bodyPr rtlCol="0" anchor="ctr" lIns="0" rIns="0" tIns="0" bIns="0"/>
+          <a:lstStyle/>
+          <a:p>
+            <a:pPr algn="ctr"/>
+            <a:r>
+              <a:rPr sz="1400" b="1">
+                <a:solidFill>
+                  <a:srgbClr val="202122"/>
+                </a:solidFill>
+                <a:latin typeface="Calibri"/>
+              </a:rPr>
+              <a:t>1</a:t>
+            </a:r>
+          </a:p>
+        </p:txBody>
+      </p:sp>
+      <p:sp>
+        <p:nvSpPr>
+          <p:cNvPr id="7" name="TextBox 6"/>
+          <p:cNvSpPr txBox="1"/>
+          <p:nvPr/>
+        </p:nvSpPr>
+        <p:spPr>
+          <a:xfrm>
+            <a:off x="1234440" y="1600200"/>
+            <a:ext cx="10408615" cy="1030986"/>
+          </a:xfrm>
+          <a:prstGeom prst="rect">
+            <a:avLst/>
+          </a:prstGeom>
+          <a:noFill/>
+        </p:spPr>
+        <p:txBody>
+          <a:bodyPr wrap="square" anchor="t" lIns="0" rIns="0" tIns="0" bIns="0"/>
+          <a:lstStyle/>
+          <a:p>
+            <a:pPr algn="l"/>
+            <a:r>
+              <a:rPr sz="2200" b="0" i="0">
+                <a:solidFill>
+                  <a:srgbClr val="202122"/>
+                </a:solidFill>
+                <a:latin typeface="Calibri"/>
+              </a:rPr>
+              <a:t>Which V refers to trustworthiness?</a:t>
+            </a:r>
+          </a:p>
+        </p:txBody>
+      </p:sp>
+      <p:sp>
+        <p:nvSpPr>
+          <p:cNvPr id="8" name="Oval 7"/>
+          <p:cNvSpPr/>
+          <p:nvPr/>
+        </p:nvSpPr>
+        <p:spPr>
+          <a:xfrm>
+            <a:off x="548640" y="2814066"/>
+            <a:ext cx="411480" cy="411480"/>
+          </a:xfrm>
+          <a:prstGeom prst="ellipse">
+            <a:avLst/>
+          </a:prstGeom>
+          <a:solidFill>
+            <a:srgbClr val="F2B705"/>
+          </a:solidFill>
+          <a:ln>
+            <a:noFill/>
+          </a:ln>
+          <a:effectLst/>
+        </p:spPr>
+        <p:style>
+          <a:lnRef idx="1">
+            <a:schemeClr val="accent1"/>
+          </a:lnRef>
+          <a:fillRef idx="3">
+            <a:schemeClr val="accent1"/>
+          </a:fillRef>
+          <a:effectRef idx="2">
+            <a:schemeClr val="accent1"/>
+          </a:effectRef>
+          <a:fontRef idx="minor">
+            <a:schemeClr val="lt1"/>
+          </a:fontRef>
+        </p:style>
+        <p:txBody>
+          <a:bodyPr rtlCol="0" anchor="ctr" lIns="0" rIns="0" tIns="0" bIns="0"/>
+          <a:lstStyle/>
+          <a:p>
+            <a:pPr algn="ctr"/>
+            <a:r>
+              <a:rPr sz="1400" b="1">
+                <a:solidFill>
+                  <a:srgbClr val="202122"/>
+                </a:solidFill>
+                <a:latin typeface="Calibri"/>
+              </a:rPr>
+              <a:t>2</a:t>
+            </a:r>
+          </a:p>
+        </p:txBody>
+      </p:sp>
+      <p:sp>
+        <p:nvSpPr>
+          <p:cNvPr id="9" name="TextBox 8"/>
+          <p:cNvSpPr txBox="1"/>
+          <p:nvPr/>
+        </p:nvSpPr>
+        <p:spPr>
+          <a:xfrm>
+            <a:off x="1234440" y="2795778"/>
+            <a:ext cx="10408615" cy="1030986"/>
+          </a:xfrm>
+          <a:prstGeom prst="rect">
+            <a:avLst/>
+          </a:prstGeom>
+          <a:noFill/>
+        </p:spPr>
+        <p:txBody>
+          <a:bodyPr wrap="square" anchor="t" lIns="0" rIns="0" tIns="0" bIns="0"/>
+          <a:lstStyle/>
+          <a:p>
+            <a:pPr algn="l"/>
+            <a:r>
+              <a:rPr sz="2200" b="0" i="0">
+                <a:solidFill>
+                  <a:srgbClr val="202122"/>
+                </a:solidFill>
+                <a:latin typeface="Calibri"/>
+              </a:rPr>
+              <a:t>What is a transposition error?</a:t>
+            </a:r>
+          </a:p>
+        </p:txBody>
+      </p:sp>
+      <p:sp>
+        <p:nvSpPr>
+          <p:cNvPr id="10" name="Oval 9"/>
+          <p:cNvSpPr/>
+          <p:nvPr/>
+        </p:nvSpPr>
+        <p:spPr>
+          <a:xfrm>
+            <a:off x="548640" y="4009644"/>
+            <a:ext cx="411480" cy="411480"/>
+          </a:xfrm>
+          <a:prstGeom prst="ellipse">
+            <a:avLst/>
+          </a:prstGeom>
+          <a:solidFill>
+            <a:srgbClr val="F2B705"/>
+          </a:solidFill>
+          <a:ln>
+            <a:noFill/>
+          </a:ln>
+          <a:effectLst/>
+        </p:spPr>
+        <p:style>
+          <a:lnRef idx="1">
+            <a:schemeClr val="accent1"/>
+          </a:lnRef>
+          <a:fillRef idx="3">
+            <a:schemeClr val="accent1"/>
+          </a:fillRef>
+          <a:effectRef idx="2">
+            <a:schemeClr val="accent1"/>
+          </a:effectRef>
+          <a:fontRef idx="minor">
+            <a:schemeClr val="lt1"/>
+          </a:fontRef>
+        </p:style>
+        <p:txBody>
+          <a:bodyPr rtlCol="0" anchor="ctr" lIns="0" rIns="0" tIns="0" bIns="0"/>
+          <a:lstStyle/>
+          <a:p>
+            <a:pPr algn="ctr"/>
+            <a:r>
+              <a:rPr sz="1400" b="1">
+                <a:solidFill>
+                  <a:srgbClr val="202122"/>
+                </a:solidFill>
+                <a:latin typeface="Calibri"/>
+              </a:rPr>
+              <a:t>3</a:t>
+            </a:r>
+          </a:p>
+        </p:txBody>
+      </p:sp>
+      <p:sp>
+        <p:nvSpPr>
+          <p:cNvPr id="11" name="TextBox 10"/>
+          <p:cNvSpPr txBox="1"/>
+          <p:nvPr/>
+        </p:nvSpPr>
+        <p:spPr>
+          <a:xfrm>
+            <a:off x="1234440" y="3991356"/>
+            <a:ext cx="10408615" cy="1030986"/>
+          </a:xfrm>
+          <a:prstGeom prst="rect">
+            <a:avLst/>
+          </a:prstGeom>
+          <a:noFill/>
+        </p:spPr>
+        <p:txBody>
+          <a:bodyPr wrap="square" anchor="t" lIns="0" rIns="0" tIns="0" bIns="0"/>
+          <a:lstStyle/>
+          <a:p>
+            <a:pPr algn="l"/>
+            <a:r>
+              <a:rPr sz="2200" b="0" i="0">
+                <a:solidFill>
+                  <a:srgbClr val="202122"/>
+                </a:solidFill>
+                <a:latin typeface="Calibri"/>
+              </a:rPr>
+              <a:t>Which data model uses linked tables?</a:t>
+            </a:r>
+          </a:p>
+        </p:txBody>
+      </p:sp>
+      <p:sp>
+        <p:nvSpPr>
+          <p:cNvPr id="12" name="Oval 11"/>
+          <p:cNvSpPr/>
+          <p:nvPr/>
+        </p:nvSpPr>
+        <p:spPr>
+          <a:xfrm>
+            <a:off x="548640" y="5205221"/>
+            <a:ext cx="411480" cy="411480"/>
+          </a:xfrm>
+          <a:prstGeom prst="ellipse">
+            <a:avLst/>
+          </a:prstGeom>
+          <a:solidFill>
+            <a:srgbClr val="F2B705"/>
+          </a:solidFill>
+          <a:ln>
+            <a:noFill/>
+          </a:ln>
+          <a:effectLst/>
+        </p:spPr>
+        <p:style>
+          <a:lnRef idx="1">
+            <a:schemeClr val="accent1"/>
+          </a:lnRef>
+          <a:fillRef idx="3">
+            <a:schemeClr val="accent1"/>
+          </a:fillRef>
+          <a:effectRef idx="2">
+            <a:schemeClr val="accent1"/>
+          </a:effectRef>
+          <a:fontRef idx="minor">
+            <a:schemeClr val="lt1"/>
+          </a:fontRef>
+        </p:style>
+        <p:txBody>
+          <a:bodyPr rtlCol="0" anchor="ctr" lIns="0" rIns="0" tIns="0" bIns="0"/>
+          <a:lstStyle/>
+          <a:p>
+            <a:pPr algn="ctr"/>
+            <a:r>
+              <a:rPr sz="1400" b="1">
+                <a:solidFill>
+                  <a:srgbClr val="202122"/>
+                </a:solidFill>
+                <a:latin typeface="Calibri"/>
+              </a:rPr>
+              <a:t>4</a:t>
+            </a:r>
+          </a:p>
+        </p:txBody>
+      </p:sp>
+      <p:sp>
+        <p:nvSpPr>
+          <p:cNvPr id="13" name="TextBox 12"/>
+          <p:cNvSpPr txBox="1"/>
+          <p:nvPr/>
+        </p:nvSpPr>
+        <p:spPr>
+          <a:xfrm>
+            <a:off x="1234440" y="5186933"/>
+            <a:ext cx="10408615" cy="1030986"/>
+          </a:xfrm>
+          <a:prstGeom prst="rect">
+            <a:avLst/>
+          </a:prstGeom>
+          <a:noFill/>
+        </p:spPr>
+        <p:txBody>
+          <a:bodyPr wrap="square" anchor="t" lIns="0" rIns="0" tIns="0" bIns="0"/>
+          <a:lstStyle/>
+          <a:p>
+            <a:pPr algn="l"/>
+            <a:r>
+              <a:rPr sz="2200" b="0" i="0">
+                <a:solidFill>
+                  <a:srgbClr val="202122"/>
+                </a:solidFill>
+                <a:latin typeface="Calibri"/>
+              </a:rPr>
+              <a:t>What does a data lake hold?</a:t>
+            </a:r>
+          </a:p>
+        </p:txBody>
+      </p:sp>
+    </p:spTree>
+  </p:cSld>
+  <p:clrMapOvr>
+    <a:masterClrMapping/>
+  </p:clrMapOvr>
+</p:sld>
+</file>
+
+<file path=ppt/slides/slide14.xml><?xml version="1.0" encoding="utf-8"?>
+<p:sld xmlns:a="http://schemas.openxmlformats.org/drawingml/2006/main" xmlns:p="http://schemas.openxmlformats.org/presentationml/2006/main" xmlns:r="http://schemas.openxmlformats.org/officeDocument/2006/relationships">
+  <p:cSld>
+    <p:bg>
+      <p:bgPr>
+        <a:solidFill>
+          <a:srgbClr val="FFFFFF"/>
+        </a:solidFill>
+        <a:effectLst/>
+      </p:bgPr>
+    </p:bg>
+    <p:spTree>
+      <p:nvGrpSpPr>
+        <p:cNvPr id="1" name=""/>
+        <p:cNvGrpSpPr/>
+        <p:nvPr/>
+      </p:nvGrpSpPr>
+      <p:grpSpPr/>
+      <p:sp>
+        <p:nvSpPr>
+          <p:cNvPr id="2" name="TextBox 1"/>
+          <p:cNvSpPr txBox="1"/>
+          <p:nvPr/>
+        </p:nvSpPr>
+        <p:spPr>
+          <a:xfrm>
+            <a:off x="548640" y="320040"/>
+            <a:ext cx="11094415" cy="274320"/>
+          </a:xfrm>
+          <a:prstGeom prst="rect">
+            <a:avLst/>
+          </a:prstGeom>
+          <a:noFill/>
+        </p:spPr>
+        <p:txBody>
+          <a:bodyPr wrap="square" anchor="t" lIns="0" rIns="0" tIns="0" bIns="0"/>
+          <a:lstStyle/>
+          <a:p>
+            <a:pPr algn="l"/>
+            <a:r>
+              <a:rPr sz="1100" b="1" i="0">
+                <a:solidFill>
+                  <a:srgbClr val="54595D"/>
+                </a:solidFill>
+                <a:latin typeface="Calibri"/>
+              </a:rPr>
+              <a:t>CORE COMPONENT  ·  Core Paper 2</a:t>
+            </a:r>
+          </a:p>
+        </p:txBody>
+      </p:sp>
+      <p:sp>
+        <p:nvSpPr>
+          <p:cNvPr id="3" name="TextBox 2"/>
+          <p:cNvSpPr txBox="1"/>
+          <p:nvPr/>
+        </p:nvSpPr>
+        <p:spPr>
+          <a:xfrm>
+            <a:off x="548640" y="566928"/>
+            <a:ext cx="11094415" cy="822960"/>
+          </a:xfrm>
+          <a:prstGeom prst="rect">
+            <a:avLst/>
+          </a:prstGeom>
+          <a:noFill/>
+        </p:spPr>
+        <p:txBody>
+          <a:bodyPr wrap="square" anchor="ctr" lIns="0" rIns="0" tIns="0" bIns="0"/>
+          <a:lstStyle/>
+          <a:p>
+            <a:pPr algn="l"/>
+            <a:r>
+              <a:rPr sz="3200" b="1" i="0">
+                <a:solidFill>
+                  <a:srgbClr val="03306E"/>
+                </a:solidFill>
+                <a:latin typeface="Cambria"/>
+              </a:rPr>
+              <a:t>Answers</a:t>
+            </a:r>
+          </a:p>
+        </p:txBody>
+      </p:sp>
+      <p:sp>
+        <p:nvSpPr>
+          <p:cNvPr id="4" name="TextBox 3"/>
+          <p:cNvSpPr txBox="1"/>
+          <p:nvPr/>
+        </p:nvSpPr>
+        <p:spPr>
+          <a:xfrm>
+            <a:off x="548640" y="6446520"/>
+            <a:ext cx="8229600" cy="274320"/>
+          </a:xfrm>
+          <a:prstGeom prst="rect">
+            <a:avLst/>
+          </a:prstGeom>
+          <a:noFill/>
+        </p:spPr>
+        <p:txBody>
+          <a:bodyPr wrap="square" anchor="t" lIns="0" rIns="0" tIns="0" bIns="0"/>
+          <a:lstStyle/>
+          <a:p>
+            <a:pPr algn="l"/>
+            <a:r>
+              <a:rPr sz="1000" b="0" i="0">
+                <a:solidFill>
+                  <a:srgbClr val="54595D"/>
+                </a:solidFill>
+                <a:latin typeface="Calibri"/>
+              </a:rPr>
+              <a:t>Digital Software Development T Level  ·  Data Quality, Systems and Analysis</a:t>
+            </a:r>
+          </a:p>
+        </p:txBody>
+      </p:sp>
+      <p:sp>
+        <p:nvSpPr>
+          <p:cNvPr id="5" name="TextBox 4"/>
+          <p:cNvSpPr txBox="1"/>
+          <p:nvPr/>
+        </p:nvSpPr>
+        <p:spPr>
+          <a:xfrm>
+            <a:off x="10728655" y="6446520"/>
+            <a:ext cx="914400" cy="274320"/>
+          </a:xfrm>
+          <a:prstGeom prst="rect">
+            <a:avLst/>
+          </a:prstGeom>
+          <a:noFill/>
+        </p:spPr>
+        <p:txBody>
+          <a:bodyPr wrap="square" anchor="t" lIns="0" rIns="0" tIns="0" bIns="0"/>
+          <a:lstStyle/>
+          <a:p>
+            <a:pPr algn="r"/>
+            <a:r>
+              <a:rPr sz="1000" b="0" i="0">
+                <a:solidFill>
+                  <a:srgbClr val="54595D"/>
+                </a:solidFill>
+                <a:latin typeface="Calibri"/>
+              </a:rPr>
+              <a:t>14</a:t>
+            </a:r>
+          </a:p>
+        </p:txBody>
+      </p:sp>
+      <p:sp>
+        <p:nvSpPr>
+          <p:cNvPr id="6" name="Oval 5"/>
+          <p:cNvSpPr/>
+          <p:nvPr/>
+        </p:nvSpPr>
+        <p:spPr>
+          <a:xfrm>
+            <a:off x="548640" y="1618488"/>
+            <a:ext cx="411480" cy="411480"/>
+          </a:xfrm>
+          <a:prstGeom prst="ellipse">
+            <a:avLst/>
+          </a:prstGeom>
+          <a:solidFill>
+            <a:srgbClr val="F2B705"/>
+          </a:solidFill>
+          <a:ln>
+            <a:noFill/>
+          </a:ln>
+          <a:effectLst/>
+        </p:spPr>
+        <p:style>
+          <a:lnRef idx="1">
+            <a:schemeClr val="accent1"/>
+          </a:lnRef>
+          <a:fillRef idx="3">
+            <a:schemeClr val="accent1"/>
+          </a:fillRef>
+          <a:effectRef idx="2">
+            <a:schemeClr val="accent1"/>
+          </a:effectRef>
+          <a:fontRef idx="minor">
+            <a:schemeClr val="lt1"/>
+          </a:fontRef>
+        </p:style>
+        <p:txBody>
+          <a:bodyPr rtlCol="0" anchor="ctr" lIns="0" rIns="0" tIns="0" bIns="0"/>
+          <a:lstStyle/>
+          <a:p>
+            <a:pPr algn="ctr"/>
+            <a:r>
+              <a:rPr sz="1400" b="1">
+                <a:solidFill>
+                  <a:srgbClr val="202122"/>
+                </a:solidFill>
+                <a:latin typeface="Calibri"/>
+              </a:rPr>
+              <a:t>1</a:t>
+            </a:r>
+          </a:p>
+        </p:txBody>
+      </p:sp>
+      <p:sp>
+        <p:nvSpPr>
+          <p:cNvPr id="7" name="TextBox 6"/>
+          <p:cNvSpPr txBox="1"/>
+          <p:nvPr/>
+        </p:nvSpPr>
+        <p:spPr>
+          <a:xfrm>
+            <a:off x="1234440" y="1600200"/>
+            <a:ext cx="10408615" cy="1030986"/>
+          </a:xfrm>
+          <a:prstGeom prst="rect">
+            <a:avLst/>
+          </a:prstGeom>
+          <a:noFill/>
+        </p:spPr>
+        <p:txBody>
+          <a:bodyPr wrap="square" anchor="t" lIns="0" rIns="0" tIns="0" bIns="0"/>
+          <a:lstStyle/>
+          <a:p>
+            <a:pPr algn="l"/>
+            <a:r>
+              <a:rPr sz="1800" b="0" i="0">
+                <a:solidFill>
+                  <a:srgbClr val="54595D"/>
+                </a:solidFill>
+                <a:latin typeface="Calibri"/>
+              </a:rPr>
+              <a:t>Which V refers to trustworthiness?</a:t>
+            </a:r>
+          </a:p>
+          <a:p>
+            <a:r>
+              <a:rPr sz="1800" b="1">
+                <a:solidFill>
+                  <a:srgbClr val="03306E"/>
+                </a:solidFill>
+                <a:latin typeface="Calibri"/>
+              </a:rPr>
+              <a:t>Veracity.</a:t>
+            </a:r>
+          </a:p>
+        </p:txBody>
+      </p:sp>
+      <p:sp>
+        <p:nvSpPr>
+          <p:cNvPr id="8" name="Oval 7"/>
+          <p:cNvSpPr/>
+          <p:nvPr/>
+        </p:nvSpPr>
+        <p:spPr>
+          <a:xfrm>
+            <a:off x="548640" y="2814066"/>
+            <a:ext cx="411480" cy="411480"/>
+          </a:xfrm>
+          <a:prstGeom prst="ellipse">
+            <a:avLst/>
+          </a:prstGeom>
+          <a:solidFill>
+            <a:srgbClr val="F2B705"/>
+          </a:solidFill>
+          <a:ln>
+            <a:noFill/>
+          </a:ln>
+          <a:effectLst/>
+        </p:spPr>
+        <p:style>
+          <a:lnRef idx="1">
+            <a:schemeClr val="accent1"/>
+          </a:lnRef>
+          <a:fillRef idx="3">
+            <a:schemeClr val="accent1"/>
+          </a:fillRef>
+          <a:effectRef idx="2">
+            <a:schemeClr val="accent1"/>
+          </a:effectRef>
+          <a:fontRef idx="minor">
+            <a:schemeClr val="lt1"/>
+          </a:fontRef>
+        </p:style>
+        <p:txBody>
+          <a:bodyPr rtlCol="0" anchor="ctr" lIns="0" rIns="0" tIns="0" bIns="0"/>
+          <a:lstStyle/>
+          <a:p>
+            <a:pPr algn="ctr"/>
+            <a:r>
+              <a:rPr sz="1400" b="1">
+                <a:solidFill>
+                  <a:srgbClr val="202122"/>
+                </a:solidFill>
+                <a:latin typeface="Calibri"/>
+              </a:rPr>
+              <a:t>2</a:t>
+            </a:r>
+          </a:p>
+        </p:txBody>
+      </p:sp>
+      <p:sp>
+        <p:nvSpPr>
+          <p:cNvPr id="9" name="TextBox 8"/>
+          <p:cNvSpPr txBox="1"/>
+          <p:nvPr/>
+        </p:nvSpPr>
+        <p:spPr>
+          <a:xfrm>
+            <a:off x="1234440" y="2795778"/>
+            <a:ext cx="10408615" cy="1030986"/>
+          </a:xfrm>
+          <a:prstGeom prst="rect">
+            <a:avLst/>
+          </a:prstGeom>
+          <a:noFill/>
+        </p:spPr>
+        <p:txBody>
+          <a:bodyPr wrap="square" anchor="t" lIns="0" rIns="0" tIns="0" bIns="0"/>
+          <a:lstStyle/>
+          <a:p>
+            <a:pPr algn="l"/>
+            <a:r>
+              <a:rPr sz="1800" b="0" i="0">
+                <a:solidFill>
+                  <a:srgbClr val="54595D"/>
+                </a:solidFill>
+                <a:latin typeface="Calibri"/>
+              </a:rPr>
+              <a:t>What is a transposition error?</a:t>
+            </a:r>
+          </a:p>
+          <a:p>
+            <a:r>
+              <a:rPr sz="1800" b="1">
+                <a:solidFill>
+                  <a:srgbClr val="03306E"/>
+                </a:solidFill>
+                <a:latin typeface="Calibri"/>
+              </a:rPr>
+              <a:t>Swapping characters, e.g. 1234 becomes 1243.</a:t>
+            </a:r>
+          </a:p>
+        </p:txBody>
+      </p:sp>
+      <p:sp>
+        <p:nvSpPr>
+          <p:cNvPr id="10" name="Oval 9"/>
+          <p:cNvSpPr/>
+          <p:nvPr/>
+        </p:nvSpPr>
+        <p:spPr>
+          <a:xfrm>
+            <a:off x="548640" y="4009644"/>
+            <a:ext cx="411480" cy="411480"/>
+          </a:xfrm>
+          <a:prstGeom prst="ellipse">
+            <a:avLst/>
+          </a:prstGeom>
+          <a:solidFill>
+            <a:srgbClr val="F2B705"/>
+          </a:solidFill>
+          <a:ln>
+            <a:noFill/>
+          </a:ln>
+          <a:effectLst/>
+        </p:spPr>
+        <p:style>
+          <a:lnRef idx="1">
+            <a:schemeClr val="accent1"/>
+          </a:lnRef>
+          <a:fillRef idx="3">
+            <a:schemeClr val="accent1"/>
+          </a:fillRef>
+          <a:effectRef idx="2">
+            <a:schemeClr val="accent1"/>
+          </a:effectRef>
+          <a:fontRef idx="minor">
+            <a:schemeClr val="lt1"/>
+          </a:fontRef>
+        </p:style>
+        <p:txBody>
+          <a:bodyPr rtlCol="0" anchor="ctr" lIns="0" rIns="0" tIns="0" bIns="0"/>
+          <a:lstStyle/>
+          <a:p>
+            <a:pPr algn="ctr"/>
+            <a:r>
+              <a:rPr sz="1400" b="1">
+                <a:solidFill>
+                  <a:srgbClr val="202122"/>
+                </a:solidFill>
+                <a:latin typeface="Calibri"/>
+              </a:rPr>
+              <a:t>3</a:t>
+            </a:r>
+          </a:p>
+        </p:txBody>
+      </p:sp>
+      <p:sp>
+        <p:nvSpPr>
+          <p:cNvPr id="11" name="TextBox 10"/>
+          <p:cNvSpPr txBox="1"/>
+          <p:nvPr/>
+        </p:nvSpPr>
+        <p:spPr>
+          <a:xfrm>
+            <a:off x="1234440" y="3991356"/>
+            <a:ext cx="10408615" cy="1030986"/>
+          </a:xfrm>
+          <a:prstGeom prst="rect">
+            <a:avLst/>
+          </a:prstGeom>
+          <a:noFill/>
+        </p:spPr>
+        <p:txBody>
+          <a:bodyPr wrap="square" anchor="t" lIns="0" rIns="0" tIns="0" bIns="0"/>
+          <a:lstStyle/>
+          <a:p>
+            <a:pPr algn="l"/>
+            <a:r>
+              <a:rPr sz="1800" b="0" i="0">
+                <a:solidFill>
+                  <a:srgbClr val="54595D"/>
+                </a:solidFill>
+                <a:latin typeface="Calibri"/>
+              </a:rPr>
+              <a:t>Which data model uses linked tables?</a:t>
+            </a:r>
+          </a:p>
+          <a:p>
+            <a:r>
+              <a:rPr sz="1800" b="1">
+                <a:solidFill>
+                  <a:srgbClr val="03306E"/>
+                </a:solidFill>
+                <a:latin typeface="Calibri"/>
+              </a:rPr>
+              <a:t>Relational.</a:t>
+            </a:r>
+          </a:p>
+        </p:txBody>
+      </p:sp>
+      <p:sp>
+        <p:nvSpPr>
+          <p:cNvPr id="12" name="Oval 11"/>
+          <p:cNvSpPr/>
+          <p:nvPr/>
+        </p:nvSpPr>
+        <p:spPr>
+          <a:xfrm>
+            <a:off x="548640" y="5205221"/>
+            <a:ext cx="411480" cy="411480"/>
+          </a:xfrm>
+          <a:prstGeom prst="ellipse">
+            <a:avLst/>
+          </a:prstGeom>
+          <a:solidFill>
+            <a:srgbClr val="F2B705"/>
+          </a:solidFill>
+          <a:ln>
+            <a:noFill/>
+          </a:ln>
+          <a:effectLst/>
+        </p:spPr>
+        <p:style>
+          <a:lnRef idx="1">
+            <a:schemeClr val="accent1"/>
+          </a:lnRef>
+          <a:fillRef idx="3">
+            <a:schemeClr val="accent1"/>
+          </a:fillRef>
+          <a:effectRef idx="2">
+            <a:schemeClr val="accent1"/>
+          </a:effectRef>
+          <a:fontRef idx="minor">
+            <a:schemeClr val="lt1"/>
+          </a:fontRef>
+        </p:style>
+        <p:txBody>
+          <a:bodyPr rtlCol="0" anchor="ctr" lIns="0" rIns="0" tIns="0" bIns="0"/>
+          <a:lstStyle/>
+          <a:p>
+            <a:pPr algn="ctr"/>
+            <a:r>
+              <a:rPr sz="1400" b="1">
+                <a:solidFill>
+                  <a:srgbClr val="202122"/>
+                </a:solidFill>
+                <a:latin typeface="Calibri"/>
+              </a:rPr>
+              <a:t>4</a:t>
+            </a:r>
+          </a:p>
+        </p:txBody>
+      </p:sp>
+      <p:sp>
+        <p:nvSpPr>
+          <p:cNvPr id="13" name="TextBox 12"/>
+          <p:cNvSpPr txBox="1"/>
+          <p:nvPr/>
+        </p:nvSpPr>
+        <p:spPr>
+          <a:xfrm>
+            <a:off x="1234440" y="5186933"/>
+            <a:ext cx="10408615" cy="1030986"/>
+          </a:xfrm>
+          <a:prstGeom prst="rect">
+            <a:avLst/>
+          </a:prstGeom>
+          <a:noFill/>
+        </p:spPr>
+        <p:txBody>
+          <a:bodyPr wrap="square" anchor="t" lIns="0" rIns="0" tIns="0" bIns="0"/>
+          <a:lstStyle/>
+          <a:p>
+            <a:pPr algn="l"/>
+            <a:r>
+              <a:rPr sz="1800" b="0" i="0">
+                <a:solidFill>
+                  <a:srgbClr val="54595D"/>
+                </a:solidFill>
+                <a:latin typeface="Calibri"/>
+              </a:rPr>
+              <a:t>What does a data lake hold?</a:t>
+            </a:r>
+          </a:p>
+          <a:p>
+            <a:r>
+              <a:rPr sz="1800" b="1">
+                <a:solidFill>
+                  <a:srgbClr val="03306E"/>
+                </a:solidFill>
+                <a:latin typeface="Calibri"/>
+              </a:rPr>
+              <a:t>Raw data in any format.</a:t>
+            </a:r>
+          </a:p>
+        </p:txBody>
+      </p:sp>
+    </p:spTree>
+  </p:cSld>
+  <p:clrMapOvr>
+    <a:masterClrMapping/>
+  </p:clrMapOvr>
+</p:sld>
+</file>
+
+<file path=ppt/slides/slide15.xml><?xml version="1.0" encoding="utf-8"?>
+<p:sld xmlns:a="http://schemas.openxmlformats.org/drawingml/2006/main" xmlns:p="http://schemas.openxmlformats.org/presentationml/2006/main" xmlns:r="http://schemas.openxmlformats.org/officeDocument/2006/relationships">
+  <p:cSld>
+    <p:bg>
+      <p:bgPr>
+        <a:solidFill>
+          <a:srgbClr val="FFFFFF"/>
+        </a:solidFill>
+        <a:effectLst/>
+      </p:bgPr>
+    </p:bg>
+    <p:spTree>
+      <p:nvGrpSpPr>
+        <p:cNvPr id="1" name=""/>
+        <p:cNvGrpSpPr/>
+        <p:nvPr/>
+      </p:nvGrpSpPr>
+      <p:grpSpPr/>
+      <p:sp>
+        <p:nvSpPr>
+          <p:cNvPr id="2" name="TextBox 1"/>
+          <p:cNvSpPr txBox="1"/>
+          <p:nvPr/>
+        </p:nvSpPr>
+        <p:spPr>
+          <a:xfrm>
+            <a:off x="548640" y="320040"/>
+            <a:ext cx="11094415" cy="274320"/>
+          </a:xfrm>
+          <a:prstGeom prst="rect">
+            <a:avLst/>
+          </a:prstGeom>
+          <a:noFill/>
+        </p:spPr>
+        <p:txBody>
+          <a:bodyPr wrap="square" anchor="t" lIns="0" rIns="0" tIns="0" bIns="0"/>
+          <a:lstStyle/>
+          <a:p>
+            <a:pPr algn="l"/>
+            <a:r>
+              <a:rPr sz="1100" b="1" i="0">
+                <a:solidFill>
+                  <a:srgbClr val="54595D"/>
+                </a:solidFill>
+                <a:latin typeface="Calibri"/>
+              </a:rPr>
+              <a:t>CORE COMPONENT  ·  Core Paper 2</a:t>
+            </a:r>
+          </a:p>
+        </p:txBody>
+      </p:sp>
+      <p:sp>
+        <p:nvSpPr>
+          <p:cNvPr id="3" name="TextBox 2"/>
+          <p:cNvSpPr txBox="1"/>
+          <p:nvPr/>
+        </p:nvSpPr>
+        <p:spPr>
+          <a:xfrm>
+            <a:off x="548640" y="566928"/>
+            <a:ext cx="11094415" cy="822960"/>
+          </a:xfrm>
+          <a:prstGeom prst="rect">
+            <a:avLst/>
+          </a:prstGeom>
+          <a:noFill/>
+        </p:spPr>
+        <p:txBody>
+          <a:bodyPr wrap="square" anchor="ctr" lIns="0" rIns="0" tIns="0" bIns="0"/>
+          <a:lstStyle/>
+          <a:p>
+            <a:pPr algn="l"/>
+            <a:r>
+              <a:rPr sz="3200" b="1" i="0">
+                <a:solidFill>
+                  <a:srgbClr val="03306E"/>
+                </a:solidFill>
+                <a:latin typeface="Cambria"/>
+              </a:rPr>
+              <a:t>Activity: Clean and chart</a:t>
+            </a:r>
+          </a:p>
+        </p:txBody>
+      </p:sp>
+      <p:sp>
+        <p:nvSpPr>
+          <p:cNvPr id="4" name="TextBox 3"/>
+          <p:cNvSpPr txBox="1"/>
+          <p:nvPr/>
+        </p:nvSpPr>
+        <p:spPr>
+          <a:xfrm>
+            <a:off x="548640" y="6446520"/>
+            <a:ext cx="8229600" cy="274320"/>
+          </a:xfrm>
+          <a:prstGeom prst="rect">
+            <a:avLst/>
+          </a:prstGeom>
+          <a:noFill/>
+        </p:spPr>
+        <p:txBody>
+          <a:bodyPr wrap="square" anchor="t" lIns="0" rIns="0" tIns="0" bIns="0"/>
+          <a:lstStyle/>
+          <a:p>
+            <a:pPr algn="l"/>
+            <a:r>
+              <a:rPr sz="1000" b="0" i="0">
+                <a:solidFill>
+                  <a:srgbClr val="54595D"/>
+                </a:solidFill>
+                <a:latin typeface="Calibri"/>
+              </a:rPr>
+              <a:t>Digital Software Development T Level  ·  Data Quality, Systems and Analysis</a:t>
+            </a:r>
+          </a:p>
+        </p:txBody>
+      </p:sp>
+      <p:sp>
+        <p:nvSpPr>
+          <p:cNvPr id="5" name="TextBox 4"/>
+          <p:cNvSpPr txBox="1"/>
+          <p:nvPr/>
+        </p:nvSpPr>
+        <p:spPr>
+          <a:xfrm>
+            <a:off x="10728655" y="6446520"/>
+            <a:ext cx="914400" cy="274320"/>
+          </a:xfrm>
+          <a:prstGeom prst="rect">
+            <a:avLst/>
+          </a:prstGeom>
+          <a:noFill/>
+        </p:spPr>
+        <p:txBody>
+          <a:bodyPr wrap="square" anchor="t" lIns="0" rIns="0" tIns="0" bIns="0"/>
+          <a:lstStyle/>
+          <a:p>
+            <a:pPr algn="r"/>
+            <a:r>
+              <a:rPr sz="1000" b="0" i="0">
+                <a:solidFill>
+                  <a:srgbClr val="54595D"/>
+                </a:solidFill>
+                <a:latin typeface="Calibri"/>
+              </a:rPr>
+              <a:t>15</a:t>
+            </a:r>
+          </a:p>
+        </p:txBody>
+      </p:sp>
+      <p:sp>
+        <p:nvSpPr>
+          <p:cNvPr id="6" name="Rounded Rectangle 5"/>
+          <p:cNvSpPr/>
+          <p:nvPr/>
+        </p:nvSpPr>
+        <p:spPr>
+          <a:xfrm>
+            <a:off x="548640" y="1508760"/>
+            <a:ext cx="2011680" cy="457200"/>
+          </a:xfrm>
+          <a:prstGeom prst="roundRect">
+            <a:avLst>
+              <a:gd name="adj" fmla="val 50000"/>
+            </a:avLst>
+          </a:prstGeom>
+          <a:solidFill>
+            <a:srgbClr val="F2B705"/>
+          </a:solidFill>
+          <a:ln>
+            <a:noFill/>
+          </a:ln>
+          <a:effectLst/>
+        </p:spPr>
+        <p:style>
+          <a:lnRef idx="1">
+            <a:schemeClr val="accent1"/>
+          </a:lnRef>
+          <a:fillRef idx="3">
+            <a:schemeClr val="accent1"/>
+          </a:fillRef>
+          <a:effectRef idx="2">
+            <a:schemeClr val="accent1"/>
+          </a:effectRef>
+          <a:fontRef idx="minor">
+            <a:schemeClr val="lt1"/>
+          </a:fontRef>
+        </p:style>
+        <p:txBody>
+          <a:bodyPr rtlCol="0" anchor="ctr"/>
+          <a:lstStyle/>
+          <a:p/>
+        </p:txBody>
+      </p:sp>
+      <p:sp>
+        <p:nvSpPr>
+          <p:cNvPr id="7" name="TextBox 6"/>
+          <p:cNvSpPr txBox="1"/>
+          <p:nvPr/>
+        </p:nvSpPr>
+        <p:spPr>
+          <a:xfrm>
+            <a:off x="548640" y="1508760"/>
+            <a:ext cx="2011680" cy="457200"/>
+          </a:xfrm>
+          <a:prstGeom prst="rect">
+            <a:avLst/>
+          </a:prstGeom>
+          <a:noFill/>
+        </p:spPr>
+        <p:txBody>
+          <a:bodyPr wrap="square" anchor="ctr" lIns="0" rIns="0" tIns="0" bIns="0"/>
+          <a:lstStyle/>
+          <a:p>
+            <a:pPr algn="ctr"/>
+            <a:r>
+              <a:rPr sz="1400" b="1" i="0">
+                <a:solidFill>
+                  <a:srgbClr val="202122"/>
+                </a:solidFill>
+                <a:latin typeface="Calibri"/>
+              </a:rPr>
+              <a:t>30 minutes</a:t>
+            </a:r>
+          </a:p>
+        </p:txBody>
+      </p:sp>
+      <p:sp>
+        <p:nvSpPr>
+          <p:cNvPr id="8" name="TextBox 7"/>
+          <p:cNvSpPr txBox="1"/>
+          <p:nvPr/>
+        </p:nvSpPr>
+        <p:spPr>
+          <a:xfrm>
+            <a:off x="2743200" y="1508760"/>
+            <a:ext cx="4754880" cy="457200"/>
+          </a:xfrm>
+          <a:prstGeom prst="rect">
+            <a:avLst/>
+          </a:prstGeom>
+          <a:noFill/>
+        </p:spPr>
+        <p:txBody>
+          <a:bodyPr wrap="square" anchor="ctr" lIns="0" rIns="0" tIns="0" bIns="0"/>
+          <a:lstStyle/>
+          <a:p>
+            <a:pPr algn="l"/>
+            <a:r>
+              <a:rPr sz="1400" b="0" i="1">
+                <a:solidFill>
+                  <a:srgbClr val="54595D"/>
+                </a:solidFill>
+                <a:latin typeface="Calibri"/>
+              </a:rPr>
+              <a:t>Individual, in Python</a:t>
+            </a:r>
+          </a:p>
+        </p:txBody>
+      </p:sp>
+      <p:sp>
+        <p:nvSpPr>
+          <p:cNvPr id="9" name="Oval 8"/>
+          <p:cNvSpPr/>
+          <p:nvPr/>
+        </p:nvSpPr>
+        <p:spPr>
+          <a:xfrm>
+            <a:off x="548640" y="2482596"/>
+            <a:ext cx="384048" cy="384048"/>
+          </a:xfrm>
+          <a:prstGeom prst="ellipse">
+            <a:avLst/>
+          </a:prstGeom>
+          <a:solidFill>
+            <a:srgbClr val="0645AD"/>
+          </a:solidFill>
+          <a:ln>
+            <a:noFill/>
+          </a:ln>
+          <a:effectLst/>
+        </p:spPr>
+        <p:style>
+          <a:lnRef idx="1">
+            <a:schemeClr val="accent1"/>
+          </a:lnRef>
+          <a:fillRef idx="3">
+            <a:schemeClr val="accent1"/>
+          </a:fillRef>
+          <a:effectRef idx="2">
+            <a:schemeClr val="accent1"/>
+          </a:effectRef>
+          <a:fontRef idx="minor">
+            <a:schemeClr val="lt1"/>
+          </a:fontRef>
+        </p:style>
+        <p:txBody>
+          <a:bodyPr rtlCol="0" anchor="ctr" lIns="0" rIns="0" tIns="0" bIns="0"/>
+          <a:lstStyle/>
+          <a:p>
+            <a:pPr algn="ctr"/>
+            <a:r>
+              <a:rPr sz="1300" b="1">
+                <a:solidFill>
+                  <a:srgbClr val="FFFFFF"/>
+                </a:solidFill>
+                <a:latin typeface="Calibri"/>
+              </a:rPr>
+              <a:t>1</a:t>
+            </a:r>
+          </a:p>
+        </p:txBody>
+      </p:sp>
+      <p:sp>
+        <p:nvSpPr>
+          <p:cNvPr id="10" name="TextBox 9"/>
+          <p:cNvSpPr txBox="1"/>
+          <p:nvPr/>
+        </p:nvSpPr>
+        <p:spPr>
+          <a:xfrm>
+            <a:off x="1143000" y="2240280"/>
+            <a:ext cx="5943600" cy="868680"/>
+          </a:xfrm>
+          <a:prstGeom prst="rect">
+            <a:avLst/>
+          </a:prstGeom>
+          <a:noFill/>
+        </p:spPr>
+        <p:txBody>
+          <a:bodyPr wrap="square" anchor="ctr" lIns="0" rIns="0" tIns="0" bIns="0"/>
+          <a:lstStyle/>
+          <a:p>
+            <a:pPr algn="l"/>
+            <a:r>
+              <a:rPr sz="1700" b="0" i="0">
+                <a:solidFill>
+                  <a:srgbClr val="202122"/>
+                </a:solidFill>
+                <a:latin typeface="Calibri"/>
+              </a:rPr>
+              <a:t>Load the messy CSV from your teacher with pandas.</a:t>
+            </a:r>
+          </a:p>
+        </p:txBody>
+      </p:sp>
+      <p:sp>
+        <p:nvSpPr>
+          <p:cNvPr id="11" name="Oval 10"/>
+          <p:cNvSpPr/>
+          <p:nvPr/>
+        </p:nvSpPr>
+        <p:spPr>
+          <a:xfrm>
+            <a:off x="548640" y="3461004"/>
+            <a:ext cx="384048" cy="384048"/>
+          </a:xfrm>
+          <a:prstGeom prst="ellipse">
+            <a:avLst/>
+          </a:prstGeom>
+          <a:solidFill>
+            <a:srgbClr val="0645AD"/>
+          </a:solidFill>
+          <a:ln>
+            <a:noFill/>
+          </a:ln>
+          <a:effectLst/>
+        </p:spPr>
+        <p:style>
+          <a:lnRef idx="1">
+            <a:schemeClr val="accent1"/>
+          </a:lnRef>
+          <a:fillRef idx="3">
+            <a:schemeClr val="accent1"/>
+          </a:fillRef>
+          <a:effectRef idx="2">
+            <a:schemeClr val="accent1"/>
+          </a:effectRef>
+          <a:fontRef idx="minor">
+            <a:schemeClr val="lt1"/>
+          </a:fontRef>
+        </p:style>
+        <p:txBody>
+          <a:bodyPr rtlCol="0" anchor="ctr" lIns="0" rIns="0" tIns="0" bIns="0"/>
+          <a:lstStyle/>
+          <a:p>
+            <a:pPr algn="ctr"/>
+            <a:r>
+              <a:rPr sz="1300" b="1">
+                <a:solidFill>
+                  <a:srgbClr val="FFFFFF"/>
+                </a:solidFill>
+                <a:latin typeface="Calibri"/>
+              </a:rPr>
+              <a:t>2</a:t>
+            </a:r>
+          </a:p>
+        </p:txBody>
+      </p:sp>
+      <p:sp>
+        <p:nvSpPr>
+          <p:cNvPr id="12" name="TextBox 11"/>
+          <p:cNvSpPr txBox="1"/>
+          <p:nvPr/>
+        </p:nvSpPr>
+        <p:spPr>
+          <a:xfrm>
+            <a:off x="1143000" y="3218688"/>
+            <a:ext cx="5943600" cy="868680"/>
+          </a:xfrm>
+          <a:prstGeom prst="rect">
+            <a:avLst/>
+          </a:prstGeom>
+          <a:noFill/>
+        </p:spPr>
+        <p:txBody>
+          <a:bodyPr wrap="square" anchor="ctr" lIns="0" rIns="0" tIns="0" bIns="0"/>
+          <a:lstStyle/>
+          <a:p>
+            <a:pPr algn="l"/>
+            <a:r>
+              <a:rPr sz="1700" b="0" i="0">
+                <a:solidFill>
+                  <a:srgbClr val="202122"/>
+                </a:solidFill>
+                <a:latin typeface="Calibri"/>
+              </a:rPr>
+              <a:t>Clean it: fix inconsistent values and remove duplicates.</a:t>
+            </a:r>
+          </a:p>
+        </p:txBody>
+      </p:sp>
+      <p:sp>
+        <p:nvSpPr>
+          <p:cNvPr id="13" name="Oval 12"/>
+          <p:cNvSpPr/>
+          <p:nvPr/>
+        </p:nvSpPr>
+        <p:spPr>
+          <a:xfrm>
+            <a:off x="548640" y="4439412"/>
+            <a:ext cx="384048" cy="384048"/>
+          </a:xfrm>
+          <a:prstGeom prst="ellipse">
+            <a:avLst/>
+          </a:prstGeom>
+          <a:solidFill>
+            <a:srgbClr val="0645AD"/>
+          </a:solidFill>
+          <a:ln>
+            <a:noFill/>
+          </a:ln>
+          <a:effectLst/>
+        </p:spPr>
+        <p:style>
+          <a:lnRef idx="1">
+            <a:schemeClr val="accent1"/>
+          </a:lnRef>
+          <a:fillRef idx="3">
+            <a:schemeClr val="accent1"/>
+          </a:fillRef>
+          <a:effectRef idx="2">
+            <a:schemeClr val="accent1"/>
+          </a:effectRef>
+          <a:fontRef idx="minor">
+            <a:schemeClr val="lt1"/>
+          </a:fontRef>
+        </p:style>
+        <p:txBody>
+          <a:bodyPr rtlCol="0" anchor="ctr" lIns="0" rIns="0" tIns="0" bIns="0"/>
+          <a:lstStyle/>
+          <a:p>
+            <a:pPr algn="ctr"/>
+            <a:r>
+              <a:rPr sz="1300" b="1">
+                <a:solidFill>
+                  <a:srgbClr val="FFFFFF"/>
+                </a:solidFill>
+                <a:latin typeface="Calibri"/>
+              </a:rPr>
+              <a:t>3</a:t>
+            </a:r>
+          </a:p>
+        </p:txBody>
+      </p:sp>
+      <p:sp>
+        <p:nvSpPr>
+          <p:cNvPr id="14" name="TextBox 13"/>
+          <p:cNvSpPr txBox="1"/>
+          <p:nvPr/>
+        </p:nvSpPr>
+        <p:spPr>
+          <a:xfrm>
+            <a:off x="1143000" y="4197096"/>
+            <a:ext cx="5943600" cy="868680"/>
+          </a:xfrm>
+          <a:prstGeom prst="rect">
+            <a:avLst/>
+          </a:prstGeom>
+          <a:noFill/>
+        </p:spPr>
+        <p:txBody>
+          <a:bodyPr wrap="square" anchor="ctr" lIns="0" rIns="0" tIns="0" bIns="0"/>
+          <a:lstStyle/>
+          <a:p>
+            <a:pPr algn="l"/>
+            <a:r>
+              <a:rPr sz="1700" b="0" i="0">
+                <a:solidFill>
+                  <a:srgbClr val="202122"/>
+                </a:solidFill>
+                <a:latin typeface="Calibri"/>
+              </a:rPr>
+              <a:t>Calculate a total and an average.</a:t>
+            </a:r>
+          </a:p>
+        </p:txBody>
+      </p:sp>
+      <p:sp>
+        <p:nvSpPr>
+          <p:cNvPr id="15" name="Oval 14"/>
+          <p:cNvSpPr/>
+          <p:nvPr/>
+        </p:nvSpPr>
+        <p:spPr>
+          <a:xfrm>
+            <a:off x="548640" y="5417820"/>
+            <a:ext cx="384048" cy="384048"/>
+          </a:xfrm>
+          <a:prstGeom prst="ellipse">
+            <a:avLst/>
+          </a:prstGeom>
+          <a:solidFill>
+            <a:srgbClr val="0645AD"/>
+          </a:solidFill>
+          <a:ln>
+            <a:noFill/>
+          </a:ln>
+          <a:effectLst/>
+        </p:spPr>
+        <p:style>
+          <a:lnRef idx="1">
+            <a:schemeClr val="accent1"/>
+          </a:lnRef>
+          <a:fillRef idx="3">
+            <a:schemeClr val="accent1"/>
+          </a:fillRef>
+          <a:effectRef idx="2">
+            <a:schemeClr val="accent1"/>
+          </a:effectRef>
+          <a:fontRef idx="minor">
+            <a:schemeClr val="lt1"/>
+          </a:fontRef>
+        </p:style>
+        <p:txBody>
+          <a:bodyPr rtlCol="0" anchor="ctr" lIns="0" rIns="0" tIns="0" bIns="0"/>
+          <a:lstStyle/>
+          <a:p>
+            <a:pPr algn="ctr"/>
+            <a:r>
+              <a:rPr sz="1300" b="1">
+                <a:solidFill>
+                  <a:srgbClr val="FFFFFF"/>
+                </a:solidFill>
+                <a:latin typeface="Calibri"/>
+              </a:rPr>
+              <a:t>4</a:t>
+            </a:r>
+          </a:p>
+        </p:txBody>
+      </p:sp>
+      <p:sp>
+        <p:nvSpPr>
+          <p:cNvPr id="16" name="TextBox 15"/>
+          <p:cNvSpPr txBox="1"/>
+          <p:nvPr/>
+        </p:nvSpPr>
+        <p:spPr>
+          <a:xfrm>
+            <a:off x="1143000" y="5175504"/>
+            <a:ext cx="5943600" cy="868680"/>
+          </a:xfrm>
+          <a:prstGeom prst="rect">
+            <a:avLst/>
+          </a:prstGeom>
+          <a:noFill/>
+        </p:spPr>
+        <p:txBody>
+          <a:bodyPr wrap="square" anchor="ctr" lIns="0" rIns="0" tIns="0" bIns="0"/>
+          <a:lstStyle/>
+          <a:p>
+            <a:pPr algn="l"/>
+            <a:r>
+              <a:rPr sz="1700" b="0" i="0">
+                <a:solidFill>
+                  <a:srgbClr val="202122"/>
+                </a:solidFill>
+                <a:latin typeface="Calibri"/>
+              </a:rPr>
+              <a:t>Plot a labelled chart with Matplotlib for a manager.</a:t>
+            </a:r>
+          </a:p>
+        </p:txBody>
+      </p:sp>
+      <p:sp>
+        <p:nvSpPr>
+          <p:cNvPr id="17" name="Rounded Rectangle 16"/>
+          <p:cNvSpPr/>
+          <p:nvPr/>
+        </p:nvSpPr>
+        <p:spPr>
+          <a:xfrm>
+            <a:off x="7772400" y="1508760"/>
+            <a:ext cx="3867912" cy="4572000"/>
+          </a:xfrm>
+          <a:prstGeom prst="roundRect">
+            <a:avLst>
+              <a:gd name="adj" fmla="val 8000"/>
+            </a:avLst>
+          </a:prstGeom>
+          <a:solidFill>
+            <a:srgbClr val="EAF3FF"/>
+          </a:solidFill>
+          <a:ln>
+            <a:noFill/>
+          </a:ln>
+          <a:effectLst/>
+        </p:spPr>
+        <p:style>
+          <a:lnRef idx="1">
+            <a:schemeClr val="accent1"/>
+          </a:lnRef>
+          <a:fillRef idx="3">
+            <a:schemeClr val="accent1"/>
+          </a:fillRef>
+          <a:effectRef idx="2">
+            <a:schemeClr val="accent1"/>
+          </a:effectRef>
+          <a:fontRef idx="minor">
+            <a:schemeClr val="lt1"/>
+          </a:fontRef>
+        </p:style>
+        <p:txBody>
+          <a:bodyPr rtlCol="0" anchor="ctr"/>
+          <a:lstStyle/>
+          <a:p/>
+        </p:txBody>
+      </p:sp>
+      <p:sp>
+        <p:nvSpPr>
+          <p:cNvPr id="18" name="TextBox 17"/>
+          <p:cNvSpPr txBox="1"/>
+          <p:nvPr/>
+        </p:nvSpPr>
+        <p:spPr>
+          <a:xfrm>
+            <a:off x="8046720" y="1737360"/>
+            <a:ext cx="3291840" cy="365760"/>
+          </a:xfrm>
+          <a:prstGeom prst="rect">
+            <a:avLst/>
+          </a:prstGeom>
+          <a:noFill/>
+        </p:spPr>
+        <p:txBody>
+          <a:bodyPr wrap="square" anchor="t" lIns="0" rIns="0" tIns="0" bIns="0"/>
+          <a:lstStyle/>
+          <a:p>
+            <a:pPr algn="l"/>
+            <a:r>
+              <a:rPr sz="1300" b="1" i="0">
+                <a:solidFill>
+                  <a:srgbClr val="0645AD"/>
+                </a:solidFill>
+                <a:latin typeface="Calibri"/>
+              </a:rPr>
+              <a:t>SUCCESS CRITERIA</a:t>
+            </a:r>
+          </a:p>
+        </p:txBody>
+      </p:sp>
+      <p:sp>
+        <p:nvSpPr>
+          <p:cNvPr id="19" name="TextBox 18"/>
+          <p:cNvSpPr txBox="1"/>
+          <p:nvPr/>
+        </p:nvSpPr>
+        <p:spPr>
+          <a:xfrm>
+            <a:off x="8046720" y="2240280"/>
+            <a:ext cx="3337560" cy="3657600"/>
+          </a:xfrm>
+          <a:prstGeom prst="rect">
+            <a:avLst/>
+          </a:prstGeom>
+          <a:noFill/>
+        </p:spPr>
+        <p:txBody>
+          <a:bodyPr wrap="square" lIns="0" rIns="0" tIns="0" bIns="0">
+            <a:spAutoFit/>
+          </a:bodyPr>
+          <a:lstStyle/>
+          <a:p>
+            <a:pPr marL="274320" indent="-274320">
+              <a:spcAft>
+                <a:spcPts val="810"/>
+              </a:spcAft>
+              <a:buClr>
+                <a:srgbClr val="0645AD"/>
+              </a:buClr>
+              <a:buFont typeface="Arial"/>
+              <a:buChar char="•"/>
+            </a:pPr>
+            <a:r>
+              <a:rPr sz="1800" b="0">
+                <a:solidFill>
+                  <a:srgbClr val="202122"/>
+                </a:solidFill>
+                <a:latin typeface="Calibri"/>
+              </a:rPr>
+              <a:t>Duplicates removed</a:t>
+            </a:r>
+          </a:p>
+          <a:p>
+            <a:pPr marL="274320" indent="-274320">
+              <a:spcAft>
+                <a:spcPts val="810"/>
+              </a:spcAft>
+              <a:buClr>
+                <a:srgbClr val="0645AD"/>
+              </a:buClr>
+              <a:buFont typeface="Arial"/>
+              <a:buChar char="•"/>
+            </a:pPr>
+            <a:r>
+              <a:rPr sz="1800" b="0">
+                <a:solidFill>
+                  <a:srgbClr val="202122"/>
+                </a:solidFill>
+                <a:latin typeface="Calibri"/>
+              </a:rPr>
+              <a:t>Calculations correct</a:t>
+            </a:r>
+          </a:p>
+          <a:p>
+            <a:pPr marL="274320" indent="-274320">
+              <a:spcAft>
+                <a:spcPts val="810"/>
+              </a:spcAft>
+              <a:buClr>
+                <a:srgbClr val="0645AD"/>
+              </a:buClr>
+              <a:buFont typeface="Arial"/>
+              <a:buChar char="•"/>
+            </a:pPr>
+            <a:r>
+              <a:rPr sz="1800" b="0">
+                <a:solidFill>
+                  <a:srgbClr val="202122"/>
+                </a:solidFill>
+                <a:latin typeface="Calibri"/>
+              </a:rPr>
+              <a:t>Chart has title, labels and legend</a:t>
+            </a:r>
+          </a:p>
+        </p:txBody>
+      </p:sp>
+    </p:spTree>
+  </p:cSld>
+  <p:clrMapOvr>
+    <a:masterClrMapping/>
+  </p:clrMapOvr>
+</p:sld>
+</file>
+
+<file path=ppt/slides/slide16.xml><?xml version="1.0" encoding="utf-8"?>
+<p:sld xmlns:a="http://schemas.openxmlformats.org/drawingml/2006/main" xmlns:p="http://schemas.openxmlformats.org/presentationml/2006/main" xmlns:r="http://schemas.openxmlformats.org/officeDocument/2006/relationships">
+  <p:cSld>
+    <p:bg>
+      <p:bgPr>
+        <a:solidFill>
           <a:srgbClr val="03306E"/>
         </a:solidFill>
         <a:effectLst/>
@@ -5439,22 +9411,77 @@
       </p:sp>
       <p:sp>
         <p:nvSpPr>
-          <p:cNvPr id="6" name="Rounded Rectangle 5"/>
+          <p:cNvPr id="6" name="TextBox 5"/>
+          <p:cNvSpPr txBox="1"/>
+          <p:nvPr/>
+        </p:nvSpPr>
+        <p:spPr>
+          <a:xfrm>
+            <a:off x="548640" y="1554480"/>
+            <a:ext cx="6720840" cy="4617720"/>
+          </a:xfrm>
+          <a:prstGeom prst="rect">
+            <a:avLst/>
+          </a:prstGeom>
+          <a:noFill/>
+        </p:spPr>
+        <p:txBody>
+          <a:bodyPr wrap="square" lIns="0" rIns="0" tIns="0" bIns="0">
+            <a:spAutoFit/>
+          </a:bodyPr>
+          <a:lstStyle/>
+          <a:p>
+            <a:pPr>
+              <a:spcAft>
+                <a:spcPts val="1320"/>
+              </a:spcAft>
+            </a:pPr>
+            <a:r>
+              <a:rPr sz="2200" b="0">
+                <a:solidFill>
+                  <a:srgbClr val="202122"/>
+                </a:solidFill>
+                <a:latin typeface="Calibri"/>
+              </a:rPr>
+              <a:t>Big Data is data too big or complex for ordinary tools, described by six Vs: volume (amount), variety (many types), variability (changing meaning and flow), velocity (speed of arrival), veracity (how trustworthy it is) and value (the insight it gives).</a:t>
+            </a:r>
+          </a:p>
+          <a:p>
+            <a:pPr>
+              <a:spcAft>
+                <a:spcPts val="1320"/>
+              </a:spcAft>
+            </a:pPr>
+            <a:r>
+              <a:rPr sz="2200" b="0">
+                <a:solidFill>
+                  <a:srgbClr val="202122"/>
+                </a:solidFill>
+                <a:latin typeface="Calibri"/>
+              </a:rPr>
+              <a:t>Data quality is maintained through validation, verification, reliability, consistency, integrity and redundancy. Maintaining data costs time, skills and money.</a:t>
+            </a:r>
+          </a:p>
+        </p:txBody>
+      </p:sp>
+      <p:sp>
+        <p:nvSpPr>
+          <p:cNvPr id="7" name="Rounded Rectangle 6"/>
           <p:cNvSpPr/>
           <p:nvPr/>
         </p:nvSpPr>
         <p:spPr>
           <a:xfrm>
-            <a:off x="548640" y="1600200"/>
-            <a:ext cx="3515258" cy="2148840"/>
+            <a:off x="7772400" y="1554480"/>
+            <a:ext cx="3867912" cy="4526280"/>
           </a:xfrm>
           <a:prstGeom prst="roundRect">
             <a:avLst>
-              <a:gd name="adj" fmla="val 6000"/>
+              <a:gd name="adj" fmla="val 8000"/>
             </a:avLst>
           </a:prstGeom>
           <a:solidFill>
-            <a:srgbClr val="EAF3FF"/>
+            <a:srgbClr val="03306E"/>
           </a:solidFill>
           <a:ln>
             <a:noFill/>
@@ -5483,14 +9510,14 @@
       </p:sp>
       <p:sp>
         <p:nvSpPr>
-          <p:cNvPr id="7" name="Oval 6"/>
+          <p:cNvPr id="8" name="Oval 7"/>
           <p:cNvSpPr/>
           <p:nvPr/>
         </p:nvSpPr>
         <p:spPr>
           <a:xfrm>
-            <a:off x="777240" y="1828800"/>
-            <a:ext cx="457200" cy="457200"/>
+            <a:off x="8046720" y="1828800"/>
+            <a:ext cx="548640" cy="548640"/>
           </a:xfrm>
           <a:prstGeom prst="ellipse">
             <a:avLst/>
@@ -5523,60 +9550,60 @@
           <a:p>
             <a:pPr algn="ctr"/>
             <a:r>
-              <a:rPr sz="1500" b="1">
+              <a:rPr sz="1300" b="1">
                 <a:solidFill>
                   <a:srgbClr val="202122"/>
                 </a:solidFill>
                 <a:latin typeface="Calibri"/>
               </a:rPr>
-              <a:t>1</a:t>
-            </a:r>
-          </a:p>
-        </p:txBody>
-      </p:sp>
-      <p:sp>
-        <p:nvSpPr>
-          <p:cNvPr id="8" name="TextBox 7"/>
-          <p:cNvSpPr txBox="1"/>
-          <p:nvPr/>
-        </p:nvSpPr>
-        <p:spPr>
-          <a:xfrm>
-            <a:off x="1371600" y="1801368"/>
-            <a:ext cx="2509418" cy="512064"/>
-          </a:xfrm>
-          <a:prstGeom prst="rect">
-            <a:avLst/>
-          </a:prstGeom>
-          <a:noFill/>
-        </p:spPr>
-        <p:txBody>
-          <a:bodyPr wrap="square" anchor="ctr" lIns="0" rIns="0" tIns="0" bIns="0"/>
+              <a:t>e.g.</a:t>
+            </a:r>
+          </a:p>
+        </p:txBody>
+      </p:sp>
+      <p:sp>
+        <p:nvSpPr>
+          <p:cNvPr id="9" name="TextBox 8"/>
+          <p:cNvSpPr txBox="1"/>
+          <p:nvPr/>
+        </p:nvSpPr>
+        <p:spPr>
+          <a:xfrm>
+            <a:off x="8046720" y="2560320"/>
+            <a:ext cx="3291840" cy="365760"/>
+          </a:xfrm>
+          <a:prstGeom prst="rect">
+            <a:avLst/>
+          </a:prstGeom>
+          <a:noFill/>
+        </p:spPr>
+        <p:txBody>
+          <a:bodyPr wrap="square" anchor="t" lIns="0" rIns="0" tIns="0" bIns="0"/>
           <a:lstStyle/>
           <a:p>
             <a:pPr algn="l"/>
             <a:r>
-              <a:rPr sz="1900" b="1" i="0">
-                <a:solidFill>
-                  <a:srgbClr val="03306E"/>
-                </a:solidFill>
-                <a:latin typeface="Calibri"/>
-              </a:rPr>
-              <a:t>Volume</a:t>
-            </a:r>
-          </a:p>
-        </p:txBody>
-      </p:sp>
-      <p:sp>
-        <p:nvSpPr>
-          <p:cNvPr id="9" name="TextBox 8"/>
-          <p:cNvSpPr txBox="1"/>
-          <p:nvPr/>
-        </p:nvSpPr>
-        <p:spPr>
-          <a:xfrm>
-            <a:off x="777240" y="2468880"/>
-            <a:ext cx="3058058" cy="1143000"/>
+              <a:rPr sz="1300" b="1" i="0">
+                <a:solidFill>
+                  <a:srgbClr val="A9C8F0"/>
+                </a:solidFill>
+                <a:latin typeface="Calibri"/>
+              </a:rPr>
+              <a:t>EXAMPLE</a:t>
+            </a:r>
+          </a:p>
+        </p:txBody>
+      </p:sp>
+      <p:sp>
+        <p:nvSpPr>
+          <p:cNvPr id="10" name="TextBox 9"/>
+          <p:cNvSpPr txBox="1"/>
+          <p:nvPr/>
+        </p:nvSpPr>
+        <p:spPr>
+          <a:xfrm>
+            <a:off x="8046720" y="2971800"/>
+            <a:ext cx="3291840" cy="2971800"/>
           </a:xfrm>
           <a:prstGeom prst="rect">
             <a:avLst/>
@@ -5589,828 +9616,13 @@
           <a:p>
             <a:pPr algn="l"/>
             <a:r>
-              <a:rPr sz="2000" b="0" i="0">
-                <a:solidFill>
-                  <a:srgbClr val="202122"/>
-                </a:solidFill>
-                <a:latin typeface="Calibri"/>
-              </a:rPr>
-              <a:t>The amount of data.</a:t>
-            </a:r>
-          </a:p>
-        </p:txBody>
-      </p:sp>
-      <p:sp>
-        <p:nvSpPr>
-          <p:cNvPr id="10" name="Rounded Rectangle 9"/>
-          <p:cNvSpPr/>
-          <p:nvPr/>
-        </p:nvSpPr>
-        <p:spPr>
-          <a:xfrm>
-            <a:off x="4338218" y="1600200"/>
-            <a:ext cx="3515258" cy="2148840"/>
-          </a:xfrm>
-          <a:prstGeom prst="roundRect">
-            <a:avLst>
-              <a:gd name="adj" fmla="val 6000"/>
-            </a:avLst>
-          </a:prstGeom>
-          <a:solidFill>
-            <a:srgbClr val="EAF3FF"/>
-          </a:solidFill>
-          <a:ln>
-            <a:noFill/>
-          </a:ln>
-          <a:effectLst/>
-        </p:spPr>
-        <p:style>
-          <a:lnRef idx="1">
-            <a:schemeClr val="accent1"/>
-          </a:lnRef>
-          <a:fillRef idx="3">
-            <a:schemeClr val="accent1"/>
-          </a:fillRef>
-          <a:effectRef idx="2">
-            <a:schemeClr val="accent1"/>
-          </a:effectRef>
-          <a:fontRef idx="minor">
-            <a:schemeClr val="lt1"/>
-          </a:fontRef>
-        </p:style>
-        <p:txBody>
-          <a:bodyPr rtlCol="0" anchor="ctr"/>
-          <a:lstStyle/>
-          <a:p/>
-        </p:txBody>
-      </p:sp>
-      <p:sp>
-        <p:nvSpPr>
-          <p:cNvPr id="11" name="Oval 10"/>
-          <p:cNvSpPr/>
-          <p:nvPr/>
-        </p:nvSpPr>
-        <p:spPr>
-          <a:xfrm>
-            <a:off x="4566818" y="1828800"/>
-            <a:ext cx="457200" cy="457200"/>
-          </a:xfrm>
-          <a:prstGeom prst="ellipse">
-            <a:avLst/>
-          </a:prstGeom>
-          <a:solidFill>
-            <a:srgbClr val="F2B705"/>
-          </a:solidFill>
-          <a:ln>
-            <a:noFill/>
-          </a:ln>
-          <a:effectLst/>
-        </p:spPr>
-        <p:style>
-          <a:lnRef idx="1">
-            <a:schemeClr val="accent1"/>
-          </a:lnRef>
-          <a:fillRef idx="3">
-            <a:schemeClr val="accent1"/>
-          </a:fillRef>
-          <a:effectRef idx="2">
-            <a:schemeClr val="accent1"/>
-          </a:effectRef>
-          <a:fontRef idx="minor">
-            <a:schemeClr val="lt1"/>
-          </a:fontRef>
-        </p:style>
-        <p:txBody>
-          <a:bodyPr rtlCol="0" anchor="ctr" lIns="0" rIns="0" tIns="0" bIns="0"/>
-          <a:lstStyle/>
-          <a:p>
-            <a:pPr algn="ctr"/>
-            <a:r>
-              <a:rPr sz="1500" b="1">
-                <a:solidFill>
-                  <a:srgbClr val="202122"/>
-                </a:solidFill>
-                <a:latin typeface="Calibri"/>
-              </a:rPr>
-              <a:t>2</a:t>
-            </a:r>
-          </a:p>
-        </p:txBody>
-      </p:sp>
-      <p:sp>
-        <p:nvSpPr>
-          <p:cNvPr id="12" name="TextBox 11"/>
-          <p:cNvSpPr txBox="1"/>
-          <p:nvPr/>
-        </p:nvSpPr>
-        <p:spPr>
-          <a:xfrm>
-            <a:off x="5161178" y="1801368"/>
-            <a:ext cx="2509418" cy="512064"/>
-          </a:xfrm>
-          <a:prstGeom prst="rect">
-            <a:avLst/>
-          </a:prstGeom>
-          <a:noFill/>
-        </p:spPr>
-        <p:txBody>
-          <a:bodyPr wrap="square" anchor="ctr" lIns="0" rIns="0" tIns="0" bIns="0"/>
-          <a:lstStyle/>
-          <a:p>
-            <a:pPr algn="l"/>
-            <a:r>
-              <a:rPr sz="1900" b="1" i="0">
-                <a:solidFill>
-                  <a:srgbClr val="03306E"/>
-                </a:solidFill>
-                <a:latin typeface="Calibri"/>
-              </a:rPr>
-              <a:t>Variety</a:t>
-            </a:r>
-          </a:p>
-        </p:txBody>
-      </p:sp>
-      <p:sp>
-        <p:nvSpPr>
-          <p:cNvPr id="13" name="TextBox 12"/>
-          <p:cNvSpPr txBox="1"/>
-          <p:nvPr/>
-        </p:nvSpPr>
-        <p:spPr>
-          <a:xfrm>
-            <a:off x="4566818" y="2468880"/>
-            <a:ext cx="3058058" cy="1143000"/>
-          </a:xfrm>
-          <a:prstGeom prst="rect">
-            <a:avLst/>
-          </a:prstGeom>
-          <a:noFill/>
-        </p:spPr>
-        <p:txBody>
-          <a:bodyPr wrap="square" anchor="t" lIns="0" rIns="0" tIns="0" bIns="0"/>
-          <a:lstStyle/>
-          <a:p>
-            <a:pPr algn="l"/>
-            <a:r>
-              <a:rPr sz="2000" b="0" i="0">
-                <a:solidFill>
-                  <a:srgbClr val="202122"/>
-                </a:solidFill>
-                <a:latin typeface="Calibri"/>
-              </a:rPr>
-              <a:t>Many types of data.</a:t>
-            </a:r>
-          </a:p>
-        </p:txBody>
-      </p:sp>
-      <p:sp>
-        <p:nvSpPr>
-          <p:cNvPr id="14" name="Rounded Rectangle 13"/>
-          <p:cNvSpPr/>
-          <p:nvPr/>
-        </p:nvSpPr>
-        <p:spPr>
-          <a:xfrm>
-            <a:off x="8127796" y="1600200"/>
-            <a:ext cx="3515258" cy="2148840"/>
-          </a:xfrm>
-          <a:prstGeom prst="roundRect">
-            <a:avLst>
-              <a:gd name="adj" fmla="val 6000"/>
-            </a:avLst>
-          </a:prstGeom>
-          <a:solidFill>
-            <a:srgbClr val="EAF3FF"/>
-          </a:solidFill>
-          <a:ln>
-            <a:noFill/>
-          </a:ln>
-          <a:effectLst/>
-        </p:spPr>
-        <p:style>
-          <a:lnRef idx="1">
-            <a:schemeClr val="accent1"/>
-          </a:lnRef>
-          <a:fillRef idx="3">
-            <a:schemeClr val="accent1"/>
-          </a:fillRef>
-          <a:effectRef idx="2">
-            <a:schemeClr val="accent1"/>
-          </a:effectRef>
-          <a:fontRef idx="minor">
-            <a:schemeClr val="lt1"/>
-          </a:fontRef>
-        </p:style>
-        <p:txBody>
-          <a:bodyPr rtlCol="0" anchor="ctr"/>
-          <a:lstStyle/>
-          <a:p/>
-        </p:txBody>
-      </p:sp>
-      <p:sp>
-        <p:nvSpPr>
-          <p:cNvPr id="15" name="Oval 14"/>
-          <p:cNvSpPr/>
-          <p:nvPr/>
-        </p:nvSpPr>
-        <p:spPr>
-          <a:xfrm>
-            <a:off x="8356396" y="1828800"/>
-            <a:ext cx="457200" cy="457200"/>
-          </a:xfrm>
-          <a:prstGeom prst="ellipse">
-            <a:avLst/>
-          </a:prstGeom>
-          <a:solidFill>
-            <a:srgbClr val="F2B705"/>
-          </a:solidFill>
-          <a:ln>
-            <a:noFill/>
-          </a:ln>
-          <a:effectLst/>
-        </p:spPr>
-        <p:style>
-          <a:lnRef idx="1">
-            <a:schemeClr val="accent1"/>
-          </a:lnRef>
-          <a:fillRef idx="3">
-            <a:schemeClr val="accent1"/>
-          </a:fillRef>
-          <a:effectRef idx="2">
-            <a:schemeClr val="accent1"/>
-          </a:effectRef>
-          <a:fontRef idx="minor">
-            <a:schemeClr val="lt1"/>
-          </a:fontRef>
-        </p:style>
-        <p:txBody>
-          <a:bodyPr rtlCol="0" anchor="ctr" lIns="0" rIns="0" tIns="0" bIns="0"/>
-          <a:lstStyle/>
-          <a:p>
-            <a:pPr algn="ctr"/>
-            <a:r>
-              <a:rPr sz="1500" b="1">
-                <a:solidFill>
-                  <a:srgbClr val="202122"/>
-                </a:solidFill>
-                <a:latin typeface="Calibri"/>
-              </a:rPr>
-              <a:t>3</a:t>
-            </a:r>
-          </a:p>
-        </p:txBody>
-      </p:sp>
-      <p:sp>
-        <p:nvSpPr>
-          <p:cNvPr id="16" name="TextBox 15"/>
-          <p:cNvSpPr txBox="1"/>
-          <p:nvPr/>
-        </p:nvSpPr>
-        <p:spPr>
-          <a:xfrm>
-            <a:off x="8950756" y="1801368"/>
-            <a:ext cx="2509418" cy="512064"/>
-          </a:xfrm>
-          <a:prstGeom prst="rect">
-            <a:avLst/>
-          </a:prstGeom>
-          <a:noFill/>
-        </p:spPr>
-        <p:txBody>
-          <a:bodyPr wrap="square" anchor="ctr" lIns="0" rIns="0" tIns="0" bIns="0"/>
-          <a:lstStyle/>
-          <a:p>
-            <a:pPr algn="l"/>
-            <a:r>
-              <a:rPr sz="1900" b="1" i="0">
-                <a:solidFill>
-                  <a:srgbClr val="03306E"/>
-                </a:solidFill>
-                <a:latin typeface="Calibri"/>
-              </a:rPr>
-              <a:t>Variability</a:t>
-            </a:r>
-          </a:p>
-        </p:txBody>
-      </p:sp>
-      <p:sp>
-        <p:nvSpPr>
-          <p:cNvPr id="17" name="TextBox 16"/>
-          <p:cNvSpPr txBox="1"/>
-          <p:nvPr/>
-        </p:nvSpPr>
-        <p:spPr>
-          <a:xfrm>
-            <a:off x="8356396" y="2468880"/>
-            <a:ext cx="3058058" cy="1143000"/>
-          </a:xfrm>
-          <a:prstGeom prst="rect">
-            <a:avLst/>
-          </a:prstGeom>
-          <a:noFill/>
-        </p:spPr>
-        <p:txBody>
-          <a:bodyPr wrap="square" anchor="t" lIns="0" rIns="0" tIns="0" bIns="0"/>
-          <a:lstStyle/>
-          <a:p>
-            <a:pPr algn="l"/>
-            <a:r>
-              <a:rPr sz="2000" b="0" i="0">
-                <a:solidFill>
-                  <a:srgbClr val="202122"/>
-                </a:solidFill>
-                <a:latin typeface="Calibri"/>
-              </a:rPr>
-              <a:t>Meaning and flow change.</a:t>
-            </a:r>
-          </a:p>
-        </p:txBody>
-      </p:sp>
-      <p:sp>
-        <p:nvSpPr>
-          <p:cNvPr id="18" name="Rounded Rectangle 17"/>
-          <p:cNvSpPr/>
-          <p:nvPr/>
-        </p:nvSpPr>
-        <p:spPr>
-          <a:xfrm>
-            <a:off x="548640" y="4023360"/>
-            <a:ext cx="3515258" cy="2148840"/>
-          </a:xfrm>
-          <a:prstGeom prst="roundRect">
-            <a:avLst>
-              <a:gd name="adj" fmla="val 6000"/>
-            </a:avLst>
-          </a:prstGeom>
-          <a:solidFill>
-            <a:srgbClr val="EAF3FF"/>
-          </a:solidFill>
-          <a:ln>
-            <a:noFill/>
-          </a:ln>
-          <a:effectLst/>
-        </p:spPr>
-        <p:style>
-          <a:lnRef idx="1">
-            <a:schemeClr val="accent1"/>
-          </a:lnRef>
-          <a:fillRef idx="3">
-            <a:schemeClr val="accent1"/>
-          </a:fillRef>
-          <a:effectRef idx="2">
-            <a:schemeClr val="accent1"/>
-          </a:effectRef>
-          <a:fontRef idx="minor">
-            <a:schemeClr val="lt1"/>
-          </a:fontRef>
-        </p:style>
-        <p:txBody>
-          <a:bodyPr rtlCol="0" anchor="ctr"/>
-          <a:lstStyle/>
-          <a:p/>
-        </p:txBody>
-      </p:sp>
-      <p:sp>
-        <p:nvSpPr>
-          <p:cNvPr id="19" name="Oval 18"/>
-          <p:cNvSpPr/>
-          <p:nvPr/>
-        </p:nvSpPr>
-        <p:spPr>
-          <a:xfrm>
-            <a:off x="777240" y="4251960"/>
-            <a:ext cx="457200" cy="457200"/>
-          </a:xfrm>
-          <a:prstGeom prst="ellipse">
-            <a:avLst/>
-          </a:prstGeom>
-          <a:solidFill>
-            <a:srgbClr val="F2B705"/>
-          </a:solidFill>
-          <a:ln>
-            <a:noFill/>
-          </a:ln>
-          <a:effectLst/>
-        </p:spPr>
-        <p:style>
-          <a:lnRef idx="1">
-            <a:schemeClr val="accent1"/>
-          </a:lnRef>
-          <a:fillRef idx="3">
-            <a:schemeClr val="accent1"/>
-          </a:fillRef>
-          <a:effectRef idx="2">
-            <a:schemeClr val="accent1"/>
-          </a:effectRef>
-          <a:fontRef idx="minor">
-            <a:schemeClr val="lt1"/>
-          </a:fontRef>
-        </p:style>
-        <p:txBody>
-          <a:bodyPr rtlCol="0" anchor="ctr" lIns="0" rIns="0" tIns="0" bIns="0"/>
-          <a:lstStyle/>
-          <a:p>
-            <a:pPr algn="ctr"/>
-            <a:r>
-              <a:rPr sz="1500" b="1">
-                <a:solidFill>
-                  <a:srgbClr val="202122"/>
-                </a:solidFill>
-                <a:latin typeface="Calibri"/>
-              </a:rPr>
-              <a:t>4</a:t>
-            </a:r>
-          </a:p>
-        </p:txBody>
-      </p:sp>
-      <p:sp>
-        <p:nvSpPr>
-          <p:cNvPr id="20" name="TextBox 19"/>
-          <p:cNvSpPr txBox="1"/>
-          <p:nvPr/>
-        </p:nvSpPr>
-        <p:spPr>
-          <a:xfrm>
-            <a:off x="1371600" y="4224528"/>
-            <a:ext cx="2509418" cy="512064"/>
-          </a:xfrm>
-          <a:prstGeom prst="rect">
-            <a:avLst/>
-          </a:prstGeom>
-          <a:noFill/>
-        </p:spPr>
-        <p:txBody>
-          <a:bodyPr wrap="square" anchor="ctr" lIns="0" rIns="0" tIns="0" bIns="0"/>
-          <a:lstStyle/>
-          <a:p>
-            <a:pPr algn="l"/>
-            <a:r>
-              <a:rPr sz="1900" b="1" i="0">
-                <a:solidFill>
-                  <a:srgbClr val="03306E"/>
-                </a:solidFill>
-                <a:latin typeface="Calibri"/>
-              </a:rPr>
-              <a:t>Velocity</a:t>
-            </a:r>
-          </a:p>
-        </p:txBody>
-      </p:sp>
-      <p:sp>
-        <p:nvSpPr>
-          <p:cNvPr id="21" name="TextBox 20"/>
-          <p:cNvSpPr txBox="1"/>
-          <p:nvPr/>
-        </p:nvSpPr>
-        <p:spPr>
-          <a:xfrm>
-            <a:off x="777240" y="4892040"/>
-            <a:ext cx="3058058" cy="1143000"/>
-          </a:xfrm>
-          <a:prstGeom prst="rect">
-            <a:avLst/>
-          </a:prstGeom>
-          <a:noFill/>
-        </p:spPr>
-        <p:txBody>
-          <a:bodyPr wrap="square" anchor="t" lIns="0" rIns="0" tIns="0" bIns="0"/>
-          <a:lstStyle/>
-          <a:p>
-            <a:pPr algn="l"/>
-            <a:r>
-              <a:rPr sz="2000" b="0" i="0">
-                <a:solidFill>
-                  <a:srgbClr val="202122"/>
-                </a:solidFill>
-                <a:latin typeface="Calibri"/>
-              </a:rPr>
-              <a:t>Speed of arrival.</a:t>
-            </a:r>
-          </a:p>
-        </p:txBody>
-      </p:sp>
-      <p:sp>
-        <p:nvSpPr>
-          <p:cNvPr id="22" name="Rounded Rectangle 21"/>
-          <p:cNvSpPr/>
-          <p:nvPr/>
-        </p:nvSpPr>
-        <p:spPr>
-          <a:xfrm>
-            <a:off x="4338218" y="4023360"/>
-            <a:ext cx="3515258" cy="2148840"/>
-          </a:xfrm>
-          <a:prstGeom prst="roundRect">
-            <a:avLst>
-              <a:gd name="adj" fmla="val 6000"/>
-            </a:avLst>
-          </a:prstGeom>
-          <a:solidFill>
-            <a:srgbClr val="EAF3FF"/>
-          </a:solidFill>
-          <a:ln>
-            <a:noFill/>
-          </a:ln>
-          <a:effectLst/>
-        </p:spPr>
-        <p:style>
-          <a:lnRef idx="1">
-            <a:schemeClr val="accent1"/>
-          </a:lnRef>
-          <a:fillRef idx="3">
-            <a:schemeClr val="accent1"/>
-          </a:fillRef>
-          <a:effectRef idx="2">
-            <a:schemeClr val="accent1"/>
-          </a:effectRef>
-          <a:fontRef idx="minor">
-            <a:schemeClr val="lt1"/>
-          </a:fontRef>
-        </p:style>
-        <p:txBody>
-          <a:bodyPr rtlCol="0" anchor="ctr"/>
-          <a:lstStyle/>
-          <a:p/>
-        </p:txBody>
-      </p:sp>
-      <p:sp>
-        <p:nvSpPr>
-          <p:cNvPr id="23" name="Oval 22"/>
-          <p:cNvSpPr/>
-          <p:nvPr/>
-        </p:nvSpPr>
-        <p:spPr>
-          <a:xfrm>
-            <a:off x="4566818" y="4251960"/>
-            <a:ext cx="457200" cy="457200"/>
-          </a:xfrm>
-          <a:prstGeom prst="ellipse">
-            <a:avLst/>
-          </a:prstGeom>
-          <a:solidFill>
-            <a:srgbClr val="F2B705"/>
-          </a:solidFill>
-          <a:ln>
-            <a:noFill/>
-          </a:ln>
-          <a:effectLst/>
-        </p:spPr>
-        <p:style>
-          <a:lnRef idx="1">
-            <a:schemeClr val="accent1"/>
-          </a:lnRef>
-          <a:fillRef idx="3">
-            <a:schemeClr val="accent1"/>
-          </a:fillRef>
-          <a:effectRef idx="2">
-            <a:schemeClr val="accent1"/>
-          </a:effectRef>
-          <a:fontRef idx="minor">
-            <a:schemeClr val="lt1"/>
-          </a:fontRef>
-        </p:style>
-        <p:txBody>
-          <a:bodyPr rtlCol="0" anchor="ctr" lIns="0" rIns="0" tIns="0" bIns="0"/>
-          <a:lstStyle/>
-          <a:p>
-            <a:pPr algn="ctr"/>
-            <a:r>
-              <a:rPr sz="1500" b="1">
-                <a:solidFill>
-                  <a:srgbClr val="202122"/>
-                </a:solidFill>
-                <a:latin typeface="Calibri"/>
-              </a:rPr>
-              <a:t>5</a:t>
-            </a:r>
-          </a:p>
-        </p:txBody>
-      </p:sp>
-      <p:sp>
-        <p:nvSpPr>
-          <p:cNvPr id="24" name="TextBox 23"/>
-          <p:cNvSpPr txBox="1"/>
-          <p:nvPr/>
-        </p:nvSpPr>
-        <p:spPr>
-          <a:xfrm>
-            <a:off x="5161178" y="4224528"/>
-            <a:ext cx="2509418" cy="512064"/>
-          </a:xfrm>
-          <a:prstGeom prst="rect">
-            <a:avLst/>
-          </a:prstGeom>
-          <a:noFill/>
-        </p:spPr>
-        <p:txBody>
-          <a:bodyPr wrap="square" anchor="ctr" lIns="0" rIns="0" tIns="0" bIns="0"/>
-          <a:lstStyle/>
-          <a:p>
-            <a:pPr algn="l"/>
-            <a:r>
-              <a:rPr sz="1900" b="1" i="0">
-                <a:solidFill>
-                  <a:srgbClr val="03306E"/>
-                </a:solidFill>
-                <a:latin typeface="Calibri"/>
-              </a:rPr>
-              <a:t>Veracity</a:t>
-            </a:r>
-          </a:p>
-        </p:txBody>
-      </p:sp>
-      <p:sp>
-        <p:nvSpPr>
-          <p:cNvPr id="25" name="TextBox 24"/>
-          <p:cNvSpPr txBox="1"/>
-          <p:nvPr/>
-        </p:nvSpPr>
-        <p:spPr>
-          <a:xfrm>
-            <a:off x="4566818" y="4892040"/>
-            <a:ext cx="3058058" cy="1143000"/>
-          </a:xfrm>
-          <a:prstGeom prst="rect">
-            <a:avLst/>
-          </a:prstGeom>
-          <a:noFill/>
-        </p:spPr>
-        <p:txBody>
-          <a:bodyPr wrap="square" anchor="t" lIns="0" rIns="0" tIns="0" bIns="0"/>
-          <a:lstStyle/>
-          <a:p>
-            <a:pPr algn="l"/>
-            <a:r>
-              <a:rPr sz="2000" b="0" i="0">
-                <a:solidFill>
-                  <a:srgbClr val="202122"/>
-                </a:solidFill>
-                <a:latin typeface="Calibri"/>
-              </a:rPr>
-              <a:t>Accuracy and trust.</a:t>
-            </a:r>
-          </a:p>
-        </p:txBody>
-      </p:sp>
-      <p:sp>
-        <p:nvSpPr>
-          <p:cNvPr id="26" name="Rounded Rectangle 25"/>
-          <p:cNvSpPr/>
-          <p:nvPr/>
-        </p:nvSpPr>
-        <p:spPr>
-          <a:xfrm>
-            <a:off x="8127796" y="4023360"/>
-            <a:ext cx="3515258" cy="2148840"/>
-          </a:xfrm>
-          <a:prstGeom prst="roundRect">
-            <a:avLst>
-              <a:gd name="adj" fmla="val 6000"/>
-            </a:avLst>
-          </a:prstGeom>
-          <a:solidFill>
-            <a:srgbClr val="EAF3FF"/>
-          </a:solidFill>
-          <a:ln>
-            <a:noFill/>
-          </a:ln>
-          <a:effectLst/>
-        </p:spPr>
-        <p:style>
-          <a:lnRef idx="1">
-            <a:schemeClr val="accent1"/>
-          </a:lnRef>
-          <a:fillRef idx="3">
-            <a:schemeClr val="accent1"/>
-          </a:fillRef>
-          <a:effectRef idx="2">
-            <a:schemeClr val="accent1"/>
-          </a:effectRef>
-          <a:fontRef idx="minor">
-            <a:schemeClr val="lt1"/>
-          </a:fontRef>
-        </p:style>
-        <p:txBody>
-          <a:bodyPr rtlCol="0" anchor="ctr"/>
-          <a:lstStyle/>
-          <a:p/>
-        </p:txBody>
-      </p:sp>
-      <p:sp>
-        <p:nvSpPr>
-          <p:cNvPr id="27" name="Oval 26"/>
-          <p:cNvSpPr/>
-          <p:nvPr/>
-        </p:nvSpPr>
-        <p:spPr>
-          <a:xfrm>
-            <a:off x="8356396" y="4251960"/>
-            <a:ext cx="457200" cy="457200"/>
-          </a:xfrm>
-          <a:prstGeom prst="ellipse">
-            <a:avLst/>
-          </a:prstGeom>
-          <a:solidFill>
-            <a:srgbClr val="F2B705"/>
-          </a:solidFill>
-          <a:ln>
-            <a:noFill/>
-          </a:ln>
-          <a:effectLst/>
-        </p:spPr>
-        <p:style>
-          <a:lnRef idx="1">
-            <a:schemeClr val="accent1"/>
-          </a:lnRef>
-          <a:fillRef idx="3">
-            <a:schemeClr val="accent1"/>
-          </a:fillRef>
-          <a:effectRef idx="2">
-            <a:schemeClr val="accent1"/>
-          </a:effectRef>
-          <a:fontRef idx="minor">
-            <a:schemeClr val="lt1"/>
-          </a:fontRef>
-        </p:style>
-        <p:txBody>
-          <a:bodyPr rtlCol="0" anchor="ctr" lIns="0" rIns="0" tIns="0" bIns="0"/>
-          <a:lstStyle/>
-          <a:p>
-            <a:pPr algn="ctr"/>
-            <a:r>
-              <a:rPr sz="1500" b="1">
-                <a:solidFill>
-                  <a:srgbClr val="202122"/>
-                </a:solidFill>
-                <a:latin typeface="Calibri"/>
-              </a:rPr>
-              <a:t>6</a:t>
-            </a:r>
-          </a:p>
-        </p:txBody>
-      </p:sp>
-      <p:sp>
-        <p:nvSpPr>
-          <p:cNvPr id="28" name="TextBox 27"/>
-          <p:cNvSpPr txBox="1"/>
-          <p:nvPr/>
-        </p:nvSpPr>
-        <p:spPr>
-          <a:xfrm>
-            <a:off x="8950756" y="4224528"/>
-            <a:ext cx="2509418" cy="512064"/>
-          </a:xfrm>
-          <a:prstGeom prst="rect">
-            <a:avLst/>
-          </a:prstGeom>
-          <a:noFill/>
-        </p:spPr>
-        <p:txBody>
-          <a:bodyPr wrap="square" anchor="ctr" lIns="0" rIns="0" tIns="0" bIns="0"/>
-          <a:lstStyle/>
-          <a:p>
-            <a:pPr algn="l"/>
-            <a:r>
-              <a:rPr sz="1900" b="1" i="0">
-                <a:solidFill>
-                  <a:srgbClr val="03306E"/>
-                </a:solidFill>
-                <a:latin typeface="Calibri"/>
-              </a:rPr>
-              <a:t>Value</a:t>
-            </a:r>
-          </a:p>
-        </p:txBody>
-      </p:sp>
-      <p:sp>
-        <p:nvSpPr>
-          <p:cNvPr id="29" name="TextBox 28"/>
-          <p:cNvSpPr txBox="1"/>
-          <p:nvPr/>
-        </p:nvSpPr>
-        <p:spPr>
-          <a:xfrm>
-            <a:off x="8356396" y="4892040"/>
-            <a:ext cx="3058058" cy="1143000"/>
-          </a:xfrm>
-          <a:prstGeom prst="rect">
-            <a:avLst/>
-          </a:prstGeom>
-          <a:noFill/>
-        </p:spPr>
-        <p:txBody>
-          <a:bodyPr wrap="square" anchor="t" lIns="0" rIns="0" tIns="0" bIns="0"/>
-          <a:lstStyle/>
-          <a:p>
-            <a:pPr algn="l"/>
-            <a:r>
-              <a:rPr sz="2000" b="0" i="0">
-                <a:solidFill>
-                  <a:srgbClr val="202122"/>
-                </a:solidFill>
-                <a:latin typeface="Calibri"/>
-              </a:rPr>
-              <a:t>Useful insight.</a:t>
+              <a:rPr sz="1900" b="0" i="0">
+                <a:solidFill>
+                  <a:srgbClr val="FFFFFF"/>
+                </a:solidFill>
+                <a:latin typeface="Cambria"/>
+              </a:rPr>
+              <a:t>A social media platform handles billions of posts a day (volume, velocity) in text, images and video (variety), some from bots (veracity).</a:t>
             </a:r>
           </a:p>
         </p:txBody>
@@ -6502,7 +9714,7 @@
                 </a:solidFill>
                 <a:latin typeface="Cambria"/>
               </a:rPr>
-              <a:t>Data wrangling</a:t>
+              <a:t>The six Vs of Big Data</a:t>
             </a:r>
           </a:p>
         </p:txBody>
@@ -6575,20 +9787,22 @@
       </p:sp>
       <p:sp>
         <p:nvSpPr>
-          <p:cNvPr id="6" name="Rectangle 5"/>
+          <p:cNvPr id="6" name="Rounded Rectangle 5"/>
           <p:cNvSpPr/>
           <p:nvPr/>
         </p:nvSpPr>
         <p:spPr>
           <a:xfrm>
-            <a:off x="1603217" y="2519172"/>
-            <a:ext cx="8985260" cy="36576"/>
-          </a:xfrm>
-          <a:prstGeom prst="rect">
-            <a:avLst/>
+            <a:off x="548640" y="1600200"/>
+            <a:ext cx="3515258" cy="2148840"/>
+          </a:xfrm>
+          <a:prstGeom prst="roundRect">
+            <a:avLst>
+              <a:gd name="adj" fmla="val 6000"/>
+            </a:avLst>
           </a:prstGeom>
           <a:solidFill>
-            <a:srgbClr val="A9C8F0"/>
+            <a:srgbClr val="EAF3FF"/>
           </a:solidFill>
           <a:ln>
             <a:noFill/>
@@ -6623,8 +9837,8 @@
         </p:nvSpPr>
         <p:spPr>
           <a:xfrm>
-            <a:off x="1283177" y="2217420"/>
-            <a:ext cx="640080" cy="640080"/>
+            <a:off x="777240" y="1828800"/>
+            <a:ext cx="457200" cy="457200"/>
           </a:xfrm>
           <a:prstGeom prst="ellipse">
             <a:avLst/>
@@ -6657,7 +9871,7 @@
           <a:p>
             <a:pPr algn="ctr"/>
             <a:r>
-              <a:rPr sz="2000" b="1">
+              <a:rPr sz="1500" b="1">
                 <a:solidFill>
                   <a:srgbClr val="202122"/>
                 </a:solidFill>
@@ -6676,8 +9890,41 @@
         </p:nvSpPr>
         <p:spPr>
           <a:xfrm>
-            <a:off x="548640" y="2994660"/>
-            <a:ext cx="2109155" cy="731520"/>
+            <a:off x="1371600" y="1801368"/>
+            <a:ext cx="2509418" cy="512064"/>
+          </a:xfrm>
+          <a:prstGeom prst="rect">
+            <a:avLst/>
+          </a:prstGeom>
+          <a:noFill/>
+        </p:spPr>
+        <p:txBody>
+          <a:bodyPr wrap="square" anchor="ctr" lIns="0" rIns="0" tIns="0" bIns="0"/>
+          <a:lstStyle/>
+          <a:p>
+            <a:pPr algn="l"/>
+            <a:r>
+              <a:rPr sz="1900" b="1" i="0">
+                <a:solidFill>
+                  <a:srgbClr val="03306E"/>
+                </a:solidFill>
+                <a:latin typeface="Calibri"/>
+              </a:rPr>
+              <a:t>Volume</a:t>
+            </a:r>
+          </a:p>
+        </p:txBody>
+      </p:sp>
+      <p:sp>
+        <p:nvSpPr>
+          <p:cNvPr id="9" name="TextBox 8"/>
+          <p:cNvSpPr txBox="1"/>
+          <p:nvPr/>
+        </p:nvSpPr>
+        <p:spPr>
+          <a:xfrm>
+            <a:off x="777240" y="2468880"/>
+            <a:ext cx="3058058" cy="1143000"/>
           </a:xfrm>
           <a:prstGeom prst="rect">
             <a:avLst/>
@@ -6688,29 +9935,29 @@
           <a:bodyPr wrap="square" anchor="t" lIns="0" rIns="0" tIns="0" bIns="0"/>
           <a:lstStyle/>
           <a:p>
-            <a:pPr algn="ctr"/>
-            <a:r>
-              <a:rPr sz="1700" b="1" i="0">
-                <a:solidFill>
-                  <a:srgbClr val="03306E"/>
-                </a:solidFill>
-                <a:latin typeface="Calibri"/>
-              </a:rPr>
-              <a:t>Structure</a:t>
-            </a:r>
-          </a:p>
-        </p:txBody>
-      </p:sp>
-      <p:sp>
-        <p:nvSpPr>
-          <p:cNvPr id="9" name="Rounded Rectangle 8"/>
+            <a:pPr algn="l"/>
+            <a:r>
+              <a:rPr sz="2000" b="0" i="0">
+                <a:solidFill>
+                  <a:srgbClr val="202122"/>
+                </a:solidFill>
+                <a:latin typeface="Calibri"/>
+              </a:rPr>
+              <a:t>The amount of data.</a:t>
+            </a:r>
+          </a:p>
+        </p:txBody>
+      </p:sp>
+      <p:sp>
+        <p:nvSpPr>
+          <p:cNvPr id="10" name="Rounded Rectangle 9"/>
           <p:cNvSpPr/>
           <p:nvPr/>
         </p:nvSpPr>
         <p:spPr>
           <a:xfrm>
-            <a:off x="548640" y="3771900"/>
-            <a:ext cx="2109155" cy="960120"/>
+            <a:off x="4338218" y="1600200"/>
+            <a:ext cx="3515258" cy="2148840"/>
           </a:xfrm>
           <a:prstGeom prst="roundRect">
             <a:avLst>
@@ -6747,47 +9994,14 @@
       </p:sp>
       <p:sp>
         <p:nvSpPr>
-          <p:cNvPr id="10" name="TextBox 9"/>
-          <p:cNvSpPr txBox="1"/>
-          <p:nvPr/>
-        </p:nvSpPr>
-        <p:spPr>
-          <a:xfrm>
-            <a:off x="685800" y="3909060"/>
-            <a:ext cx="1834835" cy="685800"/>
-          </a:xfrm>
-          <a:prstGeom prst="rect">
-            <a:avLst/>
-          </a:prstGeom>
-          <a:noFill/>
-        </p:spPr>
-        <p:txBody>
-          <a:bodyPr wrap="square" anchor="t" lIns="0" rIns="0" tIns="0" bIns="0"/>
-          <a:lstStyle/>
-          <a:p>
-            <a:pPr algn="l"/>
-            <a:r>
-              <a:rPr sz="1800" b="0" i="0">
-                <a:solidFill>
-                  <a:srgbClr val="202122"/>
-                </a:solidFill>
-                <a:latin typeface="Calibri"/>
-              </a:rPr>
-              <a:t>Shape raw data.</a:t>
-            </a:r>
-          </a:p>
-        </p:txBody>
-      </p:sp>
-      <p:sp>
-        <p:nvSpPr>
           <p:cNvPr id="11" name="Oval 10"/>
           <p:cNvSpPr/>
           <p:nvPr/>
         </p:nvSpPr>
         <p:spPr>
           <a:xfrm>
-            <a:off x="3529492" y="2217420"/>
-            <a:ext cx="640080" cy="640080"/>
+            <a:off x="4566818" y="1828800"/>
+            <a:ext cx="457200" cy="457200"/>
           </a:xfrm>
           <a:prstGeom prst="ellipse">
             <a:avLst/>
@@ -6820,7 +10034,7 @@
           <a:p>
             <a:pPr algn="ctr"/>
             <a:r>
-              <a:rPr sz="2000" b="1">
+              <a:rPr sz="1500" b="1">
                 <a:solidFill>
                   <a:srgbClr val="202122"/>
                 </a:solidFill>
@@ -6839,8 +10053,41 @@
         </p:nvSpPr>
         <p:spPr>
           <a:xfrm>
-            <a:off x="2794955" y="2994660"/>
-            <a:ext cx="2109155" cy="731520"/>
+            <a:off x="5161178" y="1801368"/>
+            <a:ext cx="2509418" cy="512064"/>
+          </a:xfrm>
+          <a:prstGeom prst="rect">
+            <a:avLst/>
+          </a:prstGeom>
+          <a:noFill/>
+        </p:spPr>
+        <p:txBody>
+          <a:bodyPr wrap="square" anchor="ctr" lIns="0" rIns="0" tIns="0" bIns="0"/>
+          <a:lstStyle/>
+          <a:p>
+            <a:pPr algn="l"/>
+            <a:r>
+              <a:rPr sz="1900" b="1" i="0">
+                <a:solidFill>
+                  <a:srgbClr val="03306E"/>
+                </a:solidFill>
+                <a:latin typeface="Calibri"/>
+              </a:rPr>
+              <a:t>Variety</a:t>
+            </a:r>
+          </a:p>
+        </p:txBody>
+      </p:sp>
+      <p:sp>
+        <p:nvSpPr>
+          <p:cNvPr id="13" name="TextBox 12"/>
+          <p:cNvSpPr txBox="1"/>
+          <p:nvPr/>
+        </p:nvSpPr>
+        <p:spPr>
+          <a:xfrm>
+            <a:off x="4566818" y="2468880"/>
+            <a:ext cx="3058058" cy="1143000"/>
           </a:xfrm>
           <a:prstGeom prst="rect">
             <a:avLst/>
@@ -6851,29 +10098,29 @@
           <a:bodyPr wrap="square" anchor="t" lIns="0" rIns="0" tIns="0" bIns="0"/>
           <a:lstStyle/>
           <a:p>
-            <a:pPr algn="ctr"/>
-            <a:r>
-              <a:rPr sz="1700" b="1" i="0">
-                <a:solidFill>
-                  <a:srgbClr val="03306E"/>
-                </a:solidFill>
-                <a:latin typeface="Calibri"/>
-              </a:rPr>
-              <a:t>Clean</a:t>
-            </a:r>
-          </a:p>
-        </p:txBody>
-      </p:sp>
-      <p:sp>
-        <p:nvSpPr>
-          <p:cNvPr id="13" name="Rounded Rectangle 12"/>
+            <a:pPr algn="l"/>
+            <a:r>
+              <a:rPr sz="2000" b="0" i="0">
+                <a:solidFill>
+                  <a:srgbClr val="202122"/>
+                </a:solidFill>
+                <a:latin typeface="Calibri"/>
+              </a:rPr>
+              <a:t>Many types of data.</a:t>
+            </a:r>
+          </a:p>
+        </p:txBody>
+      </p:sp>
+      <p:sp>
+        <p:nvSpPr>
+          <p:cNvPr id="14" name="Rounded Rectangle 13"/>
           <p:cNvSpPr/>
           <p:nvPr/>
         </p:nvSpPr>
         <p:spPr>
           <a:xfrm>
-            <a:off x="2794955" y="3771900"/>
-            <a:ext cx="2109155" cy="960120"/>
+            <a:off x="8127796" y="1600200"/>
+            <a:ext cx="3515258" cy="2148840"/>
           </a:xfrm>
           <a:prstGeom prst="roundRect">
             <a:avLst>
@@ -6910,47 +10157,14 @@
       </p:sp>
       <p:sp>
         <p:nvSpPr>
-          <p:cNvPr id="14" name="TextBox 13"/>
-          <p:cNvSpPr txBox="1"/>
-          <p:nvPr/>
-        </p:nvSpPr>
-        <p:spPr>
-          <a:xfrm>
-            <a:off x="2932115" y="3909060"/>
-            <a:ext cx="1834835" cy="685800"/>
-          </a:xfrm>
-          <a:prstGeom prst="rect">
-            <a:avLst/>
-          </a:prstGeom>
-          <a:noFill/>
-        </p:spPr>
-        <p:txBody>
-          <a:bodyPr wrap="square" anchor="t" lIns="0" rIns="0" tIns="0" bIns="0"/>
-          <a:lstStyle/>
-          <a:p>
-            <a:pPr algn="l"/>
-            <a:r>
-              <a:rPr sz="1800" b="0" i="0">
-                <a:solidFill>
-                  <a:srgbClr val="202122"/>
-                </a:solidFill>
-                <a:latin typeface="Calibri"/>
-              </a:rPr>
-              <a:t>Remove errors and duplicates.</a:t>
-            </a:r>
-          </a:p>
-        </p:txBody>
-      </p:sp>
-      <p:sp>
-        <p:nvSpPr>
           <p:cNvPr id="15" name="Oval 14"/>
           <p:cNvSpPr/>
           <p:nvPr/>
         </p:nvSpPr>
         <p:spPr>
           <a:xfrm>
-            <a:off x="5775807" y="2217420"/>
-            <a:ext cx="640080" cy="640080"/>
+            <a:off x="8356396" y="1828800"/>
+            <a:ext cx="457200" cy="457200"/>
           </a:xfrm>
           <a:prstGeom prst="ellipse">
             <a:avLst/>
@@ -6983,7 +10197,7 @@
           <a:p>
             <a:pPr algn="ctr"/>
             <a:r>
-              <a:rPr sz="2000" b="1">
+              <a:rPr sz="1500" b="1">
                 <a:solidFill>
                   <a:srgbClr val="202122"/>
                 </a:solidFill>
@@ -7002,8 +10216,41 @@
         </p:nvSpPr>
         <p:spPr>
           <a:xfrm>
-            <a:off x="5041270" y="2994660"/>
-            <a:ext cx="2109155" cy="731520"/>
+            <a:off x="8950756" y="1801368"/>
+            <a:ext cx="2509418" cy="512064"/>
+          </a:xfrm>
+          <a:prstGeom prst="rect">
+            <a:avLst/>
+          </a:prstGeom>
+          <a:noFill/>
+        </p:spPr>
+        <p:txBody>
+          <a:bodyPr wrap="square" anchor="ctr" lIns="0" rIns="0" tIns="0" bIns="0"/>
+          <a:lstStyle/>
+          <a:p>
+            <a:pPr algn="l"/>
+            <a:r>
+              <a:rPr sz="1900" b="1" i="0">
+                <a:solidFill>
+                  <a:srgbClr val="03306E"/>
+                </a:solidFill>
+                <a:latin typeface="Calibri"/>
+              </a:rPr>
+              <a:t>Variability</a:t>
+            </a:r>
+          </a:p>
+        </p:txBody>
+      </p:sp>
+      <p:sp>
+        <p:nvSpPr>
+          <p:cNvPr id="17" name="TextBox 16"/>
+          <p:cNvSpPr txBox="1"/>
+          <p:nvPr/>
+        </p:nvSpPr>
+        <p:spPr>
+          <a:xfrm>
+            <a:off x="8356396" y="2468880"/>
+            <a:ext cx="3058058" cy="1143000"/>
           </a:xfrm>
           <a:prstGeom prst="rect">
             <a:avLst/>
@@ -7014,29 +10261,29 @@
           <a:bodyPr wrap="square" anchor="t" lIns="0" rIns="0" tIns="0" bIns="0"/>
           <a:lstStyle/>
           <a:p>
-            <a:pPr algn="ctr"/>
-            <a:r>
-              <a:rPr sz="1700" b="1" i="0">
-                <a:solidFill>
-                  <a:srgbClr val="03306E"/>
-                </a:solidFill>
-                <a:latin typeface="Calibri"/>
-              </a:rPr>
-              <a:t>Validate</a:t>
-            </a:r>
-          </a:p>
-        </p:txBody>
-      </p:sp>
-      <p:sp>
-        <p:nvSpPr>
-          <p:cNvPr id="17" name="Rounded Rectangle 16"/>
+            <a:pPr algn="l"/>
+            <a:r>
+              <a:rPr sz="2000" b="0" i="0">
+                <a:solidFill>
+                  <a:srgbClr val="202122"/>
+                </a:solidFill>
+                <a:latin typeface="Calibri"/>
+              </a:rPr>
+              <a:t>Meaning and flow change.</a:t>
+            </a:r>
+          </a:p>
+        </p:txBody>
+      </p:sp>
+      <p:sp>
+        <p:nvSpPr>
+          <p:cNvPr id="18" name="Rounded Rectangle 17"/>
           <p:cNvSpPr/>
           <p:nvPr/>
         </p:nvSpPr>
         <p:spPr>
           <a:xfrm>
-            <a:off x="5041270" y="3771900"/>
-            <a:ext cx="2109155" cy="960120"/>
+            <a:off x="548640" y="4023360"/>
+            <a:ext cx="3515258" cy="2148840"/>
           </a:xfrm>
           <a:prstGeom prst="roundRect">
             <a:avLst>
@@ -7073,47 +10320,14 @@
       </p:sp>
       <p:sp>
         <p:nvSpPr>
-          <p:cNvPr id="18" name="TextBox 17"/>
-          <p:cNvSpPr txBox="1"/>
-          <p:nvPr/>
-        </p:nvSpPr>
-        <p:spPr>
-          <a:xfrm>
-            <a:off x="5178430" y="3909060"/>
-            <a:ext cx="1834835" cy="685800"/>
-          </a:xfrm>
-          <a:prstGeom prst="rect">
-            <a:avLst/>
-          </a:prstGeom>
-          <a:noFill/>
-        </p:spPr>
-        <p:txBody>
-          <a:bodyPr wrap="square" anchor="t" lIns="0" rIns="0" tIns="0" bIns="0"/>
-          <a:lstStyle/>
-          <a:p>
-            <a:pPr algn="l"/>
-            <a:r>
-              <a:rPr sz="1800" b="0" i="0">
-                <a:solidFill>
-                  <a:srgbClr val="202122"/>
-                </a:solidFill>
-                <a:latin typeface="Calibri"/>
-              </a:rPr>
-              <a:t>Check it meets rules.</a:t>
-            </a:r>
-          </a:p>
-        </p:txBody>
-      </p:sp>
-      <p:sp>
-        <p:nvSpPr>
           <p:cNvPr id="19" name="Oval 18"/>
           <p:cNvSpPr/>
           <p:nvPr/>
         </p:nvSpPr>
         <p:spPr>
           <a:xfrm>
-            <a:off x="8022122" y="2217420"/>
-            <a:ext cx="640080" cy="640080"/>
+            <a:off x="777240" y="4251960"/>
+            <a:ext cx="457200" cy="457200"/>
           </a:xfrm>
           <a:prstGeom prst="ellipse">
             <a:avLst/>
@@ -7146,7 +10360,7 @@
           <a:p>
             <a:pPr algn="ctr"/>
             <a:r>
-              <a:rPr sz="2000" b="1">
+              <a:rPr sz="1500" b="1">
                 <a:solidFill>
                   <a:srgbClr val="202122"/>
                 </a:solidFill>
@@ -7165,8 +10379,41 @@
         </p:nvSpPr>
         <p:spPr>
           <a:xfrm>
-            <a:off x="7287585" y="2994660"/>
-            <a:ext cx="2109155" cy="731520"/>
+            <a:off x="1371600" y="4224528"/>
+            <a:ext cx="2509418" cy="512064"/>
+          </a:xfrm>
+          <a:prstGeom prst="rect">
+            <a:avLst/>
+          </a:prstGeom>
+          <a:noFill/>
+        </p:spPr>
+        <p:txBody>
+          <a:bodyPr wrap="square" anchor="ctr" lIns="0" rIns="0" tIns="0" bIns="0"/>
+          <a:lstStyle/>
+          <a:p>
+            <a:pPr algn="l"/>
+            <a:r>
+              <a:rPr sz="1900" b="1" i="0">
+                <a:solidFill>
+                  <a:srgbClr val="03306E"/>
+                </a:solidFill>
+                <a:latin typeface="Calibri"/>
+              </a:rPr>
+              <a:t>Velocity</a:t>
+            </a:r>
+          </a:p>
+        </p:txBody>
+      </p:sp>
+      <p:sp>
+        <p:nvSpPr>
+          <p:cNvPr id="21" name="TextBox 20"/>
+          <p:cNvSpPr txBox="1"/>
+          <p:nvPr/>
+        </p:nvSpPr>
+        <p:spPr>
+          <a:xfrm>
+            <a:off x="777240" y="4892040"/>
+            <a:ext cx="3058058" cy="1143000"/>
           </a:xfrm>
           <a:prstGeom prst="rect">
             <a:avLst/>
@@ -7177,29 +10424,29 @@
           <a:bodyPr wrap="square" anchor="t" lIns="0" rIns="0" tIns="0" bIns="0"/>
           <a:lstStyle/>
           <a:p>
-            <a:pPr algn="ctr"/>
-            <a:r>
-              <a:rPr sz="1700" b="1" i="0">
-                <a:solidFill>
-                  <a:srgbClr val="03306E"/>
-                </a:solidFill>
-                <a:latin typeface="Calibri"/>
-              </a:rPr>
-              <a:t>Enrich</a:t>
-            </a:r>
-          </a:p>
-        </p:txBody>
-      </p:sp>
-      <p:sp>
-        <p:nvSpPr>
-          <p:cNvPr id="21" name="Rounded Rectangle 20"/>
+            <a:pPr algn="l"/>
+            <a:r>
+              <a:rPr sz="2000" b="0" i="0">
+                <a:solidFill>
+                  <a:srgbClr val="202122"/>
+                </a:solidFill>
+                <a:latin typeface="Calibri"/>
+              </a:rPr>
+              <a:t>Speed of arrival.</a:t>
+            </a:r>
+          </a:p>
+        </p:txBody>
+      </p:sp>
+      <p:sp>
+        <p:nvSpPr>
+          <p:cNvPr id="22" name="Rounded Rectangle 21"/>
           <p:cNvSpPr/>
           <p:nvPr/>
         </p:nvSpPr>
         <p:spPr>
           <a:xfrm>
-            <a:off x="7287585" y="3771900"/>
-            <a:ext cx="2109155" cy="960120"/>
+            <a:off x="4338218" y="4023360"/>
+            <a:ext cx="3515258" cy="2148840"/>
           </a:xfrm>
           <a:prstGeom prst="roundRect">
             <a:avLst>
@@ -7236,47 +10483,14 @@
       </p:sp>
       <p:sp>
         <p:nvSpPr>
-          <p:cNvPr id="22" name="TextBox 21"/>
-          <p:cNvSpPr txBox="1"/>
-          <p:nvPr/>
-        </p:nvSpPr>
-        <p:spPr>
-          <a:xfrm>
-            <a:off x="7424745" y="3909060"/>
-            <a:ext cx="1834835" cy="685800"/>
-          </a:xfrm>
-          <a:prstGeom prst="rect">
-            <a:avLst/>
-          </a:prstGeom>
-          <a:noFill/>
-        </p:spPr>
-        <p:txBody>
-          <a:bodyPr wrap="square" anchor="t" lIns="0" rIns="0" tIns="0" bIns="0"/>
-          <a:lstStyle/>
-          <a:p>
-            <a:pPr algn="l"/>
-            <a:r>
-              <a:rPr sz="1800" b="0" i="0">
-                <a:solidFill>
-                  <a:srgbClr val="202122"/>
-                </a:solidFill>
-                <a:latin typeface="Calibri"/>
-              </a:rPr>
-              <a:t>Add useful data.</a:t>
-            </a:r>
-          </a:p>
-        </p:txBody>
-      </p:sp>
-      <p:sp>
-        <p:nvSpPr>
           <p:cNvPr id="23" name="Oval 22"/>
           <p:cNvSpPr/>
           <p:nvPr/>
         </p:nvSpPr>
         <p:spPr>
           <a:xfrm>
-            <a:off x="10268437" y="2217420"/>
-            <a:ext cx="640080" cy="640080"/>
+            <a:off x="4566818" y="4251960"/>
+            <a:ext cx="457200" cy="457200"/>
           </a:xfrm>
           <a:prstGeom prst="ellipse">
             <a:avLst/>
@@ -7309,7 +10523,7 @@
           <a:p>
             <a:pPr algn="ctr"/>
             <a:r>
-              <a:rPr sz="2000" b="1">
+              <a:rPr sz="1500" b="1">
                 <a:solidFill>
                   <a:srgbClr val="202122"/>
                 </a:solidFill>
@@ -7328,8 +10542,41 @@
         </p:nvSpPr>
         <p:spPr>
           <a:xfrm>
-            <a:off x="9533900" y="2994660"/>
-            <a:ext cx="2109155" cy="731520"/>
+            <a:off x="5161178" y="4224528"/>
+            <a:ext cx="2509418" cy="512064"/>
+          </a:xfrm>
+          <a:prstGeom prst="rect">
+            <a:avLst/>
+          </a:prstGeom>
+          <a:noFill/>
+        </p:spPr>
+        <p:txBody>
+          <a:bodyPr wrap="square" anchor="ctr" lIns="0" rIns="0" tIns="0" bIns="0"/>
+          <a:lstStyle/>
+          <a:p>
+            <a:pPr algn="l"/>
+            <a:r>
+              <a:rPr sz="1900" b="1" i="0">
+                <a:solidFill>
+                  <a:srgbClr val="03306E"/>
+                </a:solidFill>
+                <a:latin typeface="Calibri"/>
+              </a:rPr>
+              <a:t>Veracity</a:t>
+            </a:r>
+          </a:p>
+        </p:txBody>
+      </p:sp>
+      <p:sp>
+        <p:nvSpPr>
+          <p:cNvPr id="25" name="TextBox 24"/>
+          <p:cNvSpPr txBox="1"/>
+          <p:nvPr/>
+        </p:nvSpPr>
+        <p:spPr>
+          <a:xfrm>
+            <a:off x="4566818" y="4892040"/>
+            <a:ext cx="3058058" cy="1143000"/>
           </a:xfrm>
           <a:prstGeom prst="rect">
             <a:avLst/>
@@ -7340,29 +10587,29 @@
           <a:bodyPr wrap="square" anchor="t" lIns="0" rIns="0" tIns="0" bIns="0"/>
           <a:lstStyle/>
           <a:p>
-            <a:pPr algn="ctr"/>
-            <a:r>
-              <a:rPr sz="1700" b="1" i="0">
-                <a:solidFill>
-                  <a:srgbClr val="03306E"/>
-                </a:solidFill>
-                <a:latin typeface="Calibri"/>
-              </a:rPr>
-              <a:t>Output</a:t>
-            </a:r>
-          </a:p>
-        </p:txBody>
-      </p:sp>
-      <p:sp>
-        <p:nvSpPr>
-          <p:cNvPr id="25" name="Rounded Rectangle 24"/>
+            <a:pPr algn="l"/>
+            <a:r>
+              <a:rPr sz="2000" b="0" i="0">
+                <a:solidFill>
+                  <a:srgbClr val="202122"/>
+                </a:solidFill>
+                <a:latin typeface="Calibri"/>
+              </a:rPr>
+              <a:t>Accuracy and trust.</a:t>
+            </a:r>
+          </a:p>
+        </p:txBody>
+      </p:sp>
+      <p:sp>
+        <p:nvSpPr>
+          <p:cNvPr id="26" name="Rounded Rectangle 25"/>
           <p:cNvSpPr/>
           <p:nvPr/>
         </p:nvSpPr>
         <p:spPr>
           <a:xfrm>
-            <a:off x="9533900" y="3771900"/>
-            <a:ext cx="2109155" cy="960120"/>
+            <a:off x="8127796" y="4023360"/>
+            <a:ext cx="3515258" cy="2148840"/>
           </a:xfrm>
           <a:prstGeom prst="roundRect">
             <a:avLst>
@@ -7399,14 +10646,100 @@
       </p:sp>
       <p:sp>
         <p:nvSpPr>
-          <p:cNvPr id="26" name="TextBox 25"/>
-          <p:cNvSpPr txBox="1"/>
-          <p:nvPr/>
-        </p:nvSpPr>
-        <p:spPr>
-          <a:xfrm>
-            <a:off x="9671060" y="3909060"/>
-            <a:ext cx="1834835" cy="685800"/>
+          <p:cNvPr id="27" name="Oval 26"/>
+          <p:cNvSpPr/>
+          <p:nvPr/>
+        </p:nvSpPr>
+        <p:spPr>
+          <a:xfrm>
+            <a:off x="8356396" y="4251960"/>
+            <a:ext cx="457200" cy="457200"/>
+          </a:xfrm>
+          <a:prstGeom prst="ellipse">
+            <a:avLst/>
+          </a:prstGeom>
+          <a:solidFill>
+            <a:srgbClr val="F2B705"/>
+          </a:solidFill>
+          <a:ln>
+            <a:noFill/>
+          </a:ln>
+          <a:effectLst/>
+        </p:spPr>
+        <p:style>
+          <a:lnRef idx="1">
+            <a:schemeClr val="accent1"/>
+          </a:lnRef>
+          <a:fillRef idx="3">
+            <a:schemeClr val="accent1"/>
+          </a:fillRef>
+          <a:effectRef idx="2">
+            <a:schemeClr val="accent1"/>
+          </a:effectRef>
+          <a:fontRef idx="minor">
+            <a:schemeClr val="lt1"/>
+          </a:fontRef>
+        </p:style>
+        <p:txBody>
+          <a:bodyPr rtlCol="0" anchor="ctr" lIns="0" rIns="0" tIns="0" bIns="0"/>
+          <a:lstStyle/>
+          <a:p>
+            <a:pPr algn="ctr"/>
+            <a:r>
+              <a:rPr sz="1500" b="1">
+                <a:solidFill>
+                  <a:srgbClr val="202122"/>
+                </a:solidFill>
+                <a:latin typeface="Calibri"/>
+              </a:rPr>
+              <a:t>6</a:t>
+            </a:r>
+          </a:p>
+        </p:txBody>
+      </p:sp>
+      <p:sp>
+        <p:nvSpPr>
+          <p:cNvPr id="28" name="TextBox 27"/>
+          <p:cNvSpPr txBox="1"/>
+          <p:nvPr/>
+        </p:nvSpPr>
+        <p:spPr>
+          <a:xfrm>
+            <a:off x="8950756" y="4224528"/>
+            <a:ext cx="2509418" cy="512064"/>
+          </a:xfrm>
+          <a:prstGeom prst="rect">
+            <a:avLst/>
+          </a:prstGeom>
+          <a:noFill/>
+        </p:spPr>
+        <p:txBody>
+          <a:bodyPr wrap="square" anchor="ctr" lIns="0" rIns="0" tIns="0" bIns="0"/>
+          <a:lstStyle/>
+          <a:p>
+            <a:pPr algn="l"/>
+            <a:r>
+              <a:rPr sz="1900" b="1" i="0">
+                <a:solidFill>
+                  <a:srgbClr val="03306E"/>
+                </a:solidFill>
+                <a:latin typeface="Calibri"/>
+              </a:rPr>
+              <a:t>Value</a:t>
+            </a:r>
+          </a:p>
+        </p:txBody>
+      </p:sp>
+      <p:sp>
+        <p:nvSpPr>
+          <p:cNvPr id="29" name="TextBox 28"/>
+          <p:cNvSpPr txBox="1"/>
+          <p:nvPr/>
+        </p:nvSpPr>
+        <p:spPr>
+          <a:xfrm>
+            <a:off x="8356396" y="4892040"/>
+            <a:ext cx="3058058" cy="1143000"/>
           </a:xfrm>
           <a:prstGeom prst="rect">
             <a:avLst/>
@@ -7419,46 +10752,13 @@
           <a:p>
             <a:pPr algn="l"/>
             <a:r>
-              <a:rPr sz="1800" b="0" i="0">
+              <a:rPr sz="2000" b="0" i="0">
                 <a:solidFill>
                   <a:srgbClr val="202122"/>
                 </a:solidFill>
                 <a:latin typeface="Calibri"/>
               </a:rPr>
-              <a:t>Deliver it for use.</a:t>
-            </a:r>
-          </a:p>
-        </p:txBody>
-      </p:sp>
-      <p:sp>
-        <p:nvSpPr>
-          <p:cNvPr id="27" name="TextBox 26"/>
-          <p:cNvSpPr txBox="1"/>
-          <p:nvPr/>
-        </p:nvSpPr>
-        <p:spPr>
-          <a:xfrm>
-            <a:off x="548640" y="5006340"/>
-            <a:ext cx="11094415" cy="548640"/>
-          </a:xfrm>
-          <a:prstGeom prst="rect">
-            <a:avLst/>
-          </a:prstGeom>
-          <a:noFill/>
-        </p:spPr>
-        <p:txBody>
-          <a:bodyPr wrap="square" anchor="t" lIns="0" rIns="0" tIns="0" bIns="0"/>
-          <a:lstStyle/>
-          <a:p>
-            <a:pPr algn="l"/>
-            <a:r>
-              <a:rPr sz="1600" b="0" i="1">
-                <a:solidFill>
-                  <a:srgbClr val="54595D"/>
-                </a:solidFill>
-                <a:latin typeface="Calibri"/>
-              </a:rPr>
-              <a:t>Reduce transcription and transposition errors with validation, double entry, drop-downs and pre-filled boxes.</a:t>
+              <a:t>Useful insight.</a:t>
             </a:r>
           </a:p>
         </p:txBody>
@@ -7550,7 +10850,7 @@
                 </a:solidFill>
                 <a:latin typeface="Cambria"/>
               </a:rPr>
-              <a:t>Visualisation and data models</a:t>
+              <a:t>Quick check: The six Vs of Big Data</a:t>
             </a:r>
           </a:p>
         </p:txBody>
@@ -7623,58 +10923,14 @@
       </p:sp>
       <p:sp>
         <p:nvSpPr>
-          <p:cNvPr id="6" name="Rounded Rectangle 5"/>
+          <p:cNvPr id="6" name="Oval 5"/>
           <p:cNvSpPr/>
           <p:nvPr/>
         </p:nvSpPr>
         <p:spPr>
           <a:xfrm>
-            <a:off x="548640" y="1600200"/>
-            <a:ext cx="5410047" cy="2148840"/>
-          </a:xfrm>
-          <a:prstGeom prst="roundRect">
-            <a:avLst>
-              <a:gd name="adj" fmla="val 6000"/>
-            </a:avLst>
-          </a:prstGeom>
-          <a:solidFill>
-            <a:srgbClr val="EAF3FF"/>
-          </a:solidFill>
-          <a:ln>
-            <a:noFill/>
-          </a:ln>
-          <a:effectLst/>
-        </p:spPr>
-        <p:style>
-          <a:lnRef idx="1">
-            <a:schemeClr val="accent1"/>
-          </a:lnRef>
-          <a:fillRef idx="3">
-            <a:schemeClr val="accent1"/>
-          </a:fillRef>
-          <a:effectRef idx="2">
-            <a:schemeClr val="accent1"/>
-          </a:effectRef>
-          <a:fontRef idx="minor">
-            <a:schemeClr val="lt1"/>
-          </a:fontRef>
-        </p:style>
-        <p:txBody>
-          <a:bodyPr rtlCol="0" anchor="ctr"/>
-          <a:lstStyle/>
-          <a:p/>
-        </p:txBody>
-      </p:sp>
-      <p:sp>
-        <p:nvSpPr>
-          <p:cNvPr id="7" name="Oval 6"/>
-          <p:cNvSpPr/>
-          <p:nvPr/>
-        </p:nvSpPr>
-        <p:spPr>
-          <a:xfrm>
-            <a:off x="777240" y="1828800"/>
-            <a:ext cx="457200" cy="457200"/>
+            <a:off x="548640" y="1691640"/>
+            <a:ext cx="502920" cy="502920"/>
           </a:xfrm>
           <a:prstGeom prst="ellipse">
             <a:avLst/>
@@ -7707,7 +10963,7 @@
           <a:p>
             <a:pPr algn="ctr"/>
             <a:r>
-              <a:rPr sz="1500" b="1">
+              <a:rPr sz="1600" b="1">
                 <a:solidFill>
                   <a:srgbClr val="202122"/>
                 </a:solidFill>
@@ -7720,124 +10976,47 @@
       </p:sp>
       <p:sp>
         <p:nvSpPr>
-          <p:cNvPr id="8" name="TextBox 7"/>
-          <p:cNvSpPr txBox="1"/>
-          <p:nvPr/>
-        </p:nvSpPr>
-        <p:spPr>
-          <a:xfrm>
-            <a:off x="1371600" y="1801368"/>
-            <a:ext cx="4404207" cy="512064"/>
-          </a:xfrm>
-          <a:prstGeom prst="rect">
-            <a:avLst/>
-          </a:prstGeom>
-          <a:noFill/>
-        </p:spPr>
-        <p:txBody>
-          <a:bodyPr wrap="square" anchor="ctr" lIns="0" rIns="0" tIns="0" bIns="0"/>
+          <p:cNvPr id="7" name="TextBox 6"/>
+          <p:cNvSpPr txBox="1"/>
+          <p:nvPr/>
+        </p:nvSpPr>
+        <p:spPr>
+          <a:xfrm>
+            <a:off x="1371600" y="1645920"/>
+            <a:ext cx="10271455" cy="1188720"/>
+          </a:xfrm>
+          <a:prstGeom prst="rect">
+            <a:avLst/>
+          </a:prstGeom>
+          <a:noFill/>
+        </p:spPr>
+        <p:txBody>
+          <a:bodyPr wrap="square" anchor="t" lIns="0" rIns="0" tIns="0" bIns="0"/>
           <a:lstStyle/>
           <a:p>
             <a:pPr algn="l"/>
             <a:r>
-              <a:rPr sz="1900" b="1" i="0">
-                <a:solidFill>
-                  <a:srgbClr val="03306E"/>
-                </a:solidFill>
-                <a:latin typeface="Calibri"/>
-              </a:rPr>
-              <a:t>Visualisation</a:t>
-            </a:r>
-          </a:p>
-        </p:txBody>
-      </p:sp>
-      <p:sp>
-        <p:nvSpPr>
-          <p:cNvPr id="9" name="TextBox 8"/>
-          <p:cNvSpPr txBox="1"/>
-          <p:nvPr/>
-        </p:nvSpPr>
-        <p:spPr>
-          <a:xfrm>
-            <a:off x="777240" y="2468880"/>
-            <a:ext cx="4952847" cy="1143000"/>
-          </a:xfrm>
-          <a:prstGeom prst="rect">
-            <a:avLst/>
-          </a:prstGeom>
-          <a:noFill/>
-        </p:spPr>
-        <p:txBody>
-          <a:bodyPr wrap="square" anchor="t" lIns="0" rIns="0" tIns="0" bIns="0"/>
-          <a:lstStyle/>
-          <a:p>
-            <a:pPr algn="l"/>
-            <a:r>
-              <a:rPr sz="2000" b="0" i="0">
+              <a:rPr sz="2400" b="0" i="0">
                 <a:solidFill>
                   <a:srgbClr val="202122"/>
                 </a:solidFill>
                 <a:latin typeface="Calibri"/>
               </a:rPr>
-              <a:t>Graphs, charts, tables, reports, dashboards, infographics. Choose by data type, audience and brief.</a:t>
-            </a:r>
-          </a:p>
-        </p:txBody>
-      </p:sp>
-      <p:sp>
-        <p:nvSpPr>
-          <p:cNvPr id="10" name="Rounded Rectangle 9"/>
+              <a:t>Which V is about speed?</a:t>
+            </a:r>
+          </a:p>
+        </p:txBody>
+      </p:sp>
+      <p:sp>
+        <p:nvSpPr>
+          <p:cNvPr id="8" name="Oval 7"/>
           <p:cNvSpPr/>
           <p:nvPr/>
         </p:nvSpPr>
         <p:spPr>
           <a:xfrm>
-            <a:off x="6233007" y="1600200"/>
-            <a:ext cx="5410047" cy="2148840"/>
-          </a:xfrm>
-          <a:prstGeom prst="roundRect">
-            <a:avLst>
-              <a:gd name="adj" fmla="val 6000"/>
-            </a:avLst>
-          </a:prstGeom>
-          <a:solidFill>
-            <a:srgbClr val="EAF3FF"/>
-          </a:solidFill>
-          <a:ln>
-            <a:noFill/>
-          </a:ln>
-          <a:effectLst/>
-        </p:spPr>
-        <p:style>
-          <a:lnRef idx="1">
-            <a:schemeClr val="accent1"/>
-          </a:lnRef>
-          <a:fillRef idx="3">
-            <a:schemeClr val="accent1"/>
-          </a:fillRef>
-          <a:effectRef idx="2">
-            <a:schemeClr val="accent1"/>
-          </a:effectRef>
-          <a:fontRef idx="minor">
-            <a:schemeClr val="lt1"/>
-          </a:fontRef>
-        </p:style>
-        <p:txBody>
-          <a:bodyPr rtlCol="0" anchor="ctr"/>
-          <a:lstStyle/>
-          <a:p/>
-        </p:txBody>
-      </p:sp>
-      <p:sp>
-        <p:nvSpPr>
-          <p:cNvPr id="11" name="Oval 10"/>
-          <p:cNvSpPr/>
-          <p:nvPr/>
-        </p:nvSpPr>
-        <p:spPr>
-          <a:xfrm>
-            <a:off x="6461607" y="1828800"/>
-            <a:ext cx="457200" cy="457200"/>
+            <a:off x="548640" y="3108960"/>
+            <a:ext cx="502920" cy="502920"/>
           </a:xfrm>
           <a:prstGeom prst="ellipse">
             <a:avLst/>
@@ -7870,7 +11049,7 @@
           <a:p>
             <a:pPr algn="ctr"/>
             <a:r>
-              <a:rPr sz="1500" b="1">
+              <a:rPr sz="1600" b="1">
                 <a:solidFill>
                   <a:srgbClr val="202122"/>
                 </a:solidFill>
@@ -7883,124 +11062,47 @@
       </p:sp>
       <p:sp>
         <p:nvSpPr>
-          <p:cNvPr id="12" name="TextBox 11"/>
-          <p:cNvSpPr txBox="1"/>
-          <p:nvPr/>
-        </p:nvSpPr>
-        <p:spPr>
-          <a:xfrm>
-            <a:off x="7055967" y="1801368"/>
-            <a:ext cx="4404207" cy="512064"/>
-          </a:xfrm>
-          <a:prstGeom prst="rect">
-            <a:avLst/>
-          </a:prstGeom>
-          <a:noFill/>
-        </p:spPr>
-        <p:txBody>
-          <a:bodyPr wrap="square" anchor="ctr" lIns="0" rIns="0" tIns="0" bIns="0"/>
+          <p:cNvPr id="9" name="TextBox 8"/>
+          <p:cNvSpPr txBox="1"/>
+          <p:nvPr/>
+        </p:nvSpPr>
+        <p:spPr>
+          <a:xfrm>
+            <a:off x="1371600" y="3063240"/>
+            <a:ext cx="10271455" cy="1188720"/>
+          </a:xfrm>
+          <a:prstGeom prst="rect">
+            <a:avLst/>
+          </a:prstGeom>
+          <a:noFill/>
+        </p:spPr>
+        <p:txBody>
+          <a:bodyPr wrap="square" anchor="t" lIns="0" rIns="0" tIns="0" bIns="0"/>
           <a:lstStyle/>
           <a:p>
             <a:pPr algn="l"/>
             <a:r>
-              <a:rPr sz="1900" b="1" i="0">
-                <a:solidFill>
-                  <a:srgbClr val="03306E"/>
-                </a:solidFill>
-                <a:latin typeface="Calibri"/>
-              </a:rPr>
-              <a:t>Hierarchical model</a:t>
-            </a:r>
-          </a:p>
-        </p:txBody>
-      </p:sp>
-      <p:sp>
-        <p:nvSpPr>
-          <p:cNvPr id="13" name="TextBox 12"/>
-          <p:cNvSpPr txBox="1"/>
-          <p:nvPr/>
-        </p:nvSpPr>
-        <p:spPr>
-          <a:xfrm>
-            <a:off x="6461607" y="2468880"/>
-            <a:ext cx="4952847" cy="1143000"/>
-          </a:xfrm>
-          <a:prstGeom prst="rect">
-            <a:avLst/>
-          </a:prstGeom>
-          <a:noFill/>
-        </p:spPr>
-        <p:txBody>
-          <a:bodyPr wrap="square" anchor="t" lIns="0" rIns="0" tIns="0" bIns="0"/>
-          <a:lstStyle/>
-          <a:p>
-            <a:pPr algn="l"/>
-            <a:r>
-              <a:rPr sz="2000" b="0" i="0">
+              <a:rPr sz="2400" b="0" i="0">
                 <a:solidFill>
                   <a:srgbClr val="202122"/>
                 </a:solidFill>
                 <a:latin typeface="Calibri"/>
               </a:rPr>
-              <a:t>Parent and child tree.</a:t>
-            </a:r>
-          </a:p>
-        </p:txBody>
-      </p:sp>
-      <p:sp>
-        <p:nvSpPr>
-          <p:cNvPr id="14" name="Rounded Rectangle 13"/>
+              <a:t>Which V is about trustworthiness?</a:t>
+            </a:r>
+          </a:p>
+        </p:txBody>
+      </p:sp>
+      <p:sp>
+        <p:nvSpPr>
+          <p:cNvPr id="10" name="Oval 9"/>
           <p:cNvSpPr/>
           <p:nvPr/>
         </p:nvSpPr>
         <p:spPr>
           <a:xfrm>
-            <a:off x="548640" y="4023360"/>
-            <a:ext cx="5410047" cy="2148840"/>
-          </a:xfrm>
-          <a:prstGeom prst="roundRect">
-            <a:avLst>
-              <a:gd name="adj" fmla="val 6000"/>
-            </a:avLst>
-          </a:prstGeom>
-          <a:solidFill>
-            <a:srgbClr val="EAF3FF"/>
-          </a:solidFill>
-          <a:ln>
-            <a:noFill/>
-          </a:ln>
-          <a:effectLst/>
-        </p:spPr>
-        <p:style>
-          <a:lnRef idx="1">
-            <a:schemeClr val="accent1"/>
-          </a:lnRef>
-          <a:fillRef idx="3">
-            <a:schemeClr val="accent1"/>
-          </a:fillRef>
-          <a:effectRef idx="2">
-            <a:schemeClr val="accent1"/>
-          </a:effectRef>
-          <a:fontRef idx="minor">
-            <a:schemeClr val="lt1"/>
-          </a:fontRef>
-        </p:style>
-        <p:txBody>
-          <a:bodyPr rtlCol="0" anchor="ctr"/>
-          <a:lstStyle/>
-          <a:p/>
-        </p:txBody>
-      </p:sp>
-      <p:sp>
-        <p:nvSpPr>
-          <p:cNvPr id="15" name="Oval 14"/>
-          <p:cNvSpPr/>
-          <p:nvPr/>
-        </p:nvSpPr>
-        <p:spPr>
-          <a:xfrm>
-            <a:off x="777240" y="4251960"/>
-            <a:ext cx="457200" cy="457200"/>
+            <a:off x="548640" y="4526280"/>
+            <a:ext cx="502920" cy="502920"/>
           </a:xfrm>
           <a:prstGeom prst="ellipse">
             <a:avLst/>
@@ -8033,7 +11135,7 @@
           <a:p>
             <a:pPr algn="ctr"/>
             <a:r>
-              <a:rPr sz="1500" b="1">
+              <a:rPr sz="1600" b="1">
                 <a:solidFill>
                   <a:srgbClr val="202122"/>
                 </a:solidFill>
@@ -8046,47 +11148,47 @@
       </p:sp>
       <p:sp>
         <p:nvSpPr>
-          <p:cNvPr id="16" name="TextBox 15"/>
-          <p:cNvSpPr txBox="1"/>
-          <p:nvPr/>
-        </p:nvSpPr>
-        <p:spPr>
-          <a:xfrm>
-            <a:off x="1371600" y="4224528"/>
-            <a:ext cx="4404207" cy="512064"/>
-          </a:xfrm>
-          <a:prstGeom prst="rect">
-            <a:avLst/>
-          </a:prstGeom>
-          <a:noFill/>
-        </p:spPr>
-        <p:txBody>
-          <a:bodyPr wrap="square" anchor="ctr" lIns="0" rIns="0" tIns="0" bIns="0"/>
+          <p:cNvPr id="11" name="TextBox 10"/>
+          <p:cNvSpPr txBox="1"/>
+          <p:nvPr/>
+        </p:nvSpPr>
+        <p:spPr>
+          <a:xfrm>
+            <a:off x="1371600" y="4480560"/>
+            <a:ext cx="10271455" cy="1188720"/>
+          </a:xfrm>
+          <a:prstGeom prst="rect">
+            <a:avLst/>
+          </a:prstGeom>
+          <a:noFill/>
+        </p:spPr>
+        <p:txBody>
+          <a:bodyPr wrap="square" anchor="t" lIns="0" rIns="0" tIns="0" bIns="0"/>
           <a:lstStyle/>
           <a:p>
             <a:pPr algn="l"/>
             <a:r>
-              <a:rPr sz="1900" b="1" i="0">
-                <a:solidFill>
-                  <a:srgbClr val="03306E"/>
-                </a:solidFill>
-                <a:latin typeface="Calibri"/>
-              </a:rPr>
-              <a:t>Network model</a:t>
-            </a:r>
-          </a:p>
-        </p:txBody>
-      </p:sp>
-      <p:sp>
-        <p:nvSpPr>
-          <p:cNvPr id="17" name="TextBox 16"/>
-          <p:cNvSpPr txBox="1"/>
-          <p:nvPr/>
-        </p:nvSpPr>
-        <p:spPr>
-          <a:xfrm>
-            <a:off x="777240" y="4892040"/>
-            <a:ext cx="4952847" cy="1143000"/>
+              <a:rPr sz="2400" b="0" i="0">
+                <a:solidFill>
+                  <a:srgbClr val="202122"/>
+                </a:solidFill>
+                <a:latin typeface="Calibri"/>
+              </a:rPr>
+              <a:t>Name one data quality method.</a:t>
+            </a:r>
+          </a:p>
+        </p:txBody>
+      </p:sp>
+      <p:sp>
+        <p:nvSpPr>
+          <p:cNvPr id="12" name="TextBox 11"/>
+          <p:cNvSpPr txBox="1"/>
+          <p:nvPr/>
+        </p:nvSpPr>
+        <p:spPr>
+          <a:xfrm>
+            <a:off x="548640" y="5852160"/>
+            <a:ext cx="11094415" cy="365760"/>
           </a:xfrm>
           <a:prstGeom prst="rect">
             <a:avLst/>
@@ -8099,176 +11201,13 @@
           <a:p>
             <a:pPr algn="l"/>
             <a:r>
-              <a:rPr sz="2000" b="0" i="0">
-                <a:solidFill>
-                  <a:srgbClr val="202122"/>
-                </a:solidFill>
-                <a:latin typeface="Calibri"/>
-              </a:rPr>
-              <a:t>Records with many links.</a:t>
-            </a:r>
-          </a:p>
-        </p:txBody>
-      </p:sp>
-      <p:sp>
-        <p:nvSpPr>
-          <p:cNvPr id="18" name="Rounded Rectangle 17"/>
-          <p:cNvSpPr/>
-          <p:nvPr/>
-        </p:nvSpPr>
-        <p:spPr>
-          <a:xfrm>
-            <a:off x="6233007" y="4023360"/>
-            <a:ext cx="5410047" cy="2148840"/>
-          </a:xfrm>
-          <a:prstGeom prst="roundRect">
-            <a:avLst>
-              <a:gd name="adj" fmla="val 6000"/>
-            </a:avLst>
-          </a:prstGeom>
-          <a:solidFill>
-            <a:srgbClr val="EAF3FF"/>
-          </a:solidFill>
-          <a:ln>
-            <a:noFill/>
-          </a:ln>
-          <a:effectLst/>
-        </p:spPr>
-        <p:style>
-          <a:lnRef idx="1">
-            <a:schemeClr val="accent1"/>
-          </a:lnRef>
-          <a:fillRef idx="3">
-            <a:schemeClr val="accent1"/>
-          </a:fillRef>
-          <a:effectRef idx="2">
-            <a:schemeClr val="accent1"/>
-          </a:effectRef>
-          <a:fontRef idx="minor">
-            <a:schemeClr val="lt1"/>
-          </a:fontRef>
-        </p:style>
-        <p:txBody>
-          <a:bodyPr rtlCol="0" anchor="ctr"/>
-          <a:lstStyle/>
-          <a:p/>
-        </p:txBody>
-      </p:sp>
-      <p:sp>
-        <p:nvSpPr>
-          <p:cNvPr id="19" name="Oval 18"/>
-          <p:cNvSpPr/>
-          <p:nvPr/>
-        </p:nvSpPr>
-        <p:spPr>
-          <a:xfrm>
-            <a:off x="6461607" y="4251960"/>
-            <a:ext cx="457200" cy="457200"/>
-          </a:xfrm>
-          <a:prstGeom prst="ellipse">
-            <a:avLst/>
-          </a:prstGeom>
-          <a:solidFill>
-            <a:srgbClr val="F2B705"/>
-          </a:solidFill>
-          <a:ln>
-            <a:noFill/>
-          </a:ln>
-          <a:effectLst/>
-        </p:spPr>
-        <p:style>
-          <a:lnRef idx="1">
-            <a:schemeClr val="accent1"/>
-          </a:lnRef>
-          <a:fillRef idx="3">
-            <a:schemeClr val="accent1"/>
-          </a:fillRef>
-          <a:effectRef idx="2">
-            <a:schemeClr val="accent1"/>
-          </a:effectRef>
-          <a:fontRef idx="minor">
-            <a:schemeClr val="lt1"/>
-          </a:fontRef>
-        </p:style>
-        <p:txBody>
-          <a:bodyPr rtlCol="0" anchor="ctr" lIns="0" rIns="0" tIns="0" bIns="0"/>
-          <a:lstStyle/>
-          <a:p>
-            <a:pPr algn="ctr"/>
-            <a:r>
-              <a:rPr sz="1500" b="1">
-                <a:solidFill>
-                  <a:srgbClr val="202122"/>
-                </a:solidFill>
-                <a:latin typeface="Calibri"/>
-              </a:rPr>
-              <a:t>4</a:t>
-            </a:r>
-          </a:p>
-        </p:txBody>
-      </p:sp>
-      <p:sp>
-        <p:nvSpPr>
-          <p:cNvPr id="20" name="TextBox 19"/>
-          <p:cNvSpPr txBox="1"/>
-          <p:nvPr/>
-        </p:nvSpPr>
-        <p:spPr>
-          <a:xfrm>
-            <a:off x="7055967" y="4224528"/>
-            <a:ext cx="4404207" cy="512064"/>
-          </a:xfrm>
-          <a:prstGeom prst="rect">
-            <a:avLst/>
-          </a:prstGeom>
-          <a:noFill/>
-        </p:spPr>
-        <p:txBody>
-          <a:bodyPr wrap="square" anchor="ctr" lIns="0" rIns="0" tIns="0" bIns="0"/>
-          <a:lstStyle/>
-          <a:p>
-            <a:pPr algn="l"/>
-            <a:r>
-              <a:rPr sz="1900" b="1" i="0">
-                <a:solidFill>
-                  <a:srgbClr val="03306E"/>
-                </a:solidFill>
-                <a:latin typeface="Calibri"/>
-              </a:rPr>
-              <a:t>Relational model</a:t>
-            </a:r>
-          </a:p>
-        </p:txBody>
-      </p:sp>
-      <p:sp>
-        <p:nvSpPr>
-          <p:cNvPr id="21" name="TextBox 20"/>
-          <p:cNvSpPr txBox="1"/>
-          <p:nvPr/>
-        </p:nvSpPr>
-        <p:spPr>
-          <a:xfrm>
-            <a:off x="6461607" y="4892040"/>
-            <a:ext cx="4952847" cy="1143000"/>
-          </a:xfrm>
-          <a:prstGeom prst="rect">
-            <a:avLst/>
-          </a:prstGeom>
-          <a:noFill/>
-        </p:spPr>
-        <p:txBody>
-          <a:bodyPr wrap="square" anchor="t" lIns="0" rIns="0" tIns="0" bIns="0"/>
-          <a:lstStyle/>
-          <a:p>
-            <a:pPr algn="l"/>
-            <a:r>
-              <a:rPr sz="2000" b="0" i="0">
-                <a:solidFill>
-                  <a:srgbClr val="202122"/>
-                </a:solidFill>
-                <a:latin typeface="Calibri"/>
-              </a:rPr>
-              <a:t>Tables of rows and columns linked by keys.</a:t>
+              <a:rPr sz="1300" b="0" i="1">
+                <a:solidFill>
+                  <a:srgbClr val="54595D"/>
+                </a:solidFill>
+                <a:latin typeface="Calibri"/>
+              </a:rPr>
+              <a:t>Answer on mini whiteboards or in your book. Answers are in the speaker notes.</a:t>
             </a:r>
           </a:p>
         </p:txBody>
@@ -8360,7 +11299,7 @@
                 </a:solidFill>
                 <a:latin typeface="Cambria"/>
               </a:rPr>
-              <a:t>Access and analysis</a:t>
+              <a:t>Data wrangling</a:t>
             </a:r>
           </a:p>
         </p:txBody>
@@ -8433,18 +11372,89 @@
       </p:sp>
       <p:sp>
         <p:nvSpPr>
-          <p:cNvPr id="6" name="Rounded Rectangle 5"/>
+          <p:cNvPr id="6" name="TextBox 5"/>
+          <p:cNvSpPr txBox="1"/>
+          <p:nvPr/>
+        </p:nvSpPr>
+        <p:spPr>
+          <a:xfrm>
+            <a:off x="548640" y="1554480"/>
+            <a:ext cx="6720840" cy="4617720"/>
+          </a:xfrm>
+          <a:prstGeom prst="rect">
+            <a:avLst/>
+          </a:prstGeom>
+          <a:noFill/>
+        </p:spPr>
+        <p:txBody>
+          <a:bodyPr wrap="square" lIns="0" rIns="0" tIns="0" bIns="0">
+            <a:spAutoFit/>
+          </a:bodyPr>
+          <a:lstStyle/>
+          <a:p>
+            <a:pPr>
+              <a:spcAft>
+                <a:spcPts val="1320"/>
+              </a:spcAft>
+            </a:pPr>
+            <a:r>
+              <a:rPr sz="2200" b="0">
+                <a:solidFill>
+                  <a:srgbClr val="202122"/>
+                </a:solidFill>
+                <a:latin typeface="Calibri"/>
+              </a:rPr>
+              <a:t>Data wrangling gets raw data ready to use in five steps: structure it into a usable layout, clean it (fix errors, remove duplicates), validate it against rules, enrich it with useful extra data, and output it.</a:t>
+            </a:r>
+          </a:p>
+          <a:p>
+            <a:pPr>
+              <a:spcAft>
+                <a:spcPts val="1320"/>
+              </a:spcAft>
+            </a:pPr>
+            <a:r>
+              <a:rPr sz="2200" b="0">
+                <a:solidFill>
+                  <a:srgbClr val="202122"/>
+                </a:solidFill>
+                <a:latin typeface="Calibri"/>
+              </a:rPr>
+              <a:t>Data entry errors cause many problems. Transcription errors are copying mistakes; transposition errors swap characters (1234 becomes 1243). Validation, double-entry verification, drop-down menus and pre-filled boxes reduce them.</a:t>
+            </a:r>
+          </a:p>
+          <a:p>
+            <a:pPr>
+              <a:spcAft>
+                <a:spcPts val="1320"/>
+              </a:spcAft>
+            </a:pPr>
+            <a:r>
+              <a:rPr sz="2200" b="0">
+                <a:solidFill>
+                  <a:srgbClr val="202122"/>
+                </a:solidFill>
+                <a:latin typeface="Calibri"/>
+              </a:rPr>
+              <a:t>In Python, pandas is the usual tool for wrangling a CSV file.</a:t>
+            </a:r>
+          </a:p>
+        </p:txBody>
+      </p:sp>
+      <p:sp>
+        <p:nvSpPr>
+          <p:cNvPr id="7" name="Rounded Rectangle 6"/>
           <p:cNvSpPr/>
           <p:nvPr/>
         </p:nvSpPr>
         <p:spPr>
           <a:xfrm>
-            <a:off x="548640" y="1600200"/>
-            <a:ext cx="5364327" cy="640080"/>
+            <a:off x="7772400" y="1554480"/>
+            <a:ext cx="3867912" cy="4526280"/>
           </a:xfrm>
           <a:prstGeom prst="roundRect">
             <a:avLst>
-              <a:gd name="adj" fmla="val 15000"/>
+              <a:gd name="adj" fmla="val 8000"/>
             </a:avLst>
           </a:prstGeom>
           <a:solidFill>
@@ -8477,55 +11487,20 @@
       </p:sp>
       <p:sp>
         <p:nvSpPr>
-          <p:cNvPr id="7" name="TextBox 6"/>
-          <p:cNvSpPr txBox="1"/>
-          <p:nvPr/>
-        </p:nvSpPr>
-        <p:spPr>
-          <a:xfrm>
-            <a:off x="777240" y="1600200"/>
-            <a:ext cx="4907127" cy="640080"/>
-          </a:xfrm>
-          <a:prstGeom prst="rect">
-            <a:avLst/>
-          </a:prstGeom>
-          <a:noFill/>
-        </p:spPr>
-        <p:txBody>
-          <a:bodyPr wrap="square" anchor="ctr" lIns="0" rIns="0" tIns="0" bIns="0"/>
-          <a:lstStyle/>
-          <a:p>
-            <a:pPr algn="l"/>
-            <a:r>
-              <a:rPr sz="2000" b="1" i="0">
-                <a:solidFill>
-                  <a:srgbClr val="FFFFFF"/>
-                </a:solidFill>
-                <a:latin typeface="Calibri"/>
-              </a:rPr>
-              <a:t>Access across platforms</a:t>
-            </a:r>
-          </a:p>
-        </p:txBody>
-      </p:sp>
-      <p:sp>
-        <p:nvSpPr>
-          <p:cNvPr id="8" name="Rounded Rectangle 7"/>
+          <p:cNvPr id="8" name="Oval 7"/>
           <p:cNvSpPr/>
           <p:nvPr/>
         </p:nvSpPr>
         <p:spPr>
           <a:xfrm>
-            <a:off x="548640" y="2377440"/>
-            <a:ext cx="5364327" cy="3794760"/>
-          </a:xfrm>
-          <a:prstGeom prst="roundRect">
-            <a:avLst>
-              <a:gd name="adj" fmla="val 4000"/>
-            </a:avLst>
+            <a:off x="8046720" y="1828800"/>
+            <a:ext cx="548640" cy="548640"/>
+          </a:xfrm>
+          <a:prstGeom prst="ellipse">
+            <a:avLst/>
           </a:prstGeom>
           <a:solidFill>
-            <a:srgbClr val="EAF3FF"/>
+            <a:srgbClr val="F2B705"/>
           </a:solidFill>
           <a:ln>
             <a:noFill/>
@@ -8547,9 +11522,20 @@
           </a:fontRef>
         </p:style>
         <p:txBody>
-          <a:bodyPr rtlCol="0" anchor="ctr"/>
-          <a:lstStyle/>
-          <a:p/>
+          <a:bodyPr rtlCol="0" anchor="ctr" lIns="0" rIns="0" tIns="0" bIns="0"/>
+          <a:lstStyle/>
+          <a:p>
+            <a:pPr algn="ctr"/>
+            <a:r>
+              <a:rPr sz="1300" b="1">
+                <a:solidFill>
+                  <a:srgbClr val="202122"/>
+                </a:solidFill>
+                <a:latin typeface="Calibri"/>
+              </a:rPr>
+              <a:t>e.g.</a:t>
+            </a:r>
+          </a:p>
         </p:txBody>
       </p:sp>
       <p:sp>
@@ -8560,344 +11546,60 @@
         </p:nvSpPr>
         <p:spPr>
           <a:xfrm>
-            <a:off x="822959" y="2606040"/>
-            <a:ext cx="4815687" cy="3337560"/>
-          </a:xfrm>
-          <a:prstGeom prst="rect">
-            <a:avLst/>
-          </a:prstGeom>
-          <a:noFill/>
-        </p:spPr>
-        <p:txBody>
-          <a:bodyPr wrap="square" lIns="0" rIns="0" tIns="0" bIns="0">
-            <a:spAutoFit/>
-          </a:bodyPr>
-          <a:lstStyle/>
-          <a:p>
-            <a:pPr marL="274320" indent="-274320">
-              <a:spcAft>
-                <a:spcPts val="990"/>
-              </a:spcAft>
-              <a:buClr>
-                <a:srgbClr val="0645AD"/>
-              </a:buClr>
-              <a:buFont typeface="Arial"/>
-              <a:buChar char="•"/>
-            </a:pPr>
-            <a:r>
-              <a:rPr sz="2200" b="1">
-                <a:solidFill>
-                  <a:srgbClr val="202122"/>
-                </a:solidFill>
-                <a:latin typeface="Calibri"/>
-              </a:rPr>
-              <a:t>Permissions:</a:t>
-            </a:r>
-            <a:r>
-              <a:rPr sz="2200" b="0">
-                <a:solidFill>
-                  <a:srgbClr val="202122"/>
-                </a:solidFill>
-                <a:latin typeface="Calibri"/>
-              </a:rPr>
-              <a:t> authorisation, privileges, rights, rules</a:t>
-            </a:r>
-          </a:p>
-          <a:p>
-            <a:pPr marL="274320" indent="-274320">
-              <a:spcAft>
-                <a:spcPts val="990"/>
-              </a:spcAft>
-              <a:buClr>
-                <a:srgbClr val="0645AD"/>
-              </a:buClr>
-              <a:buFont typeface="Arial"/>
-              <a:buChar char="•"/>
-            </a:pPr>
-            <a:r>
-              <a:rPr sz="2200" b="1">
-                <a:solidFill>
-                  <a:srgbClr val="202122"/>
-                </a:solidFill>
-                <a:latin typeface="Calibri"/>
-              </a:rPr>
-              <a:t>RBAC:</a:t>
-            </a:r>
-            <a:r>
-              <a:rPr sz="2200" b="0">
-                <a:solidFill>
-                  <a:srgbClr val="202122"/>
-                </a:solidFill>
-                <a:latin typeface="Calibri"/>
-              </a:rPr>
-              <a:t> by role</a:t>
-            </a:r>
-          </a:p>
-          <a:p>
-            <a:pPr marL="274320" indent="-274320">
-              <a:spcAft>
-                <a:spcPts val="990"/>
-              </a:spcAft>
-              <a:buClr>
-                <a:srgbClr val="0645AD"/>
-              </a:buClr>
-              <a:buFont typeface="Arial"/>
-              <a:buChar char="•"/>
-            </a:pPr>
-            <a:r>
-              <a:rPr sz="2200" b="1">
-                <a:solidFill>
-                  <a:srgbClr val="202122"/>
-                </a:solidFill>
-                <a:latin typeface="Calibri"/>
-              </a:rPr>
-              <a:t>RuBAC:</a:t>
-            </a:r>
-            <a:r>
-              <a:rPr sz="2200" b="0">
-                <a:solidFill>
-                  <a:srgbClr val="202122"/>
-                </a:solidFill>
-                <a:latin typeface="Calibri"/>
-              </a:rPr>
-              <a:t> by rules</a:t>
-            </a:r>
-          </a:p>
-          <a:p>
-            <a:pPr marL="274320" indent="-274320">
-              <a:spcAft>
-                <a:spcPts val="990"/>
-              </a:spcAft>
-              <a:buClr>
-                <a:srgbClr val="0645AD"/>
-              </a:buClr>
-              <a:buFont typeface="Arial"/>
-              <a:buChar char="•"/>
-            </a:pPr>
-            <a:r>
-              <a:rPr sz="2200" b="1">
-                <a:solidFill>
-                  <a:srgbClr val="202122"/>
-                </a:solidFill>
-                <a:latin typeface="Calibri"/>
-              </a:rPr>
-              <a:t>APIs:</a:t>
-            </a:r>
-            <a:r>
-              <a:rPr sz="2200" b="0">
-                <a:solidFill>
-                  <a:srgbClr val="202122"/>
-                </a:solidFill>
-                <a:latin typeface="Calibri"/>
-              </a:rPr>
-              <a:t> controlled access for other software</a:t>
-            </a:r>
-          </a:p>
-        </p:txBody>
-      </p:sp>
-      <p:sp>
-        <p:nvSpPr>
-          <p:cNvPr id="10" name="Rounded Rectangle 9"/>
-          <p:cNvSpPr/>
-          <p:nvPr/>
-        </p:nvSpPr>
-        <p:spPr>
-          <a:xfrm>
-            <a:off x="6278727" y="1600200"/>
-            <a:ext cx="5364327" cy="640080"/>
-          </a:xfrm>
-          <a:prstGeom prst="roundRect">
-            <a:avLst>
-              <a:gd name="adj" fmla="val 15000"/>
-            </a:avLst>
-          </a:prstGeom>
-          <a:solidFill>
-            <a:srgbClr val="0645AD"/>
-          </a:solidFill>
-          <a:ln>
-            <a:noFill/>
-          </a:ln>
-          <a:effectLst/>
-        </p:spPr>
-        <p:style>
-          <a:lnRef idx="1">
-            <a:schemeClr val="accent1"/>
-          </a:lnRef>
-          <a:fillRef idx="3">
-            <a:schemeClr val="accent1"/>
-          </a:fillRef>
-          <a:effectRef idx="2">
-            <a:schemeClr val="accent1"/>
-          </a:effectRef>
-          <a:fontRef idx="minor">
-            <a:schemeClr val="lt1"/>
-          </a:fontRef>
-        </p:style>
-        <p:txBody>
-          <a:bodyPr rtlCol="0" anchor="ctr"/>
-          <a:lstStyle/>
-          <a:p/>
-        </p:txBody>
-      </p:sp>
-      <p:sp>
-        <p:nvSpPr>
-          <p:cNvPr id="11" name="TextBox 10"/>
-          <p:cNvSpPr txBox="1"/>
-          <p:nvPr/>
-        </p:nvSpPr>
-        <p:spPr>
-          <a:xfrm>
-            <a:off x="6507327" y="1600200"/>
-            <a:ext cx="4907127" cy="640080"/>
-          </a:xfrm>
-          <a:prstGeom prst="rect">
-            <a:avLst/>
-          </a:prstGeom>
-          <a:noFill/>
-        </p:spPr>
-        <p:txBody>
-          <a:bodyPr wrap="square" anchor="ctr" lIns="0" rIns="0" tIns="0" bIns="0"/>
+            <a:off x="8046720" y="2560320"/>
+            <a:ext cx="3291840" cy="365760"/>
+          </a:xfrm>
+          <a:prstGeom prst="rect">
+            <a:avLst/>
+          </a:prstGeom>
+          <a:noFill/>
+        </p:spPr>
+        <p:txBody>
+          <a:bodyPr wrap="square" anchor="t" lIns="0" rIns="0" tIns="0" bIns="0"/>
           <a:lstStyle/>
           <a:p>
             <a:pPr algn="l"/>
             <a:r>
-              <a:rPr sz="2000" b="1" i="0">
+              <a:rPr sz="1300" b="1" i="0">
+                <a:solidFill>
+                  <a:srgbClr val="A9C8F0"/>
+                </a:solidFill>
+                <a:latin typeface="Calibri"/>
+              </a:rPr>
+              <a:t>EXAMPLE</a:t>
+            </a:r>
+          </a:p>
+        </p:txBody>
+      </p:sp>
+      <p:sp>
+        <p:nvSpPr>
+          <p:cNvPr id="10" name="TextBox 9"/>
+          <p:cNvSpPr txBox="1"/>
+          <p:nvPr/>
+        </p:nvSpPr>
+        <p:spPr>
+          <a:xfrm>
+            <a:off x="8046720" y="2971800"/>
+            <a:ext cx="3291840" cy="2971800"/>
+          </a:xfrm>
+          <a:prstGeom prst="rect">
+            <a:avLst/>
+          </a:prstGeom>
+          <a:noFill/>
+        </p:spPr>
+        <p:txBody>
+          <a:bodyPr wrap="square" anchor="t" lIns="0" rIns="0" tIns="0" bIns="0"/>
+          <a:lstStyle/>
+          <a:p>
+            <a:pPr algn="l"/>
+            <a:r>
+              <a:rPr sz="1500" b="0" i="0">
                 <a:solidFill>
                   <a:srgbClr val="FFFFFF"/>
                 </a:solidFill>
-                <a:latin typeface="Calibri"/>
-              </a:rPr>
-              <a:t>Analysis tools</a:t>
-            </a:r>
-          </a:p>
-        </p:txBody>
-      </p:sp>
-      <p:sp>
-        <p:nvSpPr>
-          <p:cNvPr id="12" name="Rounded Rectangle 11"/>
-          <p:cNvSpPr/>
-          <p:nvPr/>
-        </p:nvSpPr>
-        <p:spPr>
-          <a:xfrm>
-            <a:off x="6278727" y="2377440"/>
-            <a:ext cx="5364327" cy="3794760"/>
-          </a:xfrm>
-          <a:prstGeom prst="roundRect">
-            <a:avLst>
-              <a:gd name="adj" fmla="val 4000"/>
-            </a:avLst>
-          </a:prstGeom>
-          <a:solidFill>
-            <a:srgbClr val="EAF3FF"/>
-          </a:solidFill>
-          <a:ln>
-            <a:noFill/>
-          </a:ln>
-          <a:effectLst/>
-        </p:spPr>
-        <p:style>
-          <a:lnRef idx="1">
-            <a:schemeClr val="accent1"/>
-          </a:lnRef>
-          <a:fillRef idx="3">
-            <a:schemeClr val="accent1"/>
-          </a:fillRef>
-          <a:effectRef idx="2">
-            <a:schemeClr val="accent1"/>
-          </a:effectRef>
-          <a:fontRef idx="minor">
-            <a:schemeClr val="lt1"/>
-          </a:fontRef>
-        </p:style>
-        <p:txBody>
-          <a:bodyPr rtlCol="0" anchor="ctr"/>
-          <a:lstStyle/>
-          <a:p/>
-        </p:txBody>
-      </p:sp>
-      <p:sp>
-        <p:nvSpPr>
-          <p:cNvPr id="13" name="TextBox 12"/>
-          <p:cNvSpPr txBox="1"/>
-          <p:nvPr/>
-        </p:nvSpPr>
-        <p:spPr>
-          <a:xfrm>
-            <a:off x="6553047" y="2606040"/>
-            <a:ext cx="4815687" cy="3337560"/>
-          </a:xfrm>
-          <a:prstGeom prst="rect">
-            <a:avLst/>
-          </a:prstGeom>
-          <a:noFill/>
-        </p:spPr>
-        <p:txBody>
-          <a:bodyPr wrap="square" lIns="0" rIns="0" tIns="0" bIns="0">
-            <a:spAutoFit/>
-          </a:bodyPr>
-          <a:lstStyle/>
-          <a:p>
-            <a:pPr marL="274320" indent="-274320">
-              <a:spcAft>
-                <a:spcPts val="990"/>
-              </a:spcAft>
-              <a:buClr>
-                <a:srgbClr val="0645AD"/>
-              </a:buClr>
-              <a:buFont typeface="Arial"/>
-              <a:buChar char="•"/>
-            </a:pPr>
-            <a:r>
-              <a:rPr sz="2200" b="0">
-                <a:solidFill>
-                  <a:srgbClr val="202122"/>
-                </a:solidFill>
-                <a:latin typeface="Calibri"/>
-              </a:rPr>
-              <a:t>Data warehouse, data lake, data mart</a:t>
-            </a:r>
-          </a:p>
-          <a:p>
-            <a:pPr marL="274320" indent="-274320">
-              <a:spcAft>
-                <a:spcPts val="990"/>
-              </a:spcAft>
-              <a:buClr>
-                <a:srgbClr val="0645AD"/>
-              </a:buClr>
-              <a:buFont typeface="Arial"/>
-              <a:buChar char="•"/>
-            </a:pPr>
-            <a:r>
-              <a:rPr sz="2200" b="0">
-                <a:solidFill>
-                  <a:srgbClr val="202122"/>
-                </a:solidFill>
-                <a:latin typeface="Calibri"/>
-              </a:rPr>
-              <a:t>Data mining and reporting</a:t>
-            </a:r>
-          </a:p>
-          <a:p>
-            <a:pPr marL="274320" indent="-274320">
-              <a:spcAft>
-                <a:spcPts val="990"/>
-              </a:spcAft>
-              <a:buClr>
-                <a:srgbClr val="0645AD"/>
-              </a:buClr>
-              <a:buFont typeface="Arial"/>
-              <a:buChar char="•"/>
-            </a:pPr>
-            <a:r>
-              <a:rPr sz="2200" b="0">
-                <a:solidFill>
-                  <a:srgbClr val="202122"/>
-                </a:solidFill>
-                <a:latin typeface="Calibri"/>
-              </a:rPr>
-              <a:t>Business intelligence for finance and CRM</a:t>
+                <a:latin typeface="Cambria"/>
+              </a:rPr>
+              <a:t>df.drop_duplicates() removes repeated rows; df['country'].replace('U.K.', 'UK') makes values consistent.</a:t>
             </a:r>
           </a:p>
         </p:txBody>
@@ -8989,7 +11691,7 @@
                 </a:solidFill>
                 <a:latin typeface="Cambria"/>
               </a:rPr>
-              <a:t>Check your understanding</a:t>
+              <a:t>Data wrangling</a:t>
             </a:r>
           </a:p>
         </p:txBody>
@@ -9062,14 +11764,56 @@
       </p:sp>
       <p:sp>
         <p:nvSpPr>
-          <p:cNvPr id="6" name="Oval 5"/>
+          <p:cNvPr id="6" name="Rectangle 5"/>
           <p:cNvSpPr/>
           <p:nvPr/>
         </p:nvSpPr>
         <p:spPr>
           <a:xfrm>
-            <a:off x="548640" y="1618488"/>
-            <a:ext cx="411480" cy="411480"/>
+            <a:off x="1603217" y="2519172"/>
+            <a:ext cx="8985260" cy="36576"/>
+          </a:xfrm>
+          <a:prstGeom prst="rect">
+            <a:avLst/>
+          </a:prstGeom>
+          <a:solidFill>
+            <a:srgbClr val="A9C8F0"/>
+          </a:solidFill>
+          <a:ln>
+            <a:noFill/>
+          </a:ln>
+          <a:effectLst/>
+        </p:spPr>
+        <p:style>
+          <a:lnRef idx="1">
+            <a:schemeClr val="accent1"/>
+          </a:lnRef>
+          <a:fillRef idx="3">
+            <a:schemeClr val="accent1"/>
+          </a:fillRef>
+          <a:effectRef idx="2">
+            <a:schemeClr val="accent1"/>
+          </a:effectRef>
+          <a:fontRef idx="minor">
+            <a:schemeClr val="lt1"/>
+          </a:fontRef>
+        </p:style>
+        <p:txBody>
+          <a:bodyPr rtlCol="0" anchor="ctr"/>
+          <a:lstStyle/>
+          <a:p/>
+        </p:txBody>
+      </p:sp>
+      <p:sp>
+        <p:nvSpPr>
+          <p:cNvPr id="7" name="Oval 6"/>
+          <p:cNvSpPr/>
+          <p:nvPr/>
+        </p:nvSpPr>
+        <p:spPr>
+          <a:xfrm>
+            <a:off x="1283177" y="2217420"/>
+            <a:ext cx="640080" cy="640080"/>
           </a:xfrm>
           <a:prstGeom prst="ellipse">
             <a:avLst/>
@@ -9102,7 +11846,7 @@
           <a:p>
             <a:pPr algn="ctr"/>
             <a:r>
-              <a:rPr sz="1400" b="1">
+              <a:rPr sz="2000" b="1">
                 <a:solidFill>
                   <a:srgbClr val="202122"/>
                 </a:solidFill>
@@ -9115,14 +11859,14 @@
       </p:sp>
       <p:sp>
         <p:nvSpPr>
-          <p:cNvPr id="7" name="TextBox 6"/>
-          <p:cNvSpPr txBox="1"/>
-          <p:nvPr/>
-        </p:nvSpPr>
-        <p:spPr>
-          <a:xfrm>
-            <a:off x="1234440" y="1600200"/>
-            <a:ext cx="10408615" cy="1030986"/>
+          <p:cNvPr id="8" name="TextBox 7"/>
+          <p:cNvSpPr txBox="1"/>
+          <p:nvPr/>
+        </p:nvSpPr>
+        <p:spPr>
+          <a:xfrm>
+            <a:off x="548640" y="2994660"/>
+            <a:ext cx="2109155" cy="731520"/>
           </a:xfrm>
           <a:prstGeom prst="rect">
             <a:avLst/>
@@ -9133,29 +11877,106 @@
           <a:bodyPr wrap="square" anchor="t" lIns="0" rIns="0" tIns="0" bIns="0"/>
           <a:lstStyle/>
           <a:p>
+            <a:pPr algn="ctr"/>
+            <a:r>
+              <a:rPr sz="1700" b="1" i="0">
+                <a:solidFill>
+                  <a:srgbClr val="03306E"/>
+                </a:solidFill>
+                <a:latin typeface="Calibri"/>
+              </a:rPr>
+              <a:t>Structure</a:t>
+            </a:r>
+          </a:p>
+        </p:txBody>
+      </p:sp>
+      <p:sp>
+        <p:nvSpPr>
+          <p:cNvPr id="9" name="Rounded Rectangle 8"/>
+          <p:cNvSpPr/>
+          <p:nvPr/>
+        </p:nvSpPr>
+        <p:spPr>
+          <a:xfrm>
+            <a:off x="548640" y="3771900"/>
+            <a:ext cx="2109155" cy="960120"/>
+          </a:xfrm>
+          <a:prstGeom prst="roundRect">
+            <a:avLst>
+              <a:gd name="adj" fmla="val 6000"/>
+            </a:avLst>
+          </a:prstGeom>
+          <a:solidFill>
+            <a:srgbClr val="EAF3FF"/>
+          </a:solidFill>
+          <a:ln>
+            <a:noFill/>
+          </a:ln>
+          <a:effectLst/>
+        </p:spPr>
+        <p:style>
+          <a:lnRef idx="1">
+            <a:schemeClr val="accent1"/>
+          </a:lnRef>
+          <a:fillRef idx="3">
+            <a:schemeClr val="accent1"/>
+          </a:fillRef>
+          <a:effectRef idx="2">
+            <a:schemeClr val="accent1"/>
+          </a:effectRef>
+          <a:fontRef idx="minor">
+            <a:schemeClr val="lt1"/>
+          </a:fontRef>
+        </p:style>
+        <p:txBody>
+          <a:bodyPr rtlCol="0" anchor="ctr"/>
+          <a:lstStyle/>
+          <a:p/>
+        </p:txBody>
+      </p:sp>
+      <p:sp>
+        <p:nvSpPr>
+          <p:cNvPr id="10" name="TextBox 9"/>
+          <p:cNvSpPr txBox="1"/>
+          <p:nvPr/>
+        </p:nvSpPr>
+        <p:spPr>
+          <a:xfrm>
+            <a:off x="685800" y="3909060"/>
+            <a:ext cx="1834835" cy="685800"/>
+          </a:xfrm>
+          <a:prstGeom prst="rect">
+            <a:avLst/>
+          </a:prstGeom>
+          <a:noFill/>
+        </p:spPr>
+        <p:txBody>
+          <a:bodyPr wrap="square" anchor="t" lIns="0" rIns="0" tIns="0" bIns="0"/>
+          <a:lstStyle/>
+          <a:p>
             <a:pPr algn="l"/>
             <a:r>
-              <a:rPr sz="2200" b="0" i="0">
+              <a:rPr sz="1800" b="0" i="0">
                 <a:solidFill>
                   <a:srgbClr val="202122"/>
                 </a:solidFill>
                 <a:latin typeface="Calibri"/>
               </a:rPr>
-              <a:t>Which V refers to trustworthiness?</a:t>
-            </a:r>
-          </a:p>
-        </p:txBody>
-      </p:sp>
-      <p:sp>
-        <p:nvSpPr>
-          <p:cNvPr id="8" name="Oval 7"/>
+              <a:t>Shape raw data.</a:t>
+            </a:r>
+          </a:p>
+        </p:txBody>
+      </p:sp>
+      <p:sp>
+        <p:nvSpPr>
+          <p:cNvPr id="11" name="Oval 10"/>
           <p:cNvSpPr/>
           <p:nvPr/>
         </p:nvSpPr>
         <p:spPr>
           <a:xfrm>
-            <a:off x="548640" y="2814066"/>
-            <a:ext cx="411480" cy="411480"/>
+            <a:off x="3529492" y="2217420"/>
+            <a:ext cx="640080" cy="640080"/>
           </a:xfrm>
           <a:prstGeom prst="ellipse">
             <a:avLst/>
@@ -9188,7 +12009,7 @@
           <a:p>
             <a:pPr algn="ctr"/>
             <a:r>
-              <a:rPr sz="1400" b="1">
+              <a:rPr sz="2000" b="1">
                 <a:solidFill>
                   <a:srgbClr val="202122"/>
                 </a:solidFill>
@@ -9201,14 +12022,14 @@
       </p:sp>
       <p:sp>
         <p:nvSpPr>
-          <p:cNvPr id="9" name="TextBox 8"/>
-          <p:cNvSpPr txBox="1"/>
-          <p:nvPr/>
-        </p:nvSpPr>
-        <p:spPr>
-          <a:xfrm>
-            <a:off x="1234440" y="2795778"/>
-            <a:ext cx="10408615" cy="1030986"/>
+          <p:cNvPr id="12" name="TextBox 11"/>
+          <p:cNvSpPr txBox="1"/>
+          <p:nvPr/>
+        </p:nvSpPr>
+        <p:spPr>
+          <a:xfrm>
+            <a:off x="2794955" y="2994660"/>
+            <a:ext cx="2109155" cy="731520"/>
           </a:xfrm>
           <a:prstGeom prst="rect">
             <a:avLst/>
@@ -9219,29 +12040,106 @@
           <a:bodyPr wrap="square" anchor="t" lIns="0" rIns="0" tIns="0" bIns="0"/>
           <a:lstStyle/>
           <a:p>
+            <a:pPr algn="ctr"/>
+            <a:r>
+              <a:rPr sz="1700" b="1" i="0">
+                <a:solidFill>
+                  <a:srgbClr val="03306E"/>
+                </a:solidFill>
+                <a:latin typeface="Calibri"/>
+              </a:rPr>
+              <a:t>Clean</a:t>
+            </a:r>
+          </a:p>
+        </p:txBody>
+      </p:sp>
+      <p:sp>
+        <p:nvSpPr>
+          <p:cNvPr id="13" name="Rounded Rectangle 12"/>
+          <p:cNvSpPr/>
+          <p:nvPr/>
+        </p:nvSpPr>
+        <p:spPr>
+          <a:xfrm>
+            <a:off x="2794955" y="3771900"/>
+            <a:ext cx="2109155" cy="960120"/>
+          </a:xfrm>
+          <a:prstGeom prst="roundRect">
+            <a:avLst>
+              <a:gd name="adj" fmla="val 6000"/>
+            </a:avLst>
+          </a:prstGeom>
+          <a:solidFill>
+            <a:srgbClr val="EAF3FF"/>
+          </a:solidFill>
+          <a:ln>
+            <a:noFill/>
+          </a:ln>
+          <a:effectLst/>
+        </p:spPr>
+        <p:style>
+          <a:lnRef idx="1">
+            <a:schemeClr val="accent1"/>
+          </a:lnRef>
+          <a:fillRef idx="3">
+            <a:schemeClr val="accent1"/>
+          </a:fillRef>
+          <a:effectRef idx="2">
+            <a:schemeClr val="accent1"/>
+          </a:effectRef>
+          <a:fontRef idx="minor">
+            <a:schemeClr val="lt1"/>
+          </a:fontRef>
+        </p:style>
+        <p:txBody>
+          <a:bodyPr rtlCol="0" anchor="ctr"/>
+          <a:lstStyle/>
+          <a:p/>
+        </p:txBody>
+      </p:sp>
+      <p:sp>
+        <p:nvSpPr>
+          <p:cNvPr id="14" name="TextBox 13"/>
+          <p:cNvSpPr txBox="1"/>
+          <p:nvPr/>
+        </p:nvSpPr>
+        <p:spPr>
+          <a:xfrm>
+            <a:off x="2932115" y="3909060"/>
+            <a:ext cx="1834835" cy="685800"/>
+          </a:xfrm>
+          <a:prstGeom prst="rect">
+            <a:avLst/>
+          </a:prstGeom>
+          <a:noFill/>
+        </p:spPr>
+        <p:txBody>
+          <a:bodyPr wrap="square" anchor="t" lIns="0" rIns="0" tIns="0" bIns="0"/>
+          <a:lstStyle/>
+          <a:p>
             <a:pPr algn="l"/>
             <a:r>
-              <a:rPr sz="2200" b="0" i="0">
+              <a:rPr sz="1800" b="0" i="0">
                 <a:solidFill>
                   <a:srgbClr val="202122"/>
                 </a:solidFill>
                 <a:latin typeface="Calibri"/>
               </a:rPr>
-              <a:t>What is a transposition error?</a:t>
-            </a:r>
-          </a:p>
-        </p:txBody>
-      </p:sp>
-      <p:sp>
-        <p:nvSpPr>
-          <p:cNvPr id="10" name="Oval 9"/>
+              <a:t>Remove errors and duplicates.</a:t>
+            </a:r>
+          </a:p>
+        </p:txBody>
+      </p:sp>
+      <p:sp>
+        <p:nvSpPr>
+          <p:cNvPr id="15" name="Oval 14"/>
           <p:cNvSpPr/>
           <p:nvPr/>
         </p:nvSpPr>
         <p:spPr>
           <a:xfrm>
-            <a:off x="548640" y="4009644"/>
-            <a:ext cx="411480" cy="411480"/>
+            <a:off x="5775807" y="2217420"/>
+            <a:ext cx="640080" cy="640080"/>
           </a:xfrm>
           <a:prstGeom prst="ellipse">
             <a:avLst/>
@@ -9274,7 +12172,7 @@
           <a:p>
             <a:pPr algn="ctr"/>
             <a:r>
-              <a:rPr sz="1400" b="1">
+              <a:rPr sz="2000" b="1">
                 <a:solidFill>
                   <a:srgbClr val="202122"/>
                 </a:solidFill>
@@ -9287,14 +12185,14 @@
       </p:sp>
       <p:sp>
         <p:nvSpPr>
-          <p:cNvPr id="11" name="TextBox 10"/>
-          <p:cNvSpPr txBox="1"/>
-          <p:nvPr/>
-        </p:nvSpPr>
-        <p:spPr>
-          <a:xfrm>
-            <a:off x="1234440" y="3991356"/>
-            <a:ext cx="10408615" cy="1030986"/>
+          <p:cNvPr id="16" name="TextBox 15"/>
+          <p:cNvSpPr txBox="1"/>
+          <p:nvPr/>
+        </p:nvSpPr>
+        <p:spPr>
+          <a:xfrm>
+            <a:off x="5041270" y="2994660"/>
+            <a:ext cx="2109155" cy="731520"/>
           </a:xfrm>
           <a:prstGeom prst="rect">
             <a:avLst/>
@@ -9305,29 +12203,106 @@
           <a:bodyPr wrap="square" anchor="t" lIns="0" rIns="0" tIns="0" bIns="0"/>
           <a:lstStyle/>
           <a:p>
+            <a:pPr algn="ctr"/>
+            <a:r>
+              <a:rPr sz="1700" b="1" i="0">
+                <a:solidFill>
+                  <a:srgbClr val="03306E"/>
+                </a:solidFill>
+                <a:latin typeface="Calibri"/>
+              </a:rPr>
+              <a:t>Validate</a:t>
+            </a:r>
+          </a:p>
+        </p:txBody>
+      </p:sp>
+      <p:sp>
+        <p:nvSpPr>
+          <p:cNvPr id="17" name="Rounded Rectangle 16"/>
+          <p:cNvSpPr/>
+          <p:nvPr/>
+        </p:nvSpPr>
+        <p:spPr>
+          <a:xfrm>
+            <a:off x="5041270" y="3771900"/>
+            <a:ext cx="2109155" cy="960120"/>
+          </a:xfrm>
+          <a:prstGeom prst="roundRect">
+            <a:avLst>
+              <a:gd name="adj" fmla="val 6000"/>
+            </a:avLst>
+          </a:prstGeom>
+          <a:solidFill>
+            <a:srgbClr val="EAF3FF"/>
+          </a:solidFill>
+          <a:ln>
+            <a:noFill/>
+          </a:ln>
+          <a:effectLst/>
+        </p:spPr>
+        <p:style>
+          <a:lnRef idx="1">
+            <a:schemeClr val="accent1"/>
+          </a:lnRef>
+          <a:fillRef idx="3">
+            <a:schemeClr val="accent1"/>
+          </a:fillRef>
+          <a:effectRef idx="2">
+            <a:schemeClr val="accent1"/>
+          </a:effectRef>
+          <a:fontRef idx="minor">
+            <a:schemeClr val="lt1"/>
+          </a:fontRef>
+        </p:style>
+        <p:txBody>
+          <a:bodyPr rtlCol="0" anchor="ctr"/>
+          <a:lstStyle/>
+          <a:p/>
+        </p:txBody>
+      </p:sp>
+      <p:sp>
+        <p:nvSpPr>
+          <p:cNvPr id="18" name="TextBox 17"/>
+          <p:cNvSpPr txBox="1"/>
+          <p:nvPr/>
+        </p:nvSpPr>
+        <p:spPr>
+          <a:xfrm>
+            <a:off x="5178430" y="3909060"/>
+            <a:ext cx="1834835" cy="685800"/>
+          </a:xfrm>
+          <a:prstGeom prst="rect">
+            <a:avLst/>
+          </a:prstGeom>
+          <a:noFill/>
+        </p:spPr>
+        <p:txBody>
+          <a:bodyPr wrap="square" anchor="t" lIns="0" rIns="0" tIns="0" bIns="0"/>
+          <a:lstStyle/>
+          <a:p>
             <a:pPr algn="l"/>
             <a:r>
-              <a:rPr sz="2200" b="0" i="0">
+              <a:rPr sz="1800" b="0" i="0">
                 <a:solidFill>
                   <a:srgbClr val="202122"/>
                 </a:solidFill>
                 <a:latin typeface="Calibri"/>
               </a:rPr>
-              <a:t>Which data model uses linked tables?</a:t>
-            </a:r>
-          </a:p>
-        </p:txBody>
-      </p:sp>
-      <p:sp>
-        <p:nvSpPr>
-          <p:cNvPr id="12" name="Oval 11"/>
+              <a:t>Check it meets rules.</a:t>
+            </a:r>
+          </a:p>
+        </p:txBody>
+      </p:sp>
+      <p:sp>
+        <p:nvSpPr>
+          <p:cNvPr id="19" name="Oval 18"/>
           <p:cNvSpPr/>
           <p:nvPr/>
         </p:nvSpPr>
         <p:spPr>
           <a:xfrm>
-            <a:off x="548640" y="5205221"/>
-            <a:ext cx="411480" cy="411480"/>
+            <a:off x="8022122" y="2217420"/>
+            <a:ext cx="640080" cy="640080"/>
           </a:xfrm>
           <a:prstGeom prst="ellipse">
             <a:avLst/>
@@ -9360,7 +12335,7 @@
           <a:p>
             <a:pPr algn="ctr"/>
             <a:r>
-              <a:rPr sz="1400" b="1">
+              <a:rPr sz="2000" b="1">
                 <a:solidFill>
                   <a:srgbClr val="202122"/>
                 </a:solidFill>
@@ -9373,14 +12348,14 @@
       </p:sp>
       <p:sp>
         <p:nvSpPr>
-          <p:cNvPr id="13" name="TextBox 12"/>
-          <p:cNvSpPr txBox="1"/>
-          <p:nvPr/>
-        </p:nvSpPr>
-        <p:spPr>
-          <a:xfrm>
-            <a:off x="1234440" y="5186933"/>
-            <a:ext cx="10408615" cy="1030986"/>
+          <p:cNvPr id="20" name="TextBox 19"/>
+          <p:cNvSpPr txBox="1"/>
+          <p:nvPr/>
+        </p:nvSpPr>
+        <p:spPr>
+          <a:xfrm>
+            <a:off x="7287585" y="2994660"/>
+            <a:ext cx="2109155" cy="731520"/>
           </a:xfrm>
           <a:prstGeom prst="rect">
             <a:avLst/>
@@ -9391,15 +12366,288 @@
           <a:bodyPr wrap="square" anchor="t" lIns="0" rIns="0" tIns="0" bIns="0"/>
           <a:lstStyle/>
           <a:p>
+            <a:pPr algn="ctr"/>
+            <a:r>
+              <a:rPr sz="1700" b="1" i="0">
+                <a:solidFill>
+                  <a:srgbClr val="03306E"/>
+                </a:solidFill>
+                <a:latin typeface="Calibri"/>
+              </a:rPr>
+              <a:t>Enrich</a:t>
+            </a:r>
+          </a:p>
+        </p:txBody>
+      </p:sp>
+      <p:sp>
+        <p:nvSpPr>
+          <p:cNvPr id="21" name="Rounded Rectangle 20"/>
+          <p:cNvSpPr/>
+          <p:nvPr/>
+        </p:nvSpPr>
+        <p:spPr>
+          <a:xfrm>
+            <a:off x="7287585" y="3771900"/>
+            <a:ext cx="2109155" cy="960120"/>
+          </a:xfrm>
+          <a:prstGeom prst="roundRect">
+            <a:avLst>
+              <a:gd name="adj" fmla="val 6000"/>
+            </a:avLst>
+          </a:prstGeom>
+          <a:solidFill>
+            <a:srgbClr val="EAF3FF"/>
+          </a:solidFill>
+          <a:ln>
+            <a:noFill/>
+          </a:ln>
+          <a:effectLst/>
+        </p:spPr>
+        <p:style>
+          <a:lnRef idx="1">
+            <a:schemeClr val="accent1"/>
+          </a:lnRef>
+          <a:fillRef idx="3">
+            <a:schemeClr val="accent1"/>
+          </a:fillRef>
+          <a:effectRef idx="2">
+            <a:schemeClr val="accent1"/>
+          </a:effectRef>
+          <a:fontRef idx="minor">
+            <a:schemeClr val="lt1"/>
+          </a:fontRef>
+        </p:style>
+        <p:txBody>
+          <a:bodyPr rtlCol="0" anchor="ctr"/>
+          <a:lstStyle/>
+          <a:p/>
+        </p:txBody>
+      </p:sp>
+      <p:sp>
+        <p:nvSpPr>
+          <p:cNvPr id="22" name="TextBox 21"/>
+          <p:cNvSpPr txBox="1"/>
+          <p:nvPr/>
+        </p:nvSpPr>
+        <p:spPr>
+          <a:xfrm>
+            <a:off x="7424745" y="3909060"/>
+            <a:ext cx="1834835" cy="685800"/>
+          </a:xfrm>
+          <a:prstGeom prst="rect">
+            <a:avLst/>
+          </a:prstGeom>
+          <a:noFill/>
+        </p:spPr>
+        <p:txBody>
+          <a:bodyPr wrap="square" anchor="t" lIns="0" rIns="0" tIns="0" bIns="0"/>
+          <a:lstStyle/>
+          <a:p>
             <a:pPr algn="l"/>
             <a:r>
-              <a:rPr sz="2200" b="0" i="0">
+              <a:rPr sz="1800" b="0" i="0">
                 <a:solidFill>
                   <a:srgbClr val="202122"/>
                 </a:solidFill>
                 <a:latin typeface="Calibri"/>
               </a:rPr>
-              <a:t>What does a data lake hold?</a:t>
+              <a:t>Add useful data.</a:t>
+            </a:r>
+          </a:p>
+        </p:txBody>
+      </p:sp>
+      <p:sp>
+        <p:nvSpPr>
+          <p:cNvPr id="23" name="Oval 22"/>
+          <p:cNvSpPr/>
+          <p:nvPr/>
+        </p:nvSpPr>
+        <p:spPr>
+          <a:xfrm>
+            <a:off x="10268437" y="2217420"/>
+            <a:ext cx="640080" cy="640080"/>
+          </a:xfrm>
+          <a:prstGeom prst="ellipse">
+            <a:avLst/>
+          </a:prstGeom>
+          <a:solidFill>
+            <a:srgbClr val="F2B705"/>
+          </a:solidFill>
+          <a:ln>
+            <a:noFill/>
+          </a:ln>
+          <a:effectLst/>
+        </p:spPr>
+        <p:style>
+          <a:lnRef idx="1">
+            <a:schemeClr val="accent1"/>
+          </a:lnRef>
+          <a:fillRef idx="3">
+            <a:schemeClr val="accent1"/>
+          </a:fillRef>
+          <a:effectRef idx="2">
+            <a:schemeClr val="accent1"/>
+          </a:effectRef>
+          <a:fontRef idx="minor">
+            <a:schemeClr val="lt1"/>
+          </a:fontRef>
+        </p:style>
+        <p:txBody>
+          <a:bodyPr rtlCol="0" anchor="ctr" lIns="0" rIns="0" tIns="0" bIns="0"/>
+          <a:lstStyle/>
+          <a:p>
+            <a:pPr algn="ctr"/>
+            <a:r>
+              <a:rPr sz="2000" b="1">
+                <a:solidFill>
+                  <a:srgbClr val="202122"/>
+                </a:solidFill>
+                <a:latin typeface="Calibri"/>
+              </a:rPr>
+              <a:t>5</a:t>
+            </a:r>
+          </a:p>
+        </p:txBody>
+      </p:sp>
+      <p:sp>
+        <p:nvSpPr>
+          <p:cNvPr id="24" name="TextBox 23"/>
+          <p:cNvSpPr txBox="1"/>
+          <p:nvPr/>
+        </p:nvSpPr>
+        <p:spPr>
+          <a:xfrm>
+            <a:off x="9533900" y="2994660"/>
+            <a:ext cx="2109155" cy="731520"/>
+          </a:xfrm>
+          <a:prstGeom prst="rect">
+            <a:avLst/>
+          </a:prstGeom>
+          <a:noFill/>
+        </p:spPr>
+        <p:txBody>
+          <a:bodyPr wrap="square" anchor="t" lIns="0" rIns="0" tIns="0" bIns="0"/>
+          <a:lstStyle/>
+          <a:p>
+            <a:pPr algn="ctr"/>
+            <a:r>
+              <a:rPr sz="1700" b="1" i="0">
+                <a:solidFill>
+                  <a:srgbClr val="03306E"/>
+                </a:solidFill>
+                <a:latin typeface="Calibri"/>
+              </a:rPr>
+              <a:t>Output</a:t>
+            </a:r>
+          </a:p>
+        </p:txBody>
+      </p:sp>
+      <p:sp>
+        <p:nvSpPr>
+          <p:cNvPr id="25" name="Rounded Rectangle 24"/>
+          <p:cNvSpPr/>
+          <p:nvPr/>
+        </p:nvSpPr>
+        <p:spPr>
+          <a:xfrm>
+            <a:off x="9533900" y="3771900"/>
+            <a:ext cx="2109155" cy="960120"/>
+          </a:xfrm>
+          <a:prstGeom prst="roundRect">
+            <a:avLst>
+              <a:gd name="adj" fmla="val 6000"/>
+            </a:avLst>
+          </a:prstGeom>
+          <a:solidFill>
+            <a:srgbClr val="EAF3FF"/>
+          </a:solidFill>
+          <a:ln>
+            <a:noFill/>
+          </a:ln>
+          <a:effectLst/>
+        </p:spPr>
+        <p:style>
+          <a:lnRef idx="1">
+            <a:schemeClr val="accent1"/>
+          </a:lnRef>
+          <a:fillRef idx="3">
+            <a:schemeClr val="accent1"/>
+          </a:fillRef>
+          <a:effectRef idx="2">
+            <a:schemeClr val="accent1"/>
+          </a:effectRef>
+          <a:fontRef idx="minor">
+            <a:schemeClr val="lt1"/>
+          </a:fontRef>
+        </p:style>
+        <p:txBody>
+          <a:bodyPr rtlCol="0" anchor="ctr"/>
+          <a:lstStyle/>
+          <a:p/>
+        </p:txBody>
+      </p:sp>
+      <p:sp>
+        <p:nvSpPr>
+          <p:cNvPr id="26" name="TextBox 25"/>
+          <p:cNvSpPr txBox="1"/>
+          <p:nvPr/>
+        </p:nvSpPr>
+        <p:spPr>
+          <a:xfrm>
+            <a:off x="9671060" y="3909060"/>
+            <a:ext cx="1834835" cy="685800"/>
+          </a:xfrm>
+          <a:prstGeom prst="rect">
+            <a:avLst/>
+          </a:prstGeom>
+          <a:noFill/>
+        </p:spPr>
+        <p:txBody>
+          <a:bodyPr wrap="square" anchor="t" lIns="0" rIns="0" tIns="0" bIns="0"/>
+          <a:lstStyle/>
+          <a:p>
+            <a:pPr algn="l"/>
+            <a:r>
+              <a:rPr sz="1800" b="0" i="0">
+                <a:solidFill>
+                  <a:srgbClr val="202122"/>
+                </a:solidFill>
+                <a:latin typeface="Calibri"/>
+              </a:rPr>
+              <a:t>Deliver it for use.</a:t>
+            </a:r>
+          </a:p>
+        </p:txBody>
+      </p:sp>
+      <p:sp>
+        <p:nvSpPr>
+          <p:cNvPr id="27" name="TextBox 26"/>
+          <p:cNvSpPr txBox="1"/>
+          <p:nvPr/>
+        </p:nvSpPr>
+        <p:spPr>
+          <a:xfrm>
+            <a:off x="548640" y="5006340"/>
+            <a:ext cx="11094415" cy="548640"/>
+          </a:xfrm>
+          <a:prstGeom prst="rect">
+            <a:avLst/>
+          </a:prstGeom>
+          <a:noFill/>
+        </p:spPr>
+        <p:txBody>
+          <a:bodyPr wrap="square" anchor="t" lIns="0" rIns="0" tIns="0" bIns="0"/>
+          <a:lstStyle/>
+          <a:p>
+            <a:pPr algn="l"/>
+            <a:r>
+              <a:rPr sz="1600" b="0" i="1">
+                <a:solidFill>
+                  <a:srgbClr val="54595D"/>
+                </a:solidFill>
+                <a:latin typeface="Calibri"/>
+              </a:rPr>
+              <a:t>Reduce transcription and transposition errors with validation, double entry, drop-downs and pre-filled boxes.</a:t>
             </a:r>
           </a:p>
         </p:txBody>
@@ -9491,7 +12739,7 @@
                 </a:solidFill>
                 <a:latin typeface="Cambria"/>
               </a:rPr>
-              <a:t>Answers</a:t>
+              <a:t>Quick check: Data wrangling</a:t>
             </a:r>
           </a:p>
         </p:txBody>
@@ -9570,8 +12818,8 @@
         </p:nvSpPr>
         <p:spPr>
           <a:xfrm>
-            <a:off x="548640" y="1618488"/>
-            <a:ext cx="411480" cy="411480"/>
+            <a:off x="548640" y="1691640"/>
+            <a:ext cx="502920" cy="502920"/>
           </a:xfrm>
           <a:prstGeom prst="ellipse">
             <a:avLst/>
@@ -9604,7 +12852,7 @@
           <a:p>
             <a:pPr algn="ctr"/>
             <a:r>
-              <a:rPr sz="1400" b="1">
+              <a:rPr sz="1600" b="1">
                 <a:solidFill>
                   <a:srgbClr val="202122"/>
                 </a:solidFill>
@@ -9623,8 +12871,8 @@
         </p:nvSpPr>
         <p:spPr>
           <a:xfrm>
-            <a:off x="1234440" y="1600200"/>
-            <a:ext cx="10408615" cy="1030986"/>
+            <a:off x="1371600" y="1645920"/>
+            <a:ext cx="10271455" cy="1188720"/>
           </a:xfrm>
           <a:prstGeom prst="rect">
             <a:avLst/>
@@ -9637,24 +12885,13 @@
           <a:p>
             <a:pPr algn="l"/>
             <a:r>
-              <a:rPr sz="1800" b="0" i="0">
-                <a:solidFill>
-                  <a:srgbClr val="54595D"/>
-                </a:solidFill>
-                <a:latin typeface="Calibri"/>
-              </a:rPr>
-              <a:t>Which V refers to trustworthiness?</a:t>
-            </a:r>
-          </a:p>
-          <a:p>
-            <a:r>
-              <a:rPr sz="1800" b="1">
-                <a:solidFill>
-                  <a:srgbClr val="03306E"/>
-                </a:solidFill>
-                <a:latin typeface="Calibri"/>
-              </a:rPr>
-              <a:t>Veracity.</a:t>
+              <a:rPr sz="2400" b="0" i="0">
+                <a:solidFill>
+                  <a:srgbClr val="202122"/>
+                </a:solidFill>
+                <a:latin typeface="Calibri"/>
+              </a:rPr>
+              <a:t>Name the five wrangling steps.</a:t>
             </a:r>
           </a:p>
         </p:txBody>
@@ -9667,8 +12904,8 @@
         </p:nvSpPr>
         <p:spPr>
           <a:xfrm>
-            <a:off x="548640" y="2814066"/>
-            <a:ext cx="411480" cy="411480"/>
+            <a:off x="548640" y="3108960"/>
+            <a:ext cx="502920" cy="502920"/>
           </a:xfrm>
           <a:prstGeom prst="ellipse">
             <a:avLst/>
@@ -9701,7 +12938,7 @@
           <a:p>
             <a:pPr algn="ctr"/>
             <a:r>
-              <a:rPr sz="1400" b="1">
+              <a:rPr sz="1600" b="1">
                 <a:solidFill>
                   <a:srgbClr val="202122"/>
                 </a:solidFill>
@@ -9720,8 +12957,8 @@
         </p:nvSpPr>
         <p:spPr>
           <a:xfrm>
-            <a:off x="1234440" y="2795778"/>
-            <a:ext cx="10408615" cy="1030986"/>
+            <a:off x="1371600" y="3063240"/>
+            <a:ext cx="10271455" cy="1188720"/>
           </a:xfrm>
           <a:prstGeom prst="rect">
             <a:avLst/>
@@ -9734,24 +12971,13 @@
           <a:p>
             <a:pPr algn="l"/>
             <a:r>
-              <a:rPr sz="1800" b="0" i="0">
-                <a:solidFill>
-                  <a:srgbClr val="54595D"/>
+              <a:rPr sz="2400" b="0" i="0">
+                <a:solidFill>
+                  <a:srgbClr val="202122"/>
                 </a:solidFill>
                 <a:latin typeface="Calibri"/>
               </a:rPr>
               <a:t>What is a transposition error?</a:t>
-            </a:r>
-          </a:p>
-          <a:p>
-            <a:r>
-              <a:rPr sz="1800" b="1">
-                <a:solidFill>
-                  <a:srgbClr val="03306E"/>
-                </a:solidFill>
-                <a:latin typeface="Calibri"/>
-              </a:rPr>
-              <a:t>Swapping characters, e.g. 1234 becomes 1243.</a:t>
             </a:r>
           </a:p>
         </p:txBody>
@@ -9764,8 +12990,8 @@
         </p:nvSpPr>
         <p:spPr>
           <a:xfrm>
-            <a:off x="548640" y="4009644"/>
-            <a:ext cx="411480" cy="411480"/>
+            <a:off x="548640" y="4526280"/>
+            <a:ext cx="502920" cy="502920"/>
           </a:xfrm>
           <a:prstGeom prst="ellipse">
             <a:avLst/>
@@ -9798,7 +13024,7 @@
           <a:p>
             <a:pPr algn="ctr"/>
             <a:r>
-              <a:rPr sz="1400" b="1">
+              <a:rPr sz="1600" b="1">
                 <a:solidFill>
                   <a:srgbClr val="202122"/>
                 </a:solidFill>
@@ -9817,8 +13043,8 @@
         </p:nvSpPr>
         <p:spPr>
           <a:xfrm>
-            <a:off x="1234440" y="3991356"/>
-            <a:ext cx="10408615" cy="1030986"/>
+            <a:off x="1371600" y="4480560"/>
+            <a:ext cx="10271455" cy="1188720"/>
           </a:xfrm>
           <a:prstGeom prst="rect">
             <a:avLst/>
@@ -9831,121 +13057,46 @@
           <a:p>
             <a:pPr algn="l"/>
             <a:r>
-              <a:rPr sz="1800" b="0" i="0">
+              <a:rPr sz="2400" b="0" i="0">
+                <a:solidFill>
+                  <a:srgbClr val="202122"/>
+                </a:solidFill>
+                <a:latin typeface="Calibri"/>
+              </a:rPr>
+              <a:t>Which Python library is used for wrangling CSV data?</a:t>
+            </a:r>
+          </a:p>
+        </p:txBody>
+      </p:sp>
+      <p:sp>
+        <p:nvSpPr>
+          <p:cNvPr id="12" name="TextBox 11"/>
+          <p:cNvSpPr txBox="1"/>
+          <p:nvPr/>
+        </p:nvSpPr>
+        <p:spPr>
+          <a:xfrm>
+            <a:off x="548640" y="5852160"/>
+            <a:ext cx="11094415" cy="365760"/>
+          </a:xfrm>
+          <a:prstGeom prst="rect">
+            <a:avLst/>
+          </a:prstGeom>
+          <a:noFill/>
+        </p:spPr>
+        <p:txBody>
+          <a:bodyPr wrap="square" anchor="t" lIns="0" rIns="0" tIns="0" bIns="0"/>
+          <a:lstStyle/>
+          <a:p>
+            <a:pPr algn="l"/>
+            <a:r>
+              <a:rPr sz="1300" b="0" i="1">
                 <a:solidFill>
                   <a:srgbClr val="54595D"/>
                 </a:solidFill>
                 <a:latin typeface="Calibri"/>
               </a:rPr>
-              <a:t>Which data model uses linked tables?</a:t>
-            </a:r>
-          </a:p>
-          <a:p>
-            <a:r>
-              <a:rPr sz="1800" b="1">
-                <a:solidFill>
-                  <a:srgbClr val="03306E"/>
-                </a:solidFill>
-                <a:latin typeface="Calibri"/>
-              </a:rPr>
-              <a:t>Relational.</a:t>
-            </a:r>
-          </a:p>
-        </p:txBody>
-      </p:sp>
-      <p:sp>
-        <p:nvSpPr>
-          <p:cNvPr id="12" name="Oval 11"/>
-          <p:cNvSpPr/>
-          <p:nvPr/>
-        </p:nvSpPr>
-        <p:spPr>
-          <a:xfrm>
-            <a:off x="548640" y="5205221"/>
-            <a:ext cx="411480" cy="411480"/>
-          </a:xfrm>
-          <a:prstGeom prst="ellipse">
-            <a:avLst/>
-          </a:prstGeom>
-          <a:solidFill>
-            <a:srgbClr val="F2B705"/>
-          </a:solidFill>
-          <a:ln>
-            <a:noFill/>
-          </a:ln>
-          <a:effectLst/>
-        </p:spPr>
-        <p:style>
-          <a:lnRef idx="1">
-            <a:schemeClr val="accent1"/>
-          </a:lnRef>
-          <a:fillRef idx="3">
-            <a:schemeClr val="accent1"/>
-          </a:fillRef>
-          <a:effectRef idx="2">
-            <a:schemeClr val="accent1"/>
-          </a:effectRef>
-          <a:fontRef idx="minor">
-            <a:schemeClr val="lt1"/>
-          </a:fontRef>
-        </p:style>
-        <p:txBody>
-          <a:bodyPr rtlCol="0" anchor="ctr" lIns="0" rIns="0" tIns="0" bIns="0"/>
-          <a:lstStyle/>
-          <a:p>
-            <a:pPr algn="ctr"/>
-            <a:r>
-              <a:rPr sz="1400" b="1">
-                <a:solidFill>
-                  <a:srgbClr val="202122"/>
-                </a:solidFill>
-                <a:latin typeface="Calibri"/>
-              </a:rPr>
-              <a:t>4</a:t>
-            </a:r>
-          </a:p>
-        </p:txBody>
-      </p:sp>
-      <p:sp>
-        <p:nvSpPr>
-          <p:cNvPr id="13" name="TextBox 12"/>
-          <p:cNvSpPr txBox="1"/>
-          <p:nvPr/>
-        </p:nvSpPr>
-        <p:spPr>
-          <a:xfrm>
-            <a:off x="1234440" y="5186933"/>
-            <a:ext cx="10408615" cy="1030986"/>
-          </a:xfrm>
-          <a:prstGeom prst="rect">
-            <a:avLst/>
-          </a:prstGeom>
-          <a:noFill/>
-        </p:spPr>
-        <p:txBody>
-          <a:bodyPr wrap="square" anchor="t" lIns="0" rIns="0" tIns="0" bIns="0"/>
-          <a:lstStyle/>
-          <a:p>
-            <a:pPr algn="l"/>
-            <a:r>
-              <a:rPr sz="1800" b="0" i="0">
-                <a:solidFill>
-                  <a:srgbClr val="54595D"/>
-                </a:solidFill>
-                <a:latin typeface="Calibri"/>
-              </a:rPr>
-              <a:t>What does a data lake hold?</a:t>
-            </a:r>
-          </a:p>
-          <a:p>
-            <a:r>
-              <a:rPr sz="1800" b="1">
-                <a:solidFill>
-                  <a:srgbClr val="03306E"/>
-                </a:solidFill>
-                <a:latin typeface="Calibri"/>
-              </a:rPr>
-              <a:t>Raw data in any format.</a:t>
+              <a:t>Answer on mini whiteboards or in your book. Answers are in the speaker notes.</a:t>
             </a:r>
           </a:p>
         </p:txBody>
@@ -10037,7 +13188,7 @@
                 </a:solidFill>
                 <a:latin typeface="Cambria"/>
               </a:rPr>
-              <a:t>Activity: Clean and chart</a:t>
+              <a:t>Visualisation and data models</a:t>
             </a:r>
           </a:p>
         </p:txBody>
@@ -10110,19 +13261,116 @@
       </p:sp>
       <p:sp>
         <p:nvSpPr>
-          <p:cNvPr id="6" name="Rounded Rectangle 5"/>
+          <p:cNvPr id="6" name="TextBox 5"/>
+          <p:cNvSpPr txBox="1"/>
+          <p:nvPr/>
+        </p:nvSpPr>
+        <p:spPr>
+          <a:xfrm>
+            <a:off x="548640" y="1554480"/>
+            <a:ext cx="6720840" cy="4617720"/>
+          </a:xfrm>
+          <a:prstGeom prst="rect">
+            <a:avLst/>
+          </a:prstGeom>
+          <a:noFill/>
+        </p:spPr>
+        <p:txBody>
+          <a:bodyPr wrap="square" lIns="0" rIns="0" tIns="0" bIns="0">
+            <a:spAutoFit/>
+          </a:bodyPr>
+          <a:lstStyle/>
+          <a:p>
+            <a:pPr>
+              <a:spcAft>
+                <a:spcPts val="1320"/>
+              </a:spcAft>
+            </a:pPr>
+            <a:r>
+              <a:rPr sz="2200" b="0">
+                <a:solidFill>
+                  <a:srgbClr val="202122"/>
+                </a:solidFill>
+                <a:latin typeface="Calibri"/>
+              </a:rPr>
+              <a:t>Data visualisation presents data so people understand it: graphs, charts, tables, reports, dashboards and infographics. Choose based on the type of data, the audience and the brief. A line graph shows trends over time; a bar chart compares categories.</a:t>
+            </a:r>
+          </a:p>
+          <a:p>
+            <a:pPr>
+              <a:spcAft>
+                <a:spcPts val="1320"/>
+              </a:spcAft>
+            </a:pPr>
+            <a:r>
+              <a:rPr sz="2200" b="0">
+                <a:solidFill>
+                  <a:srgbClr val="202122"/>
+                </a:solidFill>
+                <a:latin typeface="Calibri"/>
+              </a:rPr>
+              <a:t>Data models organise stored data. Hierarchical: a tree of parents and children. Network: records with many links. Relational: tables linked by keys, the most common because it avoids duplicated data and is easy to query with SQL.</a:t>
+            </a:r>
+          </a:p>
+        </p:txBody>
+      </p:sp>
+      <p:sp>
+        <p:nvSpPr>
+          <p:cNvPr id="7" name="Rounded Rectangle 6"/>
           <p:cNvSpPr/>
           <p:nvPr/>
         </p:nvSpPr>
         <p:spPr>
           <a:xfrm>
-            <a:off x="548640" y="1508760"/>
-            <a:ext cx="2011680" cy="457200"/>
+            <a:off x="7772400" y="1554480"/>
+            <a:ext cx="3867912" cy="4526280"/>
           </a:xfrm>
           <a:prstGeom prst="roundRect">
             <a:avLst>
-              <a:gd name="adj" fmla="val 50000"/>
+              <a:gd name="adj" fmla="val 8000"/>
             </a:avLst>
+          </a:prstGeom>
+          <a:solidFill>
+            <a:srgbClr val="03306E"/>
+          </a:solidFill>
+          <a:ln>
+            <a:noFill/>
+          </a:ln>
+          <a:effectLst/>
+        </p:spPr>
+        <p:style>
+          <a:lnRef idx="1">
+            <a:schemeClr val="accent1"/>
+          </a:lnRef>
+          <a:fillRef idx="3">
+            <a:schemeClr val="accent1"/>
+          </a:fillRef>
+          <a:effectRef idx="2">
+            <a:schemeClr val="accent1"/>
+          </a:effectRef>
+          <a:fontRef idx="minor">
+            <a:schemeClr val="lt1"/>
+          </a:fontRef>
+        </p:style>
+        <p:txBody>
+          <a:bodyPr rtlCol="0" anchor="ctr"/>
+          <a:lstStyle/>
+          <a:p/>
+        </p:txBody>
+      </p:sp>
+      <p:sp>
+        <p:nvSpPr>
+          <p:cNvPr id="8" name="Oval 7"/>
+          <p:cNvSpPr/>
+          <p:nvPr/>
+        </p:nvSpPr>
+        <p:spPr>
+          <a:xfrm>
+            <a:off x="8046720" y="1828800"/>
+            <a:ext cx="548640" cy="548640"/>
+          </a:xfrm>
+          <a:prstGeom prst="ellipse">
+            <a:avLst/>
           </a:prstGeom>
           <a:solidFill>
             <a:srgbClr val="F2B705"/>
@@ -10147,580 +13395,84 @@
           </a:fontRef>
         </p:style>
         <p:txBody>
-          <a:bodyPr rtlCol="0" anchor="ctr"/>
-          <a:lstStyle/>
-          <a:p/>
-        </p:txBody>
-      </p:sp>
-      <p:sp>
-        <p:nvSpPr>
-          <p:cNvPr id="7" name="TextBox 6"/>
-          <p:cNvSpPr txBox="1"/>
-          <p:nvPr/>
-        </p:nvSpPr>
-        <p:spPr>
-          <a:xfrm>
-            <a:off x="548640" y="1508760"/>
-            <a:ext cx="2011680" cy="457200"/>
-          </a:xfrm>
-          <a:prstGeom prst="rect">
-            <a:avLst/>
-          </a:prstGeom>
-          <a:noFill/>
-        </p:spPr>
-        <p:txBody>
-          <a:bodyPr wrap="square" anchor="ctr" lIns="0" rIns="0" tIns="0" bIns="0"/>
+          <a:bodyPr rtlCol="0" anchor="ctr" lIns="0" rIns="0" tIns="0" bIns="0"/>
           <a:lstStyle/>
           <a:p>
             <a:pPr algn="ctr"/>
             <a:r>
-              <a:rPr sz="1400" b="1" i="0">
+              <a:rPr sz="1300" b="1">
                 <a:solidFill>
                   <a:srgbClr val="202122"/>
                 </a:solidFill>
                 <a:latin typeface="Calibri"/>
               </a:rPr>
-              <a:t>30 minutes</a:t>
-            </a:r>
-          </a:p>
-        </p:txBody>
-      </p:sp>
-      <p:sp>
-        <p:nvSpPr>
-          <p:cNvPr id="8" name="TextBox 7"/>
-          <p:cNvSpPr txBox="1"/>
-          <p:nvPr/>
-        </p:nvSpPr>
-        <p:spPr>
-          <a:xfrm>
-            <a:off x="2743200" y="1508760"/>
-            <a:ext cx="4754880" cy="457200"/>
-          </a:xfrm>
-          <a:prstGeom prst="rect">
-            <a:avLst/>
-          </a:prstGeom>
-          <a:noFill/>
-        </p:spPr>
-        <p:txBody>
-          <a:bodyPr wrap="square" anchor="ctr" lIns="0" rIns="0" tIns="0" bIns="0"/>
+              <a:t>e.g.</a:t>
+            </a:r>
+          </a:p>
+        </p:txBody>
+      </p:sp>
+      <p:sp>
+        <p:nvSpPr>
+          <p:cNvPr id="9" name="TextBox 8"/>
+          <p:cNvSpPr txBox="1"/>
+          <p:nvPr/>
+        </p:nvSpPr>
+        <p:spPr>
+          <a:xfrm>
+            <a:off x="8046720" y="2560320"/>
+            <a:ext cx="3291840" cy="365760"/>
+          </a:xfrm>
+          <a:prstGeom prst="rect">
+            <a:avLst/>
+          </a:prstGeom>
+          <a:noFill/>
+        </p:spPr>
+        <p:txBody>
+          <a:bodyPr wrap="square" anchor="t" lIns="0" rIns="0" tIns="0" bIns="0"/>
           <a:lstStyle/>
           <a:p>
             <a:pPr algn="l"/>
             <a:r>
-              <a:rPr sz="1400" b="0" i="1">
-                <a:solidFill>
-                  <a:srgbClr val="54595D"/>
-                </a:solidFill>
-                <a:latin typeface="Calibri"/>
-              </a:rPr>
-              <a:t>Individual, in Python</a:t>
-            </a:r>
-          </a:p>
-        </p:txBody>
-      </p:sp>
-      <p:sp>
-        <p:nvSpPr>
-          <p:cNvPr id="9" name="Oval 8"/>
-          <p:cNvSpPr/>
-          <p:nvPr/>
-        </p:nvSpPr>
-        <p:spPr>
-          <a:xfrm>
-            <a:off x="548640" y="2482596"/>
-            <a:ext cx="384048" cy="384048"/>
-          </a:xfrm>
-          <a:prstGeom prst="ellipse">
-            <a:avLst/>
-          </a:prstGeom>
-          <a:solidFill>
-            <a:srgbClr val="0645AD"/>
-          </a:solidFill>
-          <a:ln>
-            <a:noFill/>
-          </a:ln>
-          <a:effectLst/>
-        </p:spPr>
-        <p:style>
-          <a:lnRef idx="1">
-            <a:schemeClr val="accent1"/>
-          </a:lnRef>
-          <a:fillRef idx="3">
-            <a:schemeClr val="accent1"/>
-          </a:fillRef>
-          <a:effectRef idx="2">
-            <a:schemeClr val="accent1"/>
-          </a:effectRef>
-          <a:fontRef idx="minor">
-            <a:schemeClr val="lt1"/>
-          </a:fontRef>
-        </p:style>
-        <p:txBody>
-          <a:bodyPr rtlCol="0" anchor="ctr" lIns="0" rIns="0" tIns="0" bIns="0"/>
-          <a:lstStyle/>
-          <a:p>
-            <a:pPr algn="ctr"/>
-            <a:r>
-              <a:rPr sz="1300" b="1">
+              <a:rPr sz="1300" b="1" i="0">
+                <a:solidFill>
+                  <a:srgbClr val="A9C8F0"/>
+                </a:solidFill>
+                <a:latin typeface="Calibri"/>
+              </a:rPr>
+              <a:t>EXAMPLE</a:t>
+            </a:r>
+          </a:p>
+        </p:txBody>
+      </p:sp>
+      <p:sp>
+        <p:nvSpPr>
+          <p:cNvPr id="10" name="TextBox 9"/>
+          <p:cNvSpPr txBox="1"/>
+          <p:nvPr/>
+        </p:nvSpPr>
+        <p:spPr>
+          <a:xfrm>
+            <a:off x="8046720" y="2971800"/>
+            <a:ext cx="3291840" cy="2971800"/>
+          </a:xfrm>
+          <a:prstGeom prst="rect">
+            <a:avLst/>
+          </a:prstGeom>
+          <a:noFill/>
+        </p:spPr>
+        <p:txBody>
+          <a:bodyPr wrap="square" anchor="t" lIns="0" rIns="0" tIns="0" bIns="0"/>
+          <a:lstStyle/>
+          <a:p>
+            <a:pPr algn="l"/>
+            <a:r>
+              <a:rPr sz="1900" b="0" i="0">
                 <a:solidFill>
                   <a:srgbClr val="FFFFFF"/>
                 </a:solidFill>
-                <a:latin typeface="Calibri"/>
-              </a:rPr>
-              <a:t>1</a:t>
-            </a:r>
-          </a:p>
-        </p:txBody>
-      </p:sp>
-      <p:sp>
-        <p:nvSpPr>
-          <p:cNvPr id="10" name="TextBox 9"/>
-          <p:cNvSpPr txBox="1"/>
-          <p:nvPr/>
-        </p:nvSpPr>
-        <p:spPr>
-          <a:xfrm>
-            <a:off x="1143000" y="2240280"/>
-            <a:ext cx="5943600" cy="868680"/>
-          </a:xfrm>
-          <a:prstGeom prst="rect">
-            <a:avLst/>
-          </a:prstGeom>
-          <a:noFill/>
-        </p:spPr>
-        <p:txBody>
-          <a:bodyPr wrap="square" anchor="ctr" lIns="0" rIns="0" tIns="0" bIns="0"/>
-          <a:lstStyle/>
-          <a:p>
-            <a:pPr algn="l"/>
-            <a:r>
-              <a:rPr sz="1700" b="0" i="0">
-                <a:solidFill>
-                  <a:srgbClr val="202122"/>
-                </a:solidFill>
-                <a:latin typeface="Calibri"/>
-              </a:rPr>
-              <a:t>Load the messy CSV from your teacher with pandas.</a:t>
-            </a:r>
-          </a:p>
-        </p:txBody>
-      </p:sp>
-      <p:sp>
-        <p:nvSpPr>
-          <p:cNvPr id="11" name="Oval 10"/>
-          <p:cNvSpPr/>
-          <p:nvPr/>
-        </p:nvSpPr>
-        <p:spPr>
-          <a:xfrm>
-            <a:off x="548640" y="3461004"/>
-            <a:ext cx="384048" cy="384048"/>
-          </a:xfrm>
-          <a:prstGeom prst="ellipse">
-            <a:avLst/>
-          </a:prstGeom>
-          <a:solidFill>
-            <a:srgbClr val="0645AD"/>
-          </a:solidFill>
-          <a:ln>
-            <a:noFill/>
-          </a:ln>
-          <a:effectLst/>
-        </p:spPr>
-        <p:style>
-          <a:lnRef idx="1">
-            <a:schemeClr val="accent1"/>
-          </a:lnRef>
-          <a:fillRef idx="3">
-            <a:schemeClr val="accent1"/>
-          </a:fillRef>
-          <a:effectRef idx="2">
-            <a:schemeClr val="accent1"/>
-          </a:effectRef>
-          <a:fontRef idx="minor">
-            <a:schemeClr val="lt1"/>
-          </a:fontRef>
-        </p:style>
-        <p:txBody>
-          <a:bodyPr rtlCol="0" anchor="ctr" lIns="0" rIns="0" tIns="0" bIns="0"/>
-          <a:lstStyle/>
-          <a:p>
-            <a:pPr algn="ctr"/>
-            <a:r>
-              <a:rPr sz="1300" b="1">
-                <a:solidFill>
-                  <a:srgbClr val="FFFFFF"/>
-                </a:solidFill>
-                <a:latin typeface="Calibri"/>
-              </a:rPr>
-              <a:t>2</a:t>
-            </a:r>
-          </a:p>
-        </p:txBody>
-      </p:sp>
-      <p:sp>
-        <p:nvSpPr>
-          <p:cNvPr id="12" name="TextBox 11"/>
-          <p:cNvSpPr txBox="1"/>
-          <p:nvPr/>
-        </p:nvSpPr>
-        <p:spPr>
-          <a:xfrm>
-            <a:off x="1143000" y="3218688"/>
-            <a:ext cx="5943600" cy="868680"/>
-          </a:xfrm>
-          <a:prstGeom prst="rect">
-            <a:avLst/>
-          </a:prstGeom>
-          <a:noFill/>
-        </p:spPr>
-        <p:txBody>
-          <a:bodyPr wrap="square" anchor="ctr" lIns="0" rIns="0" tIns="0" bIns="0"/>
-          <a:lstStyle/>
-          <a:p>
-            <a:pPr algn="l"/>
-            <a:r>
-              <a:rPr sz="1700" b="0" i="0">
-                <a:solidFill>
-                  <a:srgbClr val="202122"/>
-                </a:solidFill>
-                <a:latin typeface="Calibri"/>
-              </a:rPr>
-              <a:t>Clean it: fix inconsistent values and remove duplicates.</a:t>
-            </a:r>
-          </a:p>
-        </p:txBody>
-      </p:sp>
-      <p:sp>
-        <p:nvSpPr>
-          <p:cNvPr id="13" name="Oval 12"/>
-          <p:cNvSpPr/>
-          <p:nvPr/>
-        </p:nvSpPr>
-        <p:spPr>
-          <a:xfrm>
-            <a:off x="548640" y="4439412"/>
-            <a:ext cx="384048" cy="384048"/>
-          </a:xfrm>
-          <a:prstGeom prst="ellipse">
-            <a:avLst/>
-          </a:prstGeom>
-          <a:solidFill>
-            <a:srgbClr val="0645AD"/>
-          </a:solidFill>
-          <a:ln>
-            <a:noFill/>
-          </a:ln>
-          <a:effectLst/>
-        </p:spPr>
-        <p:style>
-          <a:lnRef idx="1">
-            <a:schemeClr val="accent1"/>
-          </a:lnRef>
-          <a:fillRef idx="3">
-            <a:schemeClr val="accent1"/>
-          </a:fillRef>
-          <a:effectRef idx="2">
-            <a:schemeClr val="accent1"/>
-          </a:effectRef>
-          <a:fontRef idx="minor">
-            <a:schemeClr val="lt1"/>
-          </a:fontRef>
-        </p:style>
-        <p:txBody>
-          <a:bodyPr rtlCol="0" anchor="ctr" lIns="0" rIns="0" tIns="0" bIns="0"/>
-          <a:lstStyle/>
-          <a:p>
-            <a:pPr algn="ctr"/>
-            <a:r>
-              <a:rPr sz="1300" b="1">
-                <a:solidFill>
-                  <a:srgbClr val="FFFFFF"/>
-                </a:solidFill>
-                <a:latin typeface="Calibri"/>
-              </a:rPr>
-              <a:t>3</a:t>
-            </a:r>
-          </a:p>
-        </p:txBody>
-      </p:sp>
-      <p:sp>
-        <p:nvSpPr>
-          <p:cNvPr id="14" name="TextBox 13"/>
-          <p:cNvSpPr txBox="1"/>
-          <p:nvPr/>
-        </p:nvSpPr>
-        <p:spPr>
-          <a:xfrm>
-            <a:off x="1143000" y="4197096"/>
-            <a:ext cx="5943600" cy="868680"/>
-          </a:xfrm>
-          <a:prstGeom prst="rect">
-            <a:avLst/>
-          </a:prstGeom>
-          <a:noFill/>
-        </p:spPr>
-        <p:txBody>
-          <a:bodyPr wrap="square" anchor="ctr" lIns="0" rIns="0" tIns="0" bIns="0"/>
-          <a:lstStyle/>
-          <a:p>
-            <a:pPr algn="l"/>
-            <a:r>
-              <a:rPr sz="1700" b="0" i="0">
-                <a:solidFill>
-                  <a:srgbClr val="202122"/>
-                </a:solidFill>
-                <a:latin typeface="Calibri"/>
-              </a:rPr>
-              <a:t>Calculate a total and an average.</a:t>
-            </a:r>
-          </a:p>
-        </p:txBody>
-      </p:sp>
-      <p:sp>
-        <p:nvSpPr>
-          <p:cNvPr id="15" name="Oval 14"/>
-          <p:cNvSpPr/>
-          <p:nvPr/>
-        </p:nvSpPr>
-        <p:spPr>
-          <a:xfrm>
-            <a:off x="548640" y="5417820"/>
-            <a:ext cx="384048" cy="384048"/>
-          </a:xfrm>
-          <a:prstGeom prst="ellipse">
-            <a:avLst/>
-          </a:prstGeom>
-          <a:solidFill>
-            <a:srgbClr val="0645AD"/>
-          </a:solidFill>
-          <a:ln>
-            <a:noFill/>
-          </a:ln>
-          <a:effectLst/>
-        </p:spPr>
-        <p:style>
-          <a:lnRef idx="1">
-            <a:schemeClr val="accent1"/>
-          </a:lnRef>
-          <a:fillRef idx="3">
-            <a:schemeClr val="accent1"/>
-          </a:fillRef>
-          <a:effectRef idx="2">
-            <a:schemeClr val="accent1"/>
-          </a:effectRef>
-          <a:fontRef idx="minor">
-            <a:schemeClr val="lt1"/>
-          </a:fontRef>
-        </p:style>
-        <p:txBody>
-          <a:bodyPr rtlCol="0" anchor="ctr" lIns="0" rIns="0" tIns="0" bIns="0"/>
-          <a:lstStyle/>
-          <a:p>
-            <a:pPr algn="ctr"/>
-            <a:r>
-              <a:rPr sz="1300" b="1">
-                <a:solidFill>
-                  <a:srgbClr val="FFFFFF"/>
-                </a:solidFill>
-                <a:latin typeface="Calibri"/>
-              </a:rPr>
-              <a:t>4</a:t>
-            </a:r>
-          </a:p>
-        </p:txBody>
-      </p:sp>
-      <p:sp>
-        <p:nvSpPr>
-          <p:cNvPr id="16" name="TextBox 15"/>
-          <p:cNvSpPr txBox="1"/>
-          <p:nvPr/>
-        </p:nvSpPr>
-        <p:spPr>
-          <a:xfrm>
-            <a:off x="1143000" y="5175504"/>
-            <a:ext cx="5943600" cy="868680"/>
-          </a:xfrm>
-          <a:prstGeom prst="rect">
-            <a:avLst/>
-          </a:prstGeom>
-          <a:noFill/>
-        </p:spPr>
-        <p:txBody>
-          <a:bodyPr wrap="square" anchor="ctr" lIns="0" rIns="0" tIns="0" bIns="0"/>
-          <a:lstStyle/>
-          <a:p>
-            <a:pPr algn="l"/>
-            <a:r>
-              <a:rPr sz="1700" b="0" i="0">
-                <a:solidFill>
-                  <a:srgbClr val="202122"/>
-                </a:solidFill>
-                <a:latin typeface="Calibri"/>
-              </a:rPr>
-              <a:t>Plot a labelled chart with Matplotlib for a manager.</a:t>
-            </a:r>
-          </a:p>
-        </p:txBody>
-      </p:sp>
-      <p:sp>
-        <p:nvSpPr>
-          <p:cNvPr id="17" name="Rounded Rectangle 16"/>
-          <p:cNvSpPr/>
-          <p:nvPr/>
-        </p:nvSpPr>
-        <p:spPr>
-          <a:xfrm>
-            <a:off x="7772400" y="1508760"/>
-            <a:ext cx="3867912" cy="4572000"/>
-          </a:xfrm>
-          <a:prstGeom prst="roundRect">
-            <a:avLst>
-              <a:gd name="adj" fmla="val 8000"/>
-            </a:avLst>
-          </a:prstGeom>
-          <a:solidFill>
-            <a:srgbClr val="EAF3FF"/>
-          </a:solidFill>
-          <a:ln>
-            <a:noFill/>
-          </a:ln>
-          <a:effectLst/>
-        </p:spPr>
-        <p:style>
-          <a:lnRef idx="1">
-            <a:schemeClr val="accent1"/>
-          </a:lnRef>
-          <a:fillRef idx="3">
-            <a:schemeClr val="accent1"/>
-          </a:fillRef>
-          <a:effectRef idx="2">
-            <a:schemeClr val="accent1"/>
-          </a:effectRef>
-          <a:fontRef idx="minor">
-            <a:schemeClr val="lt1"/>
-          </a:fontRef>
-        </p:style>
-        <p:txBody>
-          <a:bodyPr rtlCol="0" anchor="ctr"/>
-          <a:lstStyle/>
-          <a:p/>
-        </p:txBody>
-      </p:sp>
-      <p:sp>
-        <p:nvSpPr>
-          <p:cNvPr id="18" name="TextBox 17"/>
-          <p:cNvSpPr txBox="1"/>
-          <p:nvPr/>
-        </p:nvSpPr>
-        <p:spPr>
-          <a:xfrm>
-            <a:off x="8046720" y="1737360"/>
-            <a:ext cx="3291840" cy="365760"/>
-          </a:xfrm>
-          <a:prstGeom prst="rect">
-            <a:avLst/>
-          </a:prstGeom>
-          <a:noFill/>
-        </p:spPr>
-        <p:txBody>
-          <a:bodyPr wrap="square" anchor="t" lIns="0" rIns="0" tIns="0" bIns="0"/>
-          <a:lstStyle/>
-          <a:p>
-            <a:pPr algn="l"/>
-            <a:r>
-              <a:rPr sz="1300" b="1" i="0">
-                <a:solidFill>
-                  <a:srgbClr val="0645AD"/>
-                </a:solidFill>
-                <a:latin typeface="Calibri"/>
-              </a:rPr>
-              <a:t>SUCCESS CRITERIA</a:t>
-            </a:r>
-          </a:p>
-        </p:txBody>
-      </p:sp>
-      <p:sp>
-        <p:nvSpPr>
-          <p:cNvPr id="19" name="TextBox 18"/>
-          <p:cNvSpPr txBox="1"/>
-          <p:nvPr/>
-        </p:nvSpPr>
-        <p:spPr>
-          <a:xfrm>
-            <a:off x="8046720" y="2240280"/>
-            <a:ext cx="3337560" cy="3657600"/>
-          </a:xfrm>
-          <a:prstGeom prst="rect">
-            <a:avLst/>
-          </a:prstGeom>
-          <a:noFill/>
-        </p:spPr>
-        <p:txBody>
-          <a:bodyPr wrap="square" lIns="0" rIns="0" tIns="0" bIns="0">
-            <a:spAutoFit/>
-          </a:bodyPr>
-          <a:lstStyle/>
-          <a:p>
-            <a:pPr marL="274320" indent="-274320">
-              <a:spcAft>
-                <a:spcPts val="810"/>
-              </a:spcAft>
-              <a:buClr>
-                <a:srgbClr val="0645AD"/>
-              </a:buClr>
-              <a:buFont typeface="Arial"/>
-              <a:buChar char="•"/>
-            </a:pPr>
-            <a:r>
-              <a:rPr sz="1800" b="0">
-                <a:solidFill>
-                  <a:srgbClr val="202122"/>
-                </a:solidFill>
-                <a:latin typeface="Calibri"/>
-              </a:rPr>
-              <a:t>Duplicates removed</a:t>
-            </a:r>
-          </a:p>
-          <a:p>
-            <a:pPr marL="274320" indent="-274320">
-              <a:spcAft>
-                <a:spcPts val="810"/>
-              </a:spcAft>
-              <a:buClr>
-                <a:srgbClr val="0645AD"/>
-              </a:buClr>
-              <a:buFont typeface="Arial"/>
-              <a:buChar char="•"/>
-            </a:pPr>
-            <a:r>
-              <a:rPr sz="1800" b="0">
-                <a:solidFill>
-                  <a:srgbClr val="202122"/>
-                </a:solidFill>
-                <a:latin typeface="Calibri"/>
-              </a:rPr>
-              <a:t>Calculations correct</a:t>
-            </a:r>
-          </a:p>
-          <a:p>
-            <a:pPr marL="274320" indent="-274320">
-              <a:spcAft>
-                <a:spcPts val="810"/>
-              </a:spcAft>
-              <a:buClr>
-                <a:srgbClr val="0645AD"/>
-              </a:buClr>
-              <a:buFont typeface="Arial"/>
-              <a:buChar char="•"/>
-            </a:pPr>
-            <a:r>
-              <a:rPr sz="1800" b="0">
-                <a:solidFill>
-                  <a:srgbClr val="202122"/>
-                </a:solidFill>
-                <a:latin typeface="Calibri"/>
-              </a:rPr>
-              <a:t>Chart has title, labels and legend</a:t>
+                <a:latin typeface="Cambria"/>
+              </a:rPr>
+              <a:t>Matplotlib: plt.plot(months, sales); plt.title('Sales by month'); plt.xlabel('Month'); plt.show() produces a labelled trend line.</a:t>
             </a:r>
           </a:p>
         </p:txBody>
